--- a/templates/report_template.pptx
+++ b/templates/report_template.pptx
@@ -45,7 +45,7 @@
       </p:grpSpPr>
       <p:sp>
         <p:nvSpPr>
-          <p:cNvPr id="15" name="PlaceHolder 1"/>
+          <p:cNvPr id="16" name="PlaceHolder 1"/>
           <p:cNvSpPr>
             <a:spLocks noGrp="1"/>
           </p:cNvSpPr>
@@ -55,8 +55,8 @@
         </p:nvSpPr>
         <p:spPr>
           <a:xfrm>
-            <a:off x="533520" y="764280"/>
-            <a:ext cx="6704640" cy="3771360"/>
+            <a:off x="0" y="764280"/>
+            <a:ext cx="0" cy="0"/>
           </a:xfrm>
           <a:prstGeom prst="rect">
             <a:avLst/>
@@ -96,7 +96,7 @@
       </p:sp>
       <p:sp>
         <p:nvSpPr>
-          <p:cNvPr id="16" name="PlaceHolder 2"/>
+          <p:cNvPr id="17" name="PlaceHolder 2"/>
           <p:cNvSpPr>
             <a:spLocks noGrp="1"/>
           </p:cNvSpPr>
@@ -149,7 +149,7 @@
       </p:sp>
       <p:sp>
         <p:nvSpPr>
-          <p:cNvPr id="17" name="PlaceHolder 3"/>
+          <p:cNvPr id="18" name="PlaceHolder 3"/>
           <p:cNvSpPr>
             <a:spLocks noGrp="1"/>
           </p:cNvSpPr>
@@ -202,7 +202,7 @@
       </p:sp>
       <p:sp>
         <p:nvSpPr>
-          <p:cNvPr id="18" name="PlaceHolder 4"/>
+          <p:cNvPr id="19" name="PlaceHolder 4"/>
           <p:cNvSpPr>
             <a:spLocks noGrp="1"/>
           </p:cNvSpPr>
@@ -268,7 +268,7 @@
       </p:sp>
       <p:sp>
         <p:nvSpPr>
-          <p:cNvPr id="19" name="PlaceHolder 5"/>
+          <p:cNvPr id="20" name="PlaceHolder 5"/>
           <p:cNvSpPr>
             <a:spLocks noGrp="1"/>
           </p:cNvSpPr>
@@ -334,7 +334,7 @@
       </p:sp>
       <p:sp>
         <p:nvSpPr>
-          <p:cNvPr id="20" name="PlaceHolder 6"/>
+          <p:cNvPr id="21" name="PlaceHolder 6"/>
           <p:cNvSpPr>
             <a:spLocks noGrp="1"/>
           </p:cNvSpPr>
@@ -376,7 +376,7 @@
             <a:pPr indent="0" algn="r">
               <a:buNone/>
             </a:pPr>
-            <a:fld id="{C9B9165F-D84E-420C-BC39-13B6EB979AE6}" type="slidenum">
+            <a:fld id="{F12EC7C9-6571-4807-BE44-414124355211}" type="slidenum">
               <a:rPr lang="en-US" sz="1400" b="0" u="none" strike="noStrike">
                 <a:solidFill>
                   <a:srgbClr val="000000"/>
@@ -423,7 +423,7 @@
       </p:grpSpPr>
       <p:sp>
         <p:nvSpPr>
-          <p:cNvPr id="68" name="PlaceHolder 1"/>
+          <p:cNvPr id="69" name="PlaceHolder 1"/>
           <p:cNvSpPr>
             <a:spLocks noGrp="1"/>
           </p:cNvSpPr>
@@ -434,7 +434,7 @@
         <p:spPr>
           <a:xfrm>
             <a:off x="1371600" y="768240"/>
-            <a:ext cx="5029200" cy="3767400"/>
+            <a:ext cx="5028840" cy="3767040"/>
           </a:xfrm>
           <a:prstGeom prst="rect">
             <a:avLst/>
@@ -446,7 +446,7 @@
       </p:sp>
       <p:sp>
         <p:nvSpPr>
-          <p:cNvPr id="69" name="PlaceHolder 2"/>
+          <p:cNvPr id="70" name="PlaceHolder 2"/>
           <p:cNvSpPr>
             <a:spLocks noGrp="1"/>
           </p:cNvSpPr>
@@ -457,7 +457,7 @@
         <p:spPr>
           <a:xfrm>
             <a:off x="777240" y="4773240"/>
-            <a:ext cx="6217920" cy="4526280"/>
+            <a:ext cx="6217560" cy="4526640"/>
           </a:xfrm>
           <a:prstGeom prst="rect">
             <a:avLst/>
@@ -473,6 +473,9 @@
           </a:bodyPr>
           <a:p>
             <a:pPr marL="139680" indent="-139680" rtl="1">
+              <a:lnSpc>
+                <a:spcPct val="100000"/>
+              </a:lnSpc>
               <a:buClr>
                 <a:srgbClr val="000000"/>
               </a:buClr>
@@ -503,6 +506,9 @@
           </a:p>
           <a:p>
             <a:pPr marL="139680" indent="-139680" rtl="1">
+              <a:lnSpc>
+                <a:spcPct val="100000"/>
+              </a:lnSpc>
               <a:buClr>
                 <a:srgbClr val="000000"/>
               </a:buClr>
@@ -533,6 +539,9 @@
           </a:p>
           <a:p>
             <a:pPr marL="139680" indent="-139680" rtl="1">
+              <a:lnSpc>
+                <a:spcPct val="100000"/>
+              </a:lnSpc>
               <a:buClr>
                 <a:srgbClr val="000000"/>
               </a:buClr>
@@ -587,7 +596,7 @@
       </p:grpSpPr>
       <p:sp>
         <p:nvSpPr>
-          <p:cNvPr id="70" name="PlaceHolder 1"/>
+          <p:cNvPr id="71" name="PlaceHolder 1"/>
           <p:cNvSpPr>
             <a:spLocks noGrp="1"/>
           </p:cNvSpPr>
@@ -598,7 +607,7 @@
         <p:spPr>
           <a:xfrm>
             <a:off x="1371600" y="768240"/>
-            <a:ext cx="5029200" cy="3767400"/>
+            <a:ext cx="5028840" cy="3767040"/>
           </a:xfrm>
           <a:prstGeom prst="rect">
             <a:avLst/>
@@ -610,7 +619,7 @@
       </p:sp>
       <p:sp>
         <p:nvSpPr>
-          <p:cNvPr id="71" name="PlaceHolder 2"/>
+          <p:cNvPr id="72" name="PlaceHolder 2"/>
           <p:cNvSpPr>
             <a:spLocks noGrp="1"/>
           </p:cNvSpPr>
@@ -621,7 +630,7 @@
         <p:spPr>
           <a:xfrm>
             <a:off x="777240" y="4773240"/>
-            <a:ext cx="6217920" cy="4526280"/>
+            <a:ext cx="6217560" cy="4526640"/>
           </a:xfrm>
           <a:prstGeom prst="rect">
             <a:avLst/>
@@ -637,7 +646,13 @@
           </a:bodyPr>
           <a:p>
             <a:pPr indent="0" rtl="1">
+              <a:lnSpc>
+                <a:spcPct val="100000"/>
+              </a:lnSpc>
               <a:buNone/>
+              <a:tabLst>
+                <a:tab algn="l" pos="0"/>
+              </a:tabLst>
             </a:pPr>
             <a:r>
               <a:rPr lang="en-US" sz="900" b="0" u="none" strike="noStrike">
@@ -670,946 +685,6 @@
 <file path=ppt/slideLayouts/slideLayout1.xml><?xml version="1.0" encoding="utf-8"?>
 <p:sldLayout xmlns:a="http://schemas.openxmlformats.org/drawingml/2006/main" xmlns:p="http://schemas.openxmlformats.org/presentationml/2006/main" xmlns:r="http://schemas.openxmlformats.org/officeDocument/2006/relationships" xmlns:p14="http://schemas.microsoft.com/office/powerpoint/2010/main" xmlns:p15="http://schemas.microsoft.com/office/powerpoint/2012/main" xmlns:mc="http://schemas.openxmlformats.org/markup-compatibility/2006" type="blank" preserve="1">
   <p:cSld name="MasterSlide0">
-    <p:spTree>
-      <p:nvGrpSpPr>
-        <p:cNvPr id="1" name=""/>
-        <p:cNvGrpSpPr/>
-        <p:nvPr/>
-      </p:nvGrpSpPr>
-      <p:grpSpPr>
-        <a:xfrm>
-          <a:off x="0" y="0"/>
-          <a:ext cx="0" cy="0"/>
-          <a:chOff x="0" y="0"/>
-          <a:chExt cx="0" cy="0"/>
-        </a:xfrm>
-      </p:grpSpPr>
-    </p:spTree>
-  </p:cSld>
-</p:sldLayout>
-</file>
-
-<file path=ppt/slideLayouts/slideLayout2.xml><?xml version="1.0" encoding="utf-8"?>
-<p:sldLayout xmlns:a="http://schemas.openxmlformats.org/drawingml/2006/main" xmlns:p="http://schemas.openxmlformats.org/presentationml/2006/main" xmlns:r="http://schemas.openxmlformats.org/officeDocument/2006/relationships" xmlns:p14="http://schemas.microsoft.com/office/powerpoint/2010/main" xmlns:p15="http://schemas.microsoft.com/office/powerpoint/2012/main" xmlns:mc="http://schemas.openxmlformats.org/markup-compatibility/2006" type="title" preserve="1">
-  <p:cSld name="MasterSlide0">
-    <p:spTree>
-      <p:nvGrpSpPr>
-        <p:cNvPr id="1" name=""/>
-        <p:cNvGrpSpPr/>
-        <p:nvPr/>
-      </p:nvGrpSpPr>
-      <p:grpSpPr>
-        <a:xfrm>
-          <a:off x="0" y="0"/>
-          <a:ext cx="0" cy="0"/>
-          <a:chOff x="0" y="0"/>
-          <a:chExt cx="0" cy="0"/>
-        </a:xfrm>
-      </p:grpSpPr>
-      <p:sp>
-        <p:nvSpPr>
-          <p:cNvPr id="5" name="PlaceHolder 1"/>
-          <p:cNvSpPr>
-            <a:spLocks noGrp="1"/>
-          </p:cNvSpPr>
-          <p:nvPr>
-            <p:ph type="title"/>
-          </p:nvPr>
-        </p:nvSpPr>
-        <p:spPr>
-          <a:xfrm>
-            <a:off x="457200" y="273600"/>
-            <a:ext cx="8229240" cy="1144800"/>
-          </a:xfrm>
-          <a:prstGeom prst="rect">
-            <a:avLst/>
-          </a:prstGeom>
-          <a:noFill/>
-          <a:ln w="0">
-            <a:noFill/>
-          </a:ln>
-        </p:spPr>
-        <p:txBody>
-          <a:bodyPr lIns="0" rIns="0" tIns="0" bIns="0" anchor="ctr">
-            <a:spAutoFit/>
-          </a:bodyPr>
-          <a:p>
-            <a:pPr indent="0" algn="ctr">
-              <a:buNone/>
-            </a:pPr>
-            <a:endParaRPr lang="en-US" sz="4400" b="0" u="none" strike="noStrike">
-              <a:solidFill>
-                <a:srgbClr val="000000"/>
-              </a:solidFill>
-              <a:effectLst/>
-              <a:uFillTx/>
-              <a:latin typeface="Arial"/>
-            </a:endParaRPr>
-          </a:p>
-        </p:txBody>
-      </p:sp>
-      <p:sp>
-        <p:nvSpPr>
-          <p:cNvPr id="6" name="PlaceHolder 2"/>
-          <p:cNvSpPr>
-            <a:spLocks noGrp="1"/>
-          </p:cNvSpPr>
-          <p:nvPr>
-            <p:ph type="subTitle"/>
-          </p:nvPr>
-        </p:nvSpPr>
-        <p:spPr>
-          <a:xfrm>
-            <a:off x="457200" y="1604520"/>
-            <a:ext cx="8229240" cy="3977280"/>
-          </a:xfrm>
-          <a:prstGeom prst="rect">
-            <a:avLst/>
-          </a:prstGeom>
-          <a:noFill/>
-          <a:ln w="0">
-            <a:noFill/>
-          </a:ln>
-        </p:spPr>
-        <p:txBody>
-          <a:bodyPr lIns="0" rIns="0" tIns="0" bIns="0" anchor="ctr">
-            <a:spAutoFit/>
-          </a:bodyPr>
-          <a:p>
-            <a:pPr indent="0" algn="ctr">
-              <a:buNone/>
-            </a:pPr>
-            <a:endParaRPr lang="en-US" sz="3200" b="0" u="none" strike="noStrike">
-              <a:solidFill>
-                <a:srgbClr val="000000"/>
-              </a:solidFill>
-              <a:effectLst/>
-              <a:uFillTx/>
-              <a:latin typeface="Arial"/>
-            </a:endParaRPr>
-          </a:p>
-        </p:txBody>
-      </p:sp>
-    </p:spTree>
-  </p:cSld>
-</p:sldLayout>
-</file>
-
-<file path=ppt/slideLayouts/slideLayout3.xml><?xml version="1.0" encoding="utf-8"?>
-<p:sldLayout xmlns:a="http://schemas.openxmlformats.org/drawingml/2006/main" xmlns:p="http://schemas.openxmlformats.org/presentationml/2006/main" xmlns:r="http://schemas.openxmlformats.org/officeDocument/2006/relationships" xmlns:p14="http://schemas.microsoft.com/office/powerpoint/2010/main" xmlns:p15="http://schemas.microsoft.com/office/powerpoint/2012/main" xmlns:mc="http://schemas.openxmlformats.org/markup-compatibility/2006" type="blank" preserve="1">
-  <p:cSld name="MasterSlide1">
-    <p:bg>
-      <p:bgPr>
-        <a:solidFill>
-          <a:srgbClr val="ffffff"/>
-        </a:solidFill>
-      </p:bgPr>
-    </p:bg>
-    <p:spTree>
-      <p:nvGrpSpPr>
-        <p:cNvPr id="1" name=""/>
-        <p:cNvGrpSpPr/>
-        <p:nvPr/>
-      </p:nvGrpSpPr>
-      <p:grpSpPr>
-        <a:xfrm>
-          <a:off x="0" y="0"/>
-          <a:ext cx="0" cy="0"/>
-          <a:chOff x="0" y="0"/>
-          <a:chExt cx="0" cy="0"/>
-        </a:xfrm>
-      </p:grpSpPr>
-      <p:sp>
-        <p:nvSpPr>
-          <p:cNvPr id="7" name=""/>
-          <p:cNvSpPr txBox="1"/>
-          <p:nvPr/>
-        </p:nvSpPr>
-        <p:spPr>
-          <a:xfrm>
-            <a:off x="4187880" y="6642000"/>
-            <a:ext cx="797040" cy="343080"/>
-          </a:xfrm>
-          <a:prstGeom prst="rect">
-            <a:avLst/>
-          </a:prstGeom>
-          <a:noFill/>
-          <a:ln w="0">
-            <a:noFill/>
-          </a:ln>
-        </p:spPr>
-        <p:txBody>
-          <a:bodyPr lIns="90000" rIns="90000" tIns="45000" bIns="45000" anchor="t">
-            <a:spAutoFit/>
-          </a:bodyPr>
-          <a:p>
-            <a:r>
-              <a:rPr lang="en-US" sz="1000" b="0" u="none" strike="noStrike">
-                <a:solidFill>
-                  <a:srgbClr val="ff0000"/>
-                </a:solidFill>
-                <a:effectLst/>
-                <a:uFillTx/>
-                <a:latin typeface="Calibri"/>
-                <a:ea typeface="Calibri"/>
-              </a:rPr>
-              <a:t>CONFIDENTIAL</a:t>
-            </a:r>
-            <a:endParaRPr lang="en-US" sz="1000" b="0" u="none" strike="noStrike">
-              <a:solidFill>
-                <a:srgbClr val="000000"/>
-              </a:solidFill>
-              <a:effectLst/>
-              <a:uFillTx/>
-              <a:latin typeface="Arial"/>
-            </a:endParaRPr>
-          </a:p>
-        </p:txBody>
-      </p:sp>
-      <p:sp>
-        <p:nvSpPr>
-          <p:cNvPr id="8" name="PlaceHolder 1"/>
-          <p:cNvSpPr>
-            <a:spLocks noGrp="1"/>
-          </p:cNvSpPr>
-          <p:nvPr>
-            <p:ph type="title"/>
-          </p:nvPr>
-        </p:nvSpPr>
-        <p:spPr>
-          <a:xfrm>
-            <a:off x="457200" y="273600"/>
-            <a:ext cx="8229240" cy="1144800"/>
-          </a:xfrm>
-          <a:prstGeom prst="rect">
-            <a:avLst/>
-          </a:prstGeom>
-          <a:noFill/>
-          <a:ln w="0">
-            <a:noFill/>
-          </a:ln>
-        </p:spPr>
-        <p:txBody>
-          <a:bodyPr lIns="0" rIns="0" tIns="0" bIns="0" anchor="ctr">
-            <a:noAutofit/>
-          </a:bodyPr>
-          <a:p>
-            <a:pPr indent="0" algn="ctr">
-              <a:buNone/>
-            </a:pPr>
-            <a:r>
-              <a:rPr lang="en-US" sz="4400" b="0" u="none" strike="noStrike">
-                <a:solidFill>
-                  <a:srgbClr val="000000"/>
-                </a:solidFill>
-                <a:effectLst/>
-                <a:uFillTx/>
-                <a:latin typeface="Arial"/>
-              </a:rPr>
-              <a:t>Click to edit the title text format</a:t>
-            </a:r>
-            <a:endParaRPr lang="en-US" sz="4400" b="0" u="none" strike="noStrike">
-              <a:solidFill>
-                <a:srgbClr val="000000"/>
-              </a:solidFill>
-              <a:effectLst/>
-              <a:uFillTx/>
-              <a:latin typeface="Arial"/>
-            </a:endParaRPr>
-          </a:p>
-        </p:txBody>
-      </p:sp>
-      <p:sp>
-        <p:nvSpPr>
-          <p:cNvPr id="9" name="PlaceHolder 2"/>
-          <p:cNvSpPr>
-            <a:spLocks noGrp="1"/>
-          </p:cNvSpPr>
-          <p:nvPr>
-            <p:ph type="body"/>
-          </p:nvPr>
-        </p:nvSpPr>
-        <p:spPr>
-          <a:xfrm>
-            <a:off x="457200" y="1604520"/>
-            <a:ext cx="8229240" cy="3977280"/>
-          </a:xfrm>
-          <a:prstGeom prst="rect">
-            <a:avLst/>
-          </a:prstGeom>
-          <a:noFill/>
-          <a:ln w="0">
-            <a:noFill/>
-          </a:ln>
-        </p:spPr>
-        <p:txBody>
-          <a:bodyPr lIns="0" rIns="0" tIns="0" bIns="0" anchor="t">
-            <a:normAutofit/>
-          </a:bodyPr>
-          <a:p>
-            <a:pPr marL="432000" indent="-324000">
-              <a:spcBef>
-                <a:spcPts val="1417"/>
-              </a:spcBef>
-              <a:buClr>
-                <a:srgbClr val="000000"/>
-              </a:buClr>
-              <a:buSzPct val="45000"/>
-              <a:buFont typeface="Wingdings" charset="2"/>
-              <a:buChar char=""/>
-            </a:pPr>
-            <a:r>
-              <a:rPr lang="en-US" sz="3200" b="0" u="none" strike="noStrike">
-                <a:solidFill>
-                  <a:srgbClr val="000000"/>
-                </a:solidFill>
-                <a:effectLst/>
-                <a:uFillTx/>
-                <a:latin typeface="Arial"/>
-              </a:rPr>
-              <a:t>Click to edit the outline text format</a:t>
-            </a:r>
-            <a:endParaRPr lang="en-US" sz="3200" b="0" u="none" strike="noStrike">
-              <a:solidFill>
-                <a:srgbClr val="000000"/>
-              </a:solidFill>
-              <a:effectLst/>
-              <a:uFillTx/>
-              <a:latin typeface="Arial"/>
-            </a:endParaRPr>
-          </a:p>
-          <a:p>
-            <a:pPr marL="864000" lvl="1" indent="-324000">
-              <a:spcBef>
-                <a:spcPts val="1134"/>
-              </a:spcBef>
-              <a:buClr>
-                <a:srgbClr val="000000"/>
-              </a:buClr>
-              <a:buSzPct val="75000"/>
-              <a:buFont typeface="Symbol" charset="2"/>
-              <a:buChar char=""/>
-            </a:pPr>
-            <a:r>
-              <a:rPr lang="en-US" sz="2800" b="0" u="none" strike="noStrike">
-                <a:solidFill>
-                  <a:srgbClr val="000000"/>
-                </a:solidFill>
-                <a:effectLst/>
-                <a:uFillTx/>
-                <a:latin typeface="Arial"/>
-              </a:rPr>
-              <a:t>Second Outline Level</a:t>
-            </a:r>
-            <a:endParaRPr lang="en-US" sz="2800" b="0" u="none" strike="noStrike">
-              <a:solidFill>
-                <a:srgbClr val="000000"/>
-              </a:solidFill>
-              <a:effectLst/>
-              <a:uFillTx/>
-              <a:latin typeface="Arial"/>
-            </a:endParaRPr>
-          </a:p>
-          <a:p>
-            <a:pPr marL="1296000" lvl="2" indent="-288000">
-              <a:spcBef>
-                <a:spcPts val="850"/>
-              </a:spcBef>
-              <a:buClr>
-                <a:srgbClr val="000000"/>
-              </a:buClr>
-              <a:buSzPct val="45000"/>
-              <a:buFont typeface="Wingdings" charset="2"/>
-              <a:buChar char=""/>
-            </a:pPr>
-            <a:r>
-              <a:rPr lang="en-US" sz="2400" b="0" u="none" strike="noStrike">
-                <a:solidFill>
-                  <a:srgbClr val="000000"/>
-                </a:solidFill>
-                <a:effectLst/>
-                <a:uFillTx/>
-                <a:latin typeface="Arial"/>
-              </a:rPr>
-              <a:t>Third Outline Level</a:t>
-            </a:r>
-            <a:endParaRPr lang="en-US" sz="2400" b="0" u="none" strike="noStrike">
-              <a:solidFill>
-                <a:srgbClr val="000000"/>
-              </a:solidFill>
-              <a:effectLst/>
-              <a:uFillTx/>
-              <a:latin typeface="Arial"/>
-            </a:endParaRPr>
-          </a:p>
-          <a:p>
-            <a:pPr marL="1728000" lvl="3" indent="-216000">
-              <a:spcBef>
-                <a:spcPts val="567"/>
-              </a:spcBef>
-              <a:buClr>
-                <a:srgbClr val="000000"/>
-              </a:buClr>
-              <a:buSzPct val="75000"/>
-              <a:buFont typeface="Symbol" charset="2"/>
-              <a:buChar char=""/>
-            </a:pPr>
-            <a:r>
-              <a:rPr lang="en-US" sz="2000" b="0" u="none" strike="noStrike">
-                <a:solidFill>
-                  <a:srgbClr val="000000"/>
-                </a:solidFill>
-                <a:effectLst/>
-                <a:uFillTx/>
-                <a:latin typeface="Arial"/>
-              </a:rPr>
-              <a:t>Fourth Outline Level</a:t>
-            </a:r>
-            <a:endParaRPr lang="en-US" sz="2000" b="0" u="none" strike="noStrike">
-              <a:solidFill>
-                <a:srgbClr val="000000"/>
-              </a:solidFill>
-              <a:effectLst/>
-              <a:uFillTx/>
-              <a:latin typeface="Arial"/>
-            </a:endParaRPr>
-          </a:p>
-          <a:p>
-            <a:pPr marL="2160000" lvl="4" indent="-216000">
-              <a:spcBef>
-                <a:spcPts val="283"/>
-              </a:spcBef>
-              <a:buClr>
-                <a:srgbClr val="000000"/>
-              </a:buClr>
-              <a:buSzPct val="45000"/>
-              <a:buFont typeface="Wingdings" charset="2"/>
-              <a:buChar char=""/>
-            </a:pPr>
-            <a:r>
-              <a:rPr lang="en-US" sz="2000" b="0" u="none" strike="noStrike">
-                <a:solidFill>
-                  <a:srgbClr val="000000"/>
-                </a:solidFill>
-                <a:effectLst/>
-                <a:uFillTx/>
-                <a:latin typeface="Arial"/>
-              </a:rPr>
-              <a:t>Fifth Outline Level</a:t>
-            </a:r>
-            <a:endParaRPr lang="en-US" sz="2000" b="0" u="none" strike="noStrike">
-              <a:solidFill>
-                <a:srgbClr val="000000"/>
-              </a:solidFill>
-              <a:effectLst/>
-              <a:uFillTx/>
-              <a:latin typeface="Arial"/>
-            </a:endParaRPr>
-          </a:p>
-          <a:p>
-            <a:pPr marL="2592000" lvl="5" indent="-216000">
-              <a:spcBef>
-                <a:spcPts val="283"/>
-              </a:spcBef>
-              <a:buClr>
-                <a:srgbClr val="000000"/>
-              </a:buClr>
-              <a:buSzPct val="45000"/>
-              <a:buFont typeface="Wingdings" charset="2"/>
-              <a:buChar char=""/>
-            </a:pPr>
-            <a:r>
-              <a:rPr lang="en-US" sz="2000" b="0" u="none" strike="noStrike">
-                <a:solidFill>
-                  <a:srgbClr val="000000"/>
-                </a:solidFill>
-                <a:effectLst/>
-                <a:uFillTx/>
-                <a:latin typeface="Arial"/>
-              </a:rPr>
-              <a:t>Sixth Outline Level</a:t>
-            </a:r>
-            <a:endParaRPr lang="en-US" sz="2000" b="0" u="none" strike="noStrike">
-              <a:solidFill>
-                <a:srgbClr val="000000"/>
-              </a:solidFill>
-              <a:effectLst/>
-              <a:uFillTx/>
-              <a:latin typeface="Arial"/>
-            </a:endParaRPr>
-          </a:p>
-          <a:p>
-            <a:pPr marL="3024000" lvl="6" indent="-216000">
-              <a:spcBef>
-                <a:spcPts val="283"/>
-              </a:spcBef>
-              <a:buClr>
-                <a:srgbClr val="000000"/>
-              </a:buClr>
-              <a:buSzPct val="45000"/>
-              <a:buFont typeface="Wingdings" charset="2"/>
-              <a:buChar char=""/>
-            </a:pPr>
-            <a:r>
-              <a:rPr lang="en-US" sz="2000" b="0" u="none" strike="noStrike">
-                <a:solidFill>
-                  <a:srgbClr val="000000"/>
-                </a:solidFill>
-                <a:effectLst/>
-                <a:uFillTx/>
-                <a:latin typeface="Arial"/>
-              </a:rPr>
-              <a:t>Seventh Outline Level</a:t>
-            </a:r>
-            <a:endParaRPr lang="en-US" sz="2000" b="0" u="none" strike="noStrike">
-              <a:solidFill>
-                <a:srgbClr val="000000"/>
-              </a:solidFill>
-              <a:effectLst/>
-              <a:uFillTx/>
-              <a:latin typeface="Arial"/>
-            </a:endParaRPr>
-          </a:p>
-        </p:txBody>
-      </p:sp>
-    </p:spTree>
-  </p:cSld>
-</p:sldLayout>
-</file>
-
-<file path=ppt/slideLayouts/slideLayout4.xml><?xml version="1.0" encoding="utf-8"?>
-<p:sldLayout xmlns:a="http://schemas.openxmlformats.org/drawingml/2006/main" xmlns:p="http://schemas.openxmlformats.org/presentationml/2006/main" xmlns:r="http://schemas.openxmlformats.org/officeDocument/2006/relationships" xmlns:p14="http://schemas.microsoft.com/office/powerpoint/2010/main" xmlns:p15="http://schemas.microsoft.com/office/powerpoint/2012/main" xmlns:mc="http://schemas.openxmlformats.org/markup-compatibility/2006" type="blank" preserve="1">
-  <p:cSld name="MasterSlide2">
-    <p:bg>
-      <p:bgPr>
-        <a:solidFill>
-          <a:srgbClr val="ffffff"/>
-        </a:solidFill>
-      </p:bgPr>
-    </p:bg>
-    <p:spTree>
-      <p:nvGrpSpPr>
-        <p:cNvPr id="1" name=""/>
-        <p:cNvGrpSpPr/>
-        <p:nvPr/>
-      </p:nvGrpSpPr>
-      <p:grpSpPr>
-        <a:xfrm>
-          <a:off x="0" y="0"/>
-          <a:ext cx="0" cy="0"/>
-          <a:chOff x="0" y="0"/>
-          <a:chExt cx="0" cy="0"/>
-        </a:xfrm>
-      </p:grpSpPr>
-      <p:sp>
-        <p:nvSpPr>
-          <p:cNvPr id="10" name=""/>
-          <p:cNvSpPr txBox="1"/>
-          <p:nvPr/>
-        </p:nvSpPr>
-        <p:spPr>
-          <a:xfrm>
-            <a:off x="4187880" y="6642000"/>
-            <a:ext cx="797040" cy="343080"/>
-          </a:xfrm>
-          <a:prstGeom prst="rect">
-            <a:avLst/>
-          </a:prstGeom>
-          <a:noFill/>
-          <a:ln w="0">
-            <a:noFill/>
-          </a:ln>
-        </p:spPr>
-        <p:txBody>
-          <a:bodyPr lIns="90000" rIns="90000" tIns="45000" bIns="45000" anchor="t">
-            <a:spAutoFit/>
-          </a:bodyPr>
-          <a:p>
-            <a:r>
-              <a:rPr lang="en-US" sz="1000" b="0" u="none" strike="noStrike">
-                <a:solidFill>
-                  <a:srgbClr val="ff0000"/>
-                </a:solidFill>
-                <a:effectLst/>
-                <a:uFillTx/>
-                <a:latin typeface="Calibri"/>
-                <a:ea typeface="Calibri"/>
-              </a:rPr>
-              <a:t>CONFIDENTIAL</a:t>
-            </a:r>
-            <a:endParaRPr lang="en-US" sz="1000" b="0" u="none" strike="noStrike">
-              <a:solidFill>
-                <a:srgbClr val="000000"/>
-              </a:solidFill>
-              <a:effectLst/>
-              <a:uFillTx/>
-              <a:latin typeface="Arial"/>
-            </a:endParaRPr>
-          </a:p>
-        </p:txBody>
-      </p:sp>
-      <p:pic>
-        <p:nvPicPr>
-          <p:cNvPr id="11" name=""/>
-          <p:cNvPicPr/>
-          <p:nvPr/>
-        </p:nvPicPr>
-        <p:blipFill>
-          <a:blip r:embed="rId2"/>
-          <a:stretch/>
-        </p:blipFill>
-        <p:spPr>
-          <a:xfrm>
-            <a:off x="2187720" y="2711520"/>
-            <a:ext cx="4968000" cy="1484640"/>
-          </a:xfrm>
-          <a:prstGeom prst="rect">
-            <a:avLst/>
-          </a:prstGeom>
-          <a:noFill/>
-          <a:ln w="0">
-            <a:noFill/>
-          </a:ln>
-        </p:spPr>
-      </p:pic>
-      <p:pic>
-        <p:nvPicPr>
-          <p:cNvPr id="12" name=""/>
-          <p:cNvPicPr/>
-          <p:nvPr/>
-        </p:nvPicPr>
-        <p:blipFill>
-          <a:blip r:embed="rId3"/>
-          <a:stretch/>
-        </p:blipFill>
-        <p:spPr>
-          <a:xfrm>
-            <a:off x="3478320" y="3980160"/>
-            <a:ext cx="3672000" cy="213120"/>
-          </a:xfrm>
-          <a:prstGeom prst="rect">
-            <a:avLst/>
-          </a:prstGeom>
-          <a:noFill/>
-          <a:ln w="0">
-            <a:noFill/>
-          </a:ln>
-        </p:spPr>
-      </p:pic>
-      <p:sp>
-        <p:nvSpPr>
-          <p:cNvPr id="13" name="PlaceHolder 1"/>
-          <p:cNvSpPr>
-            <a:spLocks noGrp="1"/>
-          </p:cNvSpPr>
-          <p:nvPr>
-            <p:ph type="title"/>
-          </p:nvPr>
-        </p:nvSpPr>
-        <p:spPr>
-          <a:xfrm>
-            <a:off x="457200" y="273600"/>
-            <a:ext cx="8229240" cy="1144800"/>
-          </a:xfrm>
-          <a:prstGeom prst="rect">
-            <a:avLst/>
-          </a:prstGeom>
-          <a:noFill/>
-          <a:ln w="0">
-            <a:noFill/>
-          </a:ln>
-        </p:spPr>
-        <p:txBody>
-          <a:bodyPr lIns="0" rIns="0" tIns="0" bIns="0" anchor="ctr">
-            <a:noAutofit/>
-          </a:bodyPr>
-          <a:p>
-            <a:pPr indent="0" algn="ctr">
-              <a:buNone/>
-            </a:pPr>
-            <a:r>
-              <a:rPr lang="en-US" sz="4400" b="0" u="none" strike="noStrike">
-                <a:solidFill>
-                  <a:srgbClr val="000000"/>
-                </a:solidFill>
-                <a:effectLst/>
-                <a:uFillTx/>
-                <a:latin typeface="Arial"/>
-              </a:rPr>
-              <a:t>Click to edit the title text format</a:t>
-            </a:r>
-            <a:endParaRPr lang="en-US" sz="4400" b="0" u="none" strike="noStrike">
-              <a:solidFill>
-                <a:srgbClr val="000000"/>
-              </a:solidFill>
-              <a:effectLst/>
-              <a:uFillTx/>
-              <a:latin typeface="Arial"/>
-            </a:endParaRPr>
-          </a:p>
-        </p:txBody>
-      </p:sp>
-      <p:sp>
-        <p:nvSpPr>
-          <p:cNvPr id="14" name="PlaceHolder 2"/>
-          <p:cNvSpPr>
-            <a:spLocks noGrp="1"/>
-          </p:cNvSpPr>
-          <p:nvPr>
-            <p:ph type="body"/>
-          </p:nvPr>
-        </p:nvSpPr>
-        <p:spPr>
-          <a:xfrm>
-            <a:off x="457200" y="1604520"/>
-            <a:ext cx="8229240" cy="3977280"/>
-          </a:xfrm>
-          <a:prstGeom prst="rect">
-            <a:avLst/>
-          </a:prstGeom>
-          <a:noFill/>
-          <a:ln w="0">
-            <a:noFill/>
-          </a:ln>
-        </p:spPr>
-        <p:txBody>
-          <a:bodyPr lIns="0" rIns="0" tIns="0" bIns="0" anchor="t">
-            <a:normAutofit/>
-          </a:bodyPr>
-          <a:p>
-            <a:pPr marL="432000" indent="-324000">
-              <a:spcBef>
-                <a:spcPts val="1417"/>
-              </a:spcBef>
-              <a:buClr>
-                <a:srgbClr val="000000"/>
-              </a:buClr>
-              <a:buSzPct val="45000"/>
-              <a:buFont typeface="Wingdings" charset="2"/>
-              <a:buChar char=""/>
-            </a:pPr>
-            <a:r>
-              <a:rPr lang="en-US" sz="3200" b="0" u="none" strike="noStrike">
-                <a:solidFill>
-                  <a:srgbClr val="000000"/>
-                </a:solidFill>
-                <a:effectLst/>
-                <a:uFillTx/>
-                <a:latin typeface="Arial"/>
-              </a:rPr>
-              <a:t>Click to edit the outline text format</a:t>
-            </a:r>
-            <a:endParaRPr lang="en-US" sz="3200" b="0" u="none" strike="noStrike">
-              <a:solidFill>
-                <a:srgbClr val="000000"/>
-              </a:solidFill>
-              <a:effectLst/>
-              <a:uFillTx/>
-              <a:latin typeface="Arial"/>
-            </a:endParaRPr>
-          </a:p>
-          <a:p>
-            <a:pPr marL="864000" lvl="1" indent="-324000">
-              <a:spcBef>
-                <a:spcPts val="1134"/>
-              </a:spcBef>
-              <a:buClr>
-                <a:srgbClr val="000000"/>
-              </a:buClr>
-              <a:buSzPct val="75000"/>
-              <a:buFont typeface="Symbol" charset="2"/>
-              <a:buChar char=""/>
-            </a:pPr>
-            <a:r>
-              <a:rPr lang="en-US" sz="2800" b="0" u="none" strike="noStrike">
-                <a:solidFill>
-                  <a:srgbClr val="000000"/>
-                </a:solidFill>
-                <a:effectLst/>
-                <a:uFillTx/>
-                <a:latin typeface="Arial"/>
-              </a:rPr>
-              <a:t>Second Outline Level</a:t>
-            </a:r>
-            <a:endParaRPr lang="en-US" sz="2800" b="0" u="none" strike="noStrike">
-              <a:solidFill>
-                <a:srgbClr val="000000"/>
-              </a:solidFill>
-              <a:effectLst/>
-              <a:uFillTx/>
-              <a:latin typeface="Arial"/>
-            </a:endParaRPr>
-          </a:p>
-          <a:p>
-            <a:pPr marL="1296000" lvl="2" indent="-288000">
-              <a:spcBef>
-                <a:spcPts val="850"/>
-              </a:spcBef>
-              <a:buClr>
-                <a:srgbClr val="000000"/>
-              </a:buClr>
-              <a:buSzPct val="45000"/>
-              <a:buFont typeface="Wingdings" charset="2"/>
-              <a:buChar char=""/>
-            </a:pPr>
-            <a:r>
-              <a:rPr lang="en-US" sz="2400" b="0" u="none" strike="noStrike">
-                <a:solidFill>
-                  <a:srgbClr val="000000"/>
-                </a:solidFill>
-                <a:effectLst/>
-                <a:uFillTx/>
-                <a:latin typeface="Arial"/>
-              </a:rPr>
-              <a:t>Third Outline Level</a:t>
-            </a:r>
-            <a:endParaRPr lang="en-US" sz="2400" b="0" u="none" strike="noStrike">
-              <a:solidFill>
-                <a:srgbClr val="000000"/>
-              </a:solidFill>
-              <a:effectLst/>
-              <a:uFillTx/>
-              <a:latin typeface="Arial"/>
-            </a:endParaRPr>
-          </a:p>
-          <a:p>
-            <a:pPr marL="1728000" lvl="3" indent="-216000">
-              <a:spcBef>
-                <a:spcPts val="567"/>
-              </a:spcBef>
-              <a:buClr>
-                <a:srgbClr val="000000"/>
-              </a:buClr>
-              <a:buSzPct val="75000"/>
-              <a:buFont typeface="Symbol" charset="2"/>
-              <a:buChar char=""/>
-            </a:pPr>
-            <a:r>
-              <a:rPr lang="en-US" sz="2000" b="0" u="none" strike="noStrike">
-                <a:solidFill>
-                  <a:srgbClr val="000000"/>
-                </a:solidFill>
-                <a:effectLst/>
-                <a:uFillTx/>
-                <a:latin typeface="Arial"/>
-              </a:rPr>
-              <a:t>Fourth Outline Level</a:t>
-            </a:r>
-            <a:endParaRPr lang="en-US" sz="2000" b="0" u="none" strike="noStrike">
-              <a:solidFill>
-                <a:srgbClr val="000000"/>
-              </a:solidFill>
-              <a:effectLst/>
-              <a:uFillTx/>
-              <a:latin typeface="Arial"/>
-            </a:endParaRPr>
-          </a:p>
-          <a:p>
-            <a:pPr marL="2160000" lvl="4" indent="-216000">
-              <a:spcBef>
-                <a:spcPts val="283"/>
-              </a:spcBef>
-              <a:buClr>
-                <a:srgbClr val="000000"/>
-              </a:buClr>
-              <a:buSzPct val="45000"/>
-              <a:buFont typeface="Wingdings" charset="2"/>
-              <a:buChar char=""/>
-            </a:pPr>
-            <a:r>
-              <a:rPr lang="en-US" sz="2000" b="0" u="none" strike="noStrike">
-                <a:solidFill>
-                  <a:srgbClr val="000000"/>
-                </a:solidFill>
-                <a:effectLst/>
-                <a:uFillTx/>
-                <a:latin typeface="Arial"/>
-              </a:rPr>
-              <a:t>Fifth Outline Level</a:t>
-            </a:r>
-            <a:endParaRPr lang="en-US" sz="2000" b="0" u="none" strike="noStrike">
-              <a:solidFill>
-                <a:srgbClr val="000000"/>
-              </a:solidFill>
-              <a:effectLst/>
-              <a:uFillTx/>
-              <a:latin typeface="Arial"/>
-            </a:endParaRPr>
-          </a:p>
-          <a:p>
-            <a:pPr marL="2592000" lvl="5" indent="-216000">
-              <a:spcBef>
-                <a:spcPts val="283"/>
-              </a:spcBef>
-              <a:buClr>
-                <a:srgbClr val="000000"/>
-              </a:buClr>
-              <a:buSzPct val="45000"/>
-              <a:buFont typeface="Wingdings" charset="2"/>
-              <a:buChar char=""/>
-            </a:pPr>
-            <a:r>
-              <a:rPr lang="en-US" sz="2000" b="0" u="none" strike="noStrike">
-                <a:solidFill>
-                  <a:srgbClr val="000000"/>
-                </a:solidFill>
-                <a:effectLst/>
-                <a:uFillTx/>
-                <a:latin typeface="Arial"/>
-              </a:rPr>
-              <a:t>Sixth Outline Level</a:t>
-            </a:r>
-            <a:endParaRPr lang="en-US" sz="2000" b="0" u="none" strike="noStrike">
-              <a:solidFill>
-                <a:srgbClr val="000000"/>
-              </a:solidFill>
-              <a:effectLst/>
-              <a:uFillTx/>
-              <a:latin typeface="Arial"/>
-            </a:endParaRPr>
-          </a:p>
-          <a:p>
-            <a:pPr marL="3024000" lvl="6" indent="-216000">
-              <a:spcBef>
-                <a:spcPts val="283"/>
-              </a:spcBef>
-              <a:buClr>
-                <a:srgbClr val="000000"/>
-              </a:buClr>
-              <a:buSzPct val="45000"/>
-              <a:buFont typeface="Wingdings" charset="2"/>
-              <a:buChar char=""/>
-            </a:pPr>
-            <a:r>
-              <a:rPr lang="en-US" sz="2000" b="0" u="none" strike="noStrike">
-                <a:solidFill>
-                  <a:srgbClr val="000000"/>
-                </a:solidFill>
-                <a:effectLst/>
-                <a:uFillTx/>
-                <a:latin typeface="Arial"/>
-              </a:rPr>
-              <a:t>Seventh Outline Level</a:t>
-            </a:r>
-            <a:endParaRPr lang="en-US" sz="2000" b="0" u="none" strike="noStrike">
-              <a:solidFill>
-                <a:srgbClr val="000000"/>
-              </a:solidFill>
-              <a:effectLst/>
-              <a:uFillTx/>
-              <a:latin typeface="Arial"/>
-            </a:endParaRPr>
-          </a:p>
-        </p:txBody>
-      </p:sp>
-    </p:spTree>
-  </p:cSld>
-</p:sldLayout>
-</file>
-
-<file path=ppt/slideMasters/slideMaster1.xml><?xml version="1.0" encoding="utf-8"?>
-<p:sldMaster xmlns:a="http://schemas.openxmlformats.org/drawingml/2006/main" xmlns:p="http://schemas.openxmlformats.org/presentationml/2006/main" xmlns:r="http://schemas.openxmlformats.org/officeDocument/2006/relationships" xmlns:p14="http://schemas.microsoft.com/office/powerpoint/2010/main" xmlns:p15="http://schemas.microsoft.com/office/powerpoint/2012/main" xmlns:mc="http://schemas.openxmlformats.org/markup-compatibility/2006">
-  <p:cSld>
     <p:bg>
       <p:bgPr>
         <a:blipFill rotWithShape="0">
@@ -1635,13 +710,13 @@
       <p:sp>
         <p:nvSpPr>
           <p:cNvPr id="2" name=""/>
-          <p:cNvSpPr txBox="1"/>
+          <p:cNvSpPr/>
           <p:nvPr/>
         </p:nvSpPr>
         <p:spPr>
           <a:xfrm>
             <a:off x="442800" y="4263480"/>
-            <a:ext cx="4289400" cy="1077120"/>
+            <a:ext cx="4289040" cy="1076760"/>
           </a:xfrm>
           <a:prstGeom prst="rect">
             <a:avLst/>
@@ -1651,11 +726,22 @@
             <a:noFill/>
           </a:ln>
         </p:spPr>
+        <p:style>
+          <a:lnRef idx="0"/>
+          <a:fillRef idx="0"/>
+          <a:effectRef idx="0"/>
+          <a:fontRef idx="minor"/>
+        </p:style>
         <p:txBody>
           <a:bodyPr lIns="90000" rIns="90000" tIns="45000" bIns="45000" anchor="t">
             <a:spAutoFit/>
           </a:bodyPr>
           <a:p>
+            <a:pPr>
+              <a:lnSpc>
+                <a:spcPct val="100000"/>
+              </a:lnSpc>
+            </a:pPr>
             <a:r>
               <a:rPr lang="en-US" sz="700" b="0" u="none" strike="noStrike">
                 <a:solidFill>
@@ -1666,8 +752,23 @@
                 <a:latin typeface="Arial"/>
                 <a:ea typeface="Arial"/>
               </a:rPr>
-              <a:t>Trace One 2020, All rights reserved</a:t>
+              <a:t>Trace One 2020, All rights reserved.</a:t>
             </a:r>
+            <a:endParaRPr lang="en-US" sz="700" b="0" u="none" strike="noStrike">
+              <a:solidFill>
+                <a:srgbClr val="000000"/>
+              </a:solidFill>
+              <a:effectLst/>
+              <a:uFillTx/>
+              <a:latin typeface="Arial"/>
+            </a:endParaRPr>
+          </a:p>
+          <a:p>
+            <a:pPr>
+              <a:lnSpc>
+                <a:spcPct val="100000"/>
+              </a:lnSpc>
+            </a:pPr>
             <a:r>
               <a:rPr lang="en-US" sz="700" b="0" u="none" strike="noStrike">
                 <a:solidFill>
@@ -1678,41 +779,7 @@
                 <a:latin typeface="Arial"/>
                 <a:ea typeface="Arial"/>
               </a:rPr>
-              <a:t>.</a:t>
-            </a:r>
-            <a:endParaRPr lang="en-US" sz="700" b="0" u="none" strike="noStrike">
-              <a:solidFill>
-                <a:srgbClr val="000000"/>
-              </a:solidFill>
-              <a:effectLst/>
-              <a:uFillTx/>
-              <a:latin typeface="Arial"/>
-            </a:endParaRPr>
-          </a:p>
-          <a:p>
-            <a:r>
-              <a:rPr lang="en-US" sz="700" b="0" u="none" strike="noStrike">
-                <a:solidFill>
-                  <a:srgbClr val="003248"/>
-                </a:solidFill>
-                <a:effectLst/>
-                <a:uFillTx/>
-                <a:latin typeface="Arial"/>
-                <a:ea typeface="Arial"/>
-              </a:rPr>
-              <a:t>Trace One and Eqos are trademarks of Trace One. All other company and product names October be trademarks of their respective owners and are used for product and company identification only.  No part of this document October be reproduced, distributed or transmitted in any form or by any means, including photocopying and recording, without the express written permission of Trace One.  Trace One has made reasonable effort to keep the information in this document current and accurate as of the date of publication or revision. However, Trace One does not guarantee or imply that this document is error free or accurate with regard to any particular specification. Trace One does not assume any liability resulting from the use of the information in this document</a:t>
-            </a:r>
-            <a:r>
-              <a:rPr lang="en-US" sz="700" b="0" u="none" strike="noStrike">
-                <a:solidFill>
-                  <a:srgbClr val="003248"/>
-                </a:solidFill>
-                <a:effectLst/>
-                <a:uFillTx/>
-                <a:latin typeface="Arial"/>
-                <a:ea typeface="Arial"/>
-              </a:rPr>
-              <a:t>.</a:t>
+              <a:t>Trace One and Eqos are trademarks of Trace One. All other company and product names October be trademarks of their respective owners and are used for product and company identification only.  No part of this document October be reproduced, distributed or transmitted in any form or by any means, including photocopying and recording, without the express written permission of Trace One.  Trace One has made reasonable effort to keep the information in this document current and accurate as of the date of publication or revision. However, Trace One does not guarantee or imply that this document is error free or accurate with regard to any particular specification. Trace One does not assume any liability resulting from the use of the information in this document.</a:t>
             </a:r>
             <a:endParaRPr lang="en-US" sz="700" b="0" u="none" strike="noStrike">
               <a:solidFill>
@@ -2033,15 +1100,1346 @@
       </p:sp>
     </p:spTree>
   </p:cSld>
+</p:sldLayout>
+</file>
+
+<file path=ppt/slideLayouts/slideLayout2.xml><?xml version="1.0" encoding="utf-8"?>
+<p:sldLayout xmlns:a="http://schemas.openxmlformats.org/drawingml/2006/main" xmlns:p="http://schemas.openxmlformats.org/presentationml/2006/main" xmlns:r="http://schemas.openxmlformats.org/officeDocument/2006/relationships" xmlns:p14="http://schemas.microsoft.com/office/powerpoint/2010/main" xmlns:p15="http://schemas.microsoft.com/office/powerpoint/2012/main" xmlns:mc="http://schemas.openxmlformats.org/markup-compatibility/2006" type="title" preserve="1">
+  <p:cSld name="Default">
+    <p:bg>
+      <p:bgPr>
+        <a:blipFill rotWithShape="0">
+          <a:blip r:embed="rId2"/>
+          <a:stretch/>
+        </a:blipFill>
+      </p:bgPr>
+    </p:bg>
+    <p:spTree>
+      <p:nvGrpSpPr>
+        <p:cNvPr id="1" name=""/>
+        <p:cNvGrpSpPr/>
+        <p:nvPr/>
+      </p:nvGrpSpPr>
+      <p:grpSpPr>
+        <a:xfrm>
+          <a:off x="0" y="0"/>
+          <a:ext cx="0" cy="0"/>
+          <a:chOff x="0" y="0"/>
+          <a:chExt cx="0" cy="0"/>
+        </a:xfrm>
+      </p:grpSpPr>
+      <p:sp>
+        <p:nvSpPr>
+          <p:cNvPr id="5" name=""/>
+          <p:cNvSpPr/>
+          <p:nvPr/>
+        </p:nvSpPr>
+        <p:spPr>
+          <a:xfrm>
+            <a:off x="442800" y="4263480"/>
+            <a:ext cx="4289040" cy="1076760"/>
+          </a:xfrm>
+          <a:prstGeom prst="rect">
+            <a:avLst/>
+          </a:prstGeom>
+          <a:noFill/>
+          <a:ln w="0">
+            <a:noFill/>
+          </a:ln>
+        </p:spPr>
+        <p:style>
+          <a:lnRef idx="0"/>
+          <a:fillRef idx="0"/>
+          <a:effectRef idx="0"/>
+          <a:fontRef idx="minor"/>
+        </p:style>
+        <p:txBody>
+          <a:bodyPr lIns="90000" rIns="90000" tIns="45000" bIns="45000" anchor="t">
+            <a:spAutoFit/>
+          </a:bodyPr>
+          <a:p>
+            <a:pPr>
+              <a:lnSpc>
+                <a:spcPct val="100000"/>
+              </a:lnSpc>
+            </a:pPr>
+            <a:r>
+              <a:rPr lang="en-US" sz="700" b="0" u="none" strike="noStrike">
+                <a:solidFill>
+                  <a:srgbClr val="003248"/>
+                </a:solidFill>
+                <a:effectLst/>
+                <a:uFillTx/>
+                <a:latin typeface="Arial"/>
+                <a:ea typeface="Arial"/>
+              </a:rPr>
+              <a:t>Trace One 2020, All rights reserved.</a:t>
+            </a:r>
+            <a:endParaRPr lang="en-US" sz="700" b="0" u="none" strike="noStrike">
+              <a:solidFill>
+                <a:srgbClr val="000000"/>
+              </a:solidFill>
+              <a:effectLst/>
+              <a:uFillTx/>
+              <a:latin typeface="Arial"/>
+            </a:endParaRPr>
+          </a:p>
+          <a:p>
+            <a:pPr>
+              <a:lnSpc>
+                <a:spcPct val="100000"/>
+              </a:lnSpc>
+            </a:pPr>
+            <a:r>
+              <a:rPr lang="en-US" sz="700" b="0" u="none" strike="noStrike">
+                <a:solidFill>
+                  <a:srgbClr val="003248"/>
+                </a:solidFill>
+                <a:effectLst/>
+                <a:uFillTx/>
+                <a:latin typeface="Arial"/>
+                <a:ea typeface="Arial"/>
+              </a:rPr>
+              <a:t>Trace One and Eqos are trademarks of Trace One. All other company and product names October be trademarks of their respective owners and are used for product and company identification only.  No part of this document October be reproduced, distributed or transmitted in any form or by any means, including photocopying and recording, without the express written permission of Trace One.  Trace One has made reasonable effort to keep the information in this document current and accurate as of the date of publication or revision. However, Trace One does not guarantee or imply that this document is error free or accurate with regard to any particular specification. Trace One does not assume any liability resulting from the use of the information in this document.</a:t>
+            </a:r>
+            <a:endParaRPr lang="en-US" sz="700" b="0" u="none" strike="noStrike">
+              <a:solidFill>
+                <a:srgbClr val="000000"/>
+              </a:solidFill>
+              <a:effectLst/>
+              <a:uFillTx/>
+              <a:latin typeface="Arial"/>
+            </a:endParaRPr>
+          </a:p>
+        </p:txBody>
+      </p:sp>
+      <p:sp>
+        <p:nvSpPr>
+          <p:cNvPr id="6" name="PlaceHolder 1"/>
+          <p:cNvSpPr>
+            <a:spLocks noGrp="1"/>
+          </p:cNvSpPr>
+          <p:nvPr>
+            <p:ph type="title"/>
+          </p:nvPr>
+        </p:nvSpPr>
+        <p:spPr>
+          <a:xfrm>
+            <a:off x="457200" y="708480"/>
+            <a:ext cx="8228880" cy="274680"/>
+          </a:xfrm>
+          <a:prstGeom prst="rect">
+            <a:avLst/>
+          </a:prstGeom>
+          <a:noFill/>
+          <a:ln w="0">
+            <a:noFill/>
+          </a:ln>
+        </p:spPr>
+        <p:txBody>
+          <a:bodyPr lIns="0" rIns="0" tIns="0" bIns="0" anchor="ctr">
+            <a:spAutoFit/>
+          </a:bodyPr>
+          <a:p>
+            <a:pPr indent="0">
+              <a:buNone/>
+            </a:pPr>
+            <a:r>
+              <a:rPr lang="en-US" sz="1800" b="0" u="none" strike="noStrike">
+                <a:solidFill>
+                  <a:srgbClr val="000000"/>
+                </a:solidFill>
+                <a:effectLst/>
+                <a:uFillTx/>
+                <a:latin typeface="Arial"/>
+              </a:rPr>
+              <a:t>Click to edit the title text format</a:t>
+            </a:r>
+            <a:endParaRPr lang="en-US" sz="1800" b="0" u="none" strike="noStrike">
+              <a:solidFill>
+                <a:srgbClr val="000000"/>
+              </a:solidFill>
+              <a:effectLst/>
+              <a:uFillTx/>
+              <a:latin typeface="Arial"/>
+            </a:endParaRPr>
+          </a:p>
+        </p:txBody>
+      </p:sp>
+      <p:sp>
+        <p:nvSpPr>
+          <p:cNvPr id="7" name="PlaceHolder 2"/>
+          <p:cNvSpPr>
+            <a:spLocks noGrp="1"/>
+          </p:cNvSpPr>
+          <p:nvPr>
+            <p:ph type="body"/>
+          </p:nvPr>
+        </p:nvSpPr>
+        <p:spPr>
+          <a:xfrm>
+            <a:off x="457200" y="1604520"/>
+            <a:ext cx="8229240" cy="3977280"/>
+          </a:xfrm>
+          <a:prstGeom prst="rect">
+            <a:avLst/>
+          </a:prstGeom>
+          <a:noFill/>
+          <a:ln w="0">
+            <a:noFill/>
+          </a:ln>
+        </p:spPr>
+        <p:txBody>
+          <a:bodyPr lIns="0" rIns="0" tIns="0" bIns="0" anchor="t">
+            <a:normAutofit/>
+          </a:bodyPr>
+          <a:p>
+            <a:pPr marL="432000" indent="-324000">
+              <a:spcBef>
+                <a:spcPts val="1417"/>
+              </a:spcBef>
+              <a:buClr>
+                <a:srgbClr val="000000"/>
+              </a:buClr>
+              <a:buSzPct val="45000"/>
+              <a:buFont typeface="Wingdings" charset="2"/>
+              <a:buChar char=""/>
+            </a:pPr>
+            <a:r>
+              <a:rPr lang="en-US" sz="3200" b="0" u="none" strike="noStrike">
+                <a:solidFill>
+                  <a:srgbClr val="000000"/>
+                </a:solidFill>
+                <a:effectLst/>
+                <a:uFillTx/>
+                <a:latin typeface="Arial"/>
+              </a:rPr>
+              <a:t>Click to edit the outline text format</a:t>
+            </a:r>
+            <a:endParaRPr lang="en-US" sz="3200" b="0" u="none" strike="noStrike">
+              <a:solidFill>
+                <a:srgbClr val="000000"/>
+              </a:solidFill>
+              <a:effectLst/>
+              <a:uFillTx/>
+              <a:latin typeface="Arial"/>
+            </a:endParaRPr>
+          </a:p>
+          <a:p>
+            <a:pPr marL="864000" lvl="1" indent="-324000">
+              <a:spcBef>
+                <a:spcPts val="1134"/>
+              </a:spcBef>
+              <a:buClr>
+                <a:srgbClr val="000000"/>
+              </a:buClr>
+              <a:buSzPct val="75000"/>
+              <a:buFont typeface="Symbol" charset="2"/>
+              <a:buChar char=""/>
+            </a:pPr>
+            <a:r>
+              <a:rPr lang="en-US" sz="2800" b="0" u="none" strike="noStrike">
+                <a:solidFill>
+                  <a:srgbClr val="000000"/>
+                </a:solidFill>
+                <a:effectLst/>
+                <a:uFillTx/>
+                <a:latin typeface="Arial"/>
+              </a:rPr>
+              <a:t>Second Outline Level</a:t>
+            </a:r>
+            <a:endParaRPr lang="en-US" sz="2800" b="0" u="none" strike="noStrike">
+              <a:solidFill>
+                <a:srgbClr val="000000"/>
+              </a:solidFill>
+              <a:effectLst/>
+              <a:uFillTx/>
+              <a:latin typeface="Arial"/>
+            </a:endParaRPr>
+          </a:p>
+          <a:p>
+            <a:pPr marL="1296000" lvl="2" indent="-288000">
+              <a:spcBef>
+                <a:spcPts val="850"/>
+              </a:spcBef>
+              <a:buClr>
+                <a:srgbClr val="000000"/>
+              </a:buClr>
+              <a:buSzPct val="45000"/>
+              <a:buFont typeface="Wingdings" charset="2"/>
+              <a:buChar char=""/>
+            </a:pPr>
+            <a:r>
+              <a:rPr lang="en-US" sz="2400" b="0" u="none" strike="noStrike">
+                <a:solidFill>
+                  <a:srgbClr val="000000"/>
+                </a:solidFill>
+                <a:effectLst/>
+                <a:uFillTx/>
+                <a:latin typeface="Arial"/>
+              </a:rPr>
+              <a:t>Third Outline Level</a:t>
+            </a:r>
+            <a:endParaRPr lang="en-US" sz="2400" b="0" u="none" strike="noStrike">
+              <a:solidFill>
+                <a:srgbClr val="000000"/>
+              </a:solidFill>
+              <a:effectLst/>
+              <a:uFillTx/>
+              <a:latin typeface="Arial"/>
+            </a:endParaRPr>
+          </a:p>
+          <a:p>
+            <a:pPr marL="1728000" lvl="3" indent="-216000">
+              <a:spcBef>
+                <a:spcPts val="567"/>
+              </a:spcBef>
+              <a:buClr>
+                <a:srgbClr val="000000"/>
+              </a:buClr>
+              <a:buSzPct val="75000"/>
+              <a:buFont typeface="Symbol" charset="2"/>
+              <a:buChar char=""/>
+            </a:pPr>
+            <a:r>
+              <a:rPr lang="en-US" sz="2000" b="0" u="none" strike="noStrike">
+                <a:solidFill>
+                  <a:srgbClr val="000000"/>
+                </a:solidFill>
+                <a:effectLst/>
+                <a:uFillTx/>
+                <a:latin typeface="Arial"/>
+              </a:rPr>
+              <a:t>Fourth Outline Level</a:t>
+            </a:r>
+            <a:endParaRPr lang="en-US" sz="2000" b="0" u="none" strike="noStrike">
+              <a:solidFill>
+                <a:srgbClr val="000000"/>
+              </a:solidFill>
+              <a:effectLst/>
+              <a:uFillTx/>
+              <a:latin typeface="Arial"/>
+            </a:endParaRPr>
+          </a:p>
+          <a:p>
+            <a:pPr marL="2160000" lvl="4" indent="-216000">
+              <a:spcBef>
+                <a:spcPts val="283"/>
+              </a:spcBef>
+              <a:buClr>
+                <a:srgbClr val="000000"/>
+              </a:buClr>
+              <a:buSzPct val="45000"/>
+              <a:buFont typeface="Wingdings" charset="2"/>
+              <a:buChar char=""/>
+            </a:pPr>
+            <a:r>
+              <a:rPr lang="en-US" sz="2000" b="0" u="none" strike="noStrike">
+                <a:solidFill>
+                  <a:srgbClr val="000000"/>
+                </a:solidFill>
+                <a:effectLst/>
+                <a:uFillTx/>
+                <a:latin typeface="Arial"/>
+              </a:rPr>
+              <a:t>Fifth Outline Level</a:t>
+            </a:r>
+            <a:endParaRPr lang="en-US" sz="2000" b="0" u="none" strike="noStrike">
+              <a:solidFill>
+                <a:srgbClr val="000000"/>
+              </a:solidFill>
+              <a:effectLst/>
+              <a:uFillTx/>
+              <a:latin typeface="Arial"/>
+            </a:endParaRPr>
+          </a:p>
+          <a:p>
+            <a:pPr marL="2592000" lvl="5" indent="-216000">
+              <a:spcBef>
+                <a:spcPts val="283"/>
+              </a:spcBef>
+              <a:buClr>
+                <a:srgbClr val="000000"/>
+              </a:buClr>
+              <a:buSzPct val="45000"/>
+              <a:buFont typeface="Wingdings" charset="2"/>
+              <a:buChar char=""/>
+            </a:pPr>
+            <a:r>
+              <a:rPr lang="en-US" sz="2000" b="0" u="none" strike="noStrike">
+                <a:solidFill>
+                  <a:srgbClr val="000000"/>
+                </a:solidFill>
+                <a:effectLst/>
+                <a:uFillTx/>
+                <a:latin typeface="Arial"/>
+              </a:rPr>
+              <a:t>Sixth Outline Level</a:t>
+            </a:r>
+            <a:endParaRPr lang="en-US" sz="2000" b="0" u="none" strike="noStrike">
+              <a:solidFill>
+                <a:srgbClr val="000000"/>
+              </a:solidFill>
+              <a:effectLst/>
+              <a:uFillTx/>
+              <a:latin typeface="Arial"/>
+            </a:endParaRPr>
+          </a:p>
+          <a:p>
+            <a:pPr marL="3024000" lvl="6" indent="-216000">
+              <a:spcBef>
+                <a:spcPts val="283"/>
+              </a:spcBef>
+              <a:buClr>
+                <a:srgbClr val="000000"/>
+              </a:buClr>
+              <a:buSzPct val="45000"/>
+              <a:buFont typeface="Wingdings" charset="2"/>
+              <a:buChar char=""/>
+            </a:pPr>
+            <a:r>
+              <a:rPr lang="en-US" sz="2000" b="0" u="none" strike="noStrike">
+                <a:solidFill>
+                  <a:srgbClr val="000000"/>
+                </a:solidFill>
+                <a:effectLst/>
+                <a:uFillTx/>
+                <a:latin typeface="Arial"/>
+              </a:rPr>
+              <a:t>Seventh Outline Level</a:t>
+            </a:r>
+            <a:endParaRPr lang="en-US" sz="2000" b="0" u="none" strike="noStrike">
+              <a:solidFill>
+                <a:srgbClr val="000000"/>
+              </a:solidFill>
+              <a:effectLst/>
+              <a:uFillTx/>
+              <a:latin typeface="Arial"/>
+            </a:endParaRPr>
+          </a:p>
+        </p:txBody>
+      </p:sp>
+    </p:spTree>
+  </p:cSld>
+</p:sldLayout>
+</file>
+
+<file path=ppt/slideLayouts/slideLayout3.xml><?xml version="1.0" encoding="utf-8"?>
+<p:sldLayout xmlns:a="http://schemas.openxmlformats.org/drawingml/2006/main" xmlns:p="http://schemas.openxmlformats.org/presentationml/2006/main" xmlns:r="http://schemas.openxmlformats.org/officeDocument/2006/relationships" xmlns:p14="http://schemas.microsoft.com/office/powerpoint/2010/main" xmlns:p15="http://schemas.microsoft.com/office/powerpoint/2012/main" xmlns:mc="http://schemas.openxmlformats.org/markup-compatibility/2006" type="blank" preserve="1">
+  <p:cSld name="MasterSlide1">
+    <p:bg>
+      <p:bgPr>
+        <a:solidFill>
+          <a:srgbClr val="ffffff"/>
+        </a:solidFill>
+      </p:bgPr>
+    </p:bg>
+    <p:spTree>
+      <p:nvGrpSpPr>
+        <p:cNvPr id="1" name=""/>
+        <p:cNvGrpSpPr/>
+        <p:nvPr/>
+      </p:nvGrpSpPr>
+      <p:grpSpPr>
+        <a:xfrm>
+          <a:off x="0" y="0"/>
+          <a:ext cx="0" cy="0"/>
+          <a:chOff x="0" y="0"/>
+          <a:chExt cx="0" cy="0"/>
+        </a:xfrm>
+      </p:grpSpPr>
+      <p:sp>
+        <p:nvSpPr>
+          <p:cNvPr id="8" name=""/>
+          <p:cNvSpPr/>
+          <p:nvPr/>
+        </p:nvSpPr>
+        <p:spPr>
+          <a:xfrm>
+            <a:off x="4187880" y="6642000"/>
+            <a:ext cx="796680" cy="342720"/>
+          </a:xfrm>
+          <a:prstGeom prst="rect">
+            <a:avLst/>
+          </a:prstGeom>
+          <a:noFill/>
+          <a:ln w="0">
+            <a:noFill/>
+          </a:ln>
+        </p:spPr>
+        <p:style>
+          <a:lnRef idx="0"/>
+          <a:fillRef idx="0"/>
+          <a:effectRef idx="0"/>
+          <a:fontRef idx="minor"/>
+        </p:style>
+        <p:txBody>
+          <a:bodyPr lIns="90000" rIns="90000" tIns="45000" bIns="45000" anchor="t">
+            <a:spAutoFit/>
+          </a:bodyPr>
+          <a:p>
+            <a:pPr>
+              <a:lnSpc>
+                <a:spcPct val="100000"/>
+              </a:lnSpc>
+            </a:pPr>
+            <a:r>
+              <a:rPr lang="en-US" sz="1000" b="0" u="none" strike="noStrike">
+                <a:solidFill>
+                  <a:srgbClr val="ff0000"/>
+                </a:solidFill>
+                <a:effectLst/>
+                <a:uFillTx/>
+                <a:latin typeface="Calibri"/>
+                <a:ea typeface="Calibri"/>
+              </a:rPr>
+              <a:t>CONFIDENTIAL</a:t>
+            </a:r>
+            <a:endParaRPr lang="en-US" sz="1000" b="0" u="none" strike="noStrike">
+              <a:solidFill>
+                <a:srgbClr val="000000"/>
+              </a:solidFill>
+              <a:effectLst/>
+              <a:uFillTx/>
+              <a:latin typeface="Arial"/>
+            </a:endParaRPr>
+          </a:p>
+        </p:txBody>
+      </p:sp>
+      <p:sp>
+        <p:nvSpPr>
+          <p:cNvPr id="9" name="PlaceHolder 1"/>
+          <p:cNvSpPr>
+            <a:spLocks noGrp="1"/>
+          </p:cNvSpPr>
+          <p:nvPr>
+            <p:ph type="title"/>
+          </p:nvPr>
+        </p:nvSpPr>
+        <p:spPr>
+          <a:xfrm>
+            <a:off x="457200" y="273600"/>
+            <a:ext cx="8228880" cy="1144440"/>
+          </a:xfrm>
+          <a:prstGeom prst="rect">
+            <a:avLst/>
+          </a:prstGeom>
+          <a:noFill/>
+          <a:ln w="0">
+            <a:noFill/>
+          </a:ln>
+        </p:spPr>
+        <p:txBody>
+          <a:bodyPr lIns="0" rIns="0" tIns="0" bIns="0" anchor="ctr">
+            <a:noAutofit/>
+          </a:bodyPr>
+          <a:p>
+            <a:pPr indent="0" algn="ctr">
+              <a:lnSpc>
+                <a:spcPct val="100000"/>
+              </a:lnSpc>
+              <a:buNone/>
+              <a:tabLst>
+                <a:tab algn="l" pos="0"/>
+              </a:tabLst>
+            </a:pPr>
+            <a:r>
+              <a:rPr lang="en-US" sz="4400" b="0" u="none" strike="noStrike">
+                <a:solidFill>
+                  <a:srgbClr val="000000"/>
+                </a:solidFill>
+                <a:effectLst/>
+                <a:uFillTx/>
+                <a:latin typeface="Arial"/>
+              </a:rPr>
+              <a:t>Click to edit the title text format</a:t>
+            </a:r>
+            <a:endParaRPr lang="en-US" sz="4400" b="0" u="none" strike="noStrike">
+              <a:solidFill>
+                <a:srgbClr val="000000"/>
+              </a:solidFill>
+              <a:effectLst/>
+              <a:uFillTx/>
+              <a:latin typeface="Arial"/>
+            </a:endParaRPr>
+          </a:p>
+        </p:txBody>
+      </p:sp>
+      <p:sp>
+        <p:nvSpPr>
+          <p:cNvPr id="10" name="PlaceHolder 2"/>
+          <p:cNvSpPr>
+            <a:spLocks noGrp="1"/>
+          </p:cNvSpPr>
+          <p:nvPr>
+            <p:ph type="body"/>
+          </p:nvPr>
+        </p:nvSpPr>
+        <p:spPr>
+          <a:xfrm>
+            <a:off x="457200" y="1604520"/>
+            <a:ext cx="8228880" cy="3976920"/>
+          </a:xfrm>
+          <a:prstGeom prst="rect">
+            <a:avLst/>
+          </a:prstGeom>
+          <a:noFill/>
+          <a:ln w="0">
+            <a:noFill/>
+          </a:ln>
+        </p:spPr>
+        <p:txBody>
+          <a:bodyPr lIns="0" rIns="0" tIns="0" bIns="0" anchor="t">
+            <a:normAutofit/>
+          </a:bodyPr>
+          <a:p>
+            <a:pPr marL="432000" indent="-324000">
+              <a:lnSpc>
+                <a:spcPct val="100000"/>
+              </a:lnSpc>
+              <a:spcBef>
+                <a:spcPts val="1417"/>
+              </a:spcBef>
+              <a:buClr>
+                <a:srgbClr val="000000"/>
+              </a:buClr>
+              <a:buSzPct val="45000"/>
+              <a:buFont typeface="Wingdings" charset="2"/>
+              <a:buChar char=""/>
+            </a:pPr>
+            <a:r>
+              <a:rPr lang="en-US" sz="3200" b="0" u="none" strike="noStrike">
+                <a:solidFill>
+                  <a:srgbClr val="000000"/>
+                </a:solidFill>
+                <a:effectLst/>
+                <a:uFillTx/>
+                <a:latin typeface="Arial"/>
+              </a:rPr>
+              <a:t>Click to edit the outline text format</a:t>
+            </a:r>
+            <a:endParaRPr lang="en-US" sz="3200" b="0" u="none" strike="noStrike">
+              <a:solidFill>
+                <a:srgbClr val="000000"/>
+              </a:solidFill>
+              <a:effectLst/>
+              <a:uFillTx/>
+              <a:latin typeface="Arial"/>
+            </a:endParaRPr>
+          </a:p>
+          <a:p>
+            <a:pPr marL="864000" lvl="1" indent="-324000">
+              <a:lnSpc>
+                <a:spcPct val="100000"/>
+              </a:lnSpc>
+              <a:spcBef>
+                <a:spcPts val="1134"/>
+              </a:spcBef>
+              <a:buClr>
+                <a:srgbClr val="000000"/>
+              </a:buClr>
+              <a:buSzPct val="75000"/>
+              <a:buFont typeface="Symbol" charset="2"/>
+              <a:buChar char=""/>
+            </a:pPr>
+            <a:r>
+              <a:rPr lang="en-US" sz="2800" b="0" u="none" strike="noStrike">
+                <a:solidFill>
+                  <a:srgbClr val="000000"/>
+                </a:solidFill>
+                <a:effectLst/>
+                <a:uFillTx/>
+                <a:latin typeface="Arial"/>
+              </a:rPr>
+              <a:t>Second Outline Level</a:t>
+            </a:r>
+            <a:endParaRPr lang="en-US" sz="2800" b="0" u="none" strike="noStrike">
+              <a:solidFill>
+                <a:srgbClr val="000000"/>
+              </a:solidFill>
+              <a:effectLst/>
+              <a:uFillTx/>
+              <a:latin typeface="Arial"/>
+            </a:endParaRPr>
+          </a:p>
+          <a:p>
+            <a:pPr marL="1296000" lvl="2" indent="-288000">
+              <a:lnSpc>
+                <a:spcPct val="100000"/>
+              </a:lnSpc>
+              <a:spcBef>
+                <a:spcPts val="850"/>
+              </a:spcBef>
+              <a:buClr>
+                <a:srgbClr val="000000"/>
+              </a:buClr>
+              <a:buSzPct val="45000"/>
+              <a:buFont typeface="Wingdings" charset="2"/>
+              <a:buChar char=""/>
+            </a:pPr>
+            <a:r>
+              <a:rPr lang="en-US" sz="2400" b="0" u="none" strike="noStrike">
+                <a:solidFill>
+                  <a:srgbClr val="000000"/>
+                </a:solidFill>
+                <a:effectLst/>
+                <a:uFillTx/>
+                <a:latin typeface="Arial"/>
+              </a:rPr>
+              <a:t>Third Outline Level</a:t>
+            </a:r>
+            <a:endParaRPr lang="en-US" sz="2400" b="0" u="none" strike="noStrike">
+              <a:solidFill>
+                <a:srgbClr val="000000"/>
+              </a:solidFill>
+              <a:effectLst/>
+              <a:uFillTx/>
+              <a:latin typeface="Arial"/>
+            </a:endParaRPr>
+          </a:p>
+          <a:p>
+            <a:pPr marL="1728000" lvl="3" indent="-216000">
+              <a:lnSpc>
+                <a:spcPct val="100000"/>
+              </a:lnSpc>
+              <a:spcBef>
+                <a:spcPts val="567"/>
+              </a:spcBef>
+              <a:buClr>
+                <a:srgbClr val="000000"/>
+              </a:buClr>
+              <a:buSzPct val="75000"/>
+              <a:buFont typeface="Symbol" charset="2"/>
+              <a:buChar char=""/>
+            </a:pPr>
+            <a:r>
+              <a:rPr lang="en-US" sz="2000" b="0" u="none" strike="noStrike">
+                <a:solidFill>
+                  <a:srgbClr val="000000"/>
+                </a:solidFill>
+                <a:effectLst/>
+                <a:uFillTx/>
+                <a:latin typeface="Arial"/>
+              </a:rPr>
+              <a:t>Fourth Outline Level</a:t>
+            </a:r>
+            <a:endParaRPr lang="en-US" sz="2000" b="0" u="none" strike="noStrike">
+              <a:solidFill>
+                <a:srgbClr val="000000"/>
+              </a:solidFill>
+              <a:effectLst/>
+              <a:uFillTx/>
+              <a:latin typeface="Arial"/>
+            </a:endParaRPr>
+          </a:p>
+          <a:p>
+            <a:pPr marL="2160000" lvl="4" indent="-216000">
+              <a:lnSpc>
+                <a:spcPct val="100000"/>
+              </a:lnSpc>
+              <a:spcBef>
+                <a:spcPts val="283"/>
+              </a:spcBef>
+              <a:buClr>
+                <a:srgbClr val="000000"/>
+              </a:buClr>
+              <a:buSzPct val="45000"/>
+              <a:buFont typeface="Wingdings" charset="2"/>
+              <a:buChar char=""/>
+            </a:pPr>
+            <a:r>
+              <a:rPr lang="en-US" sz="2000" b="0" u="none" strike="noStrike">
+                <a:solidFill>
+                  <a:srgbClr val="000000"/>
+                </a:solidFill>
+                <a:effectLst/>
+                <a:uFillTx/>
+                <a:latin typeface="Arial"/>
+              </a:rPr>
+              <a:t>Fifth Outline Level</a:t>
+            </a:r>
+            <a:endParaRPr lang="en-US" sz="2000" b="0" u="none" strike="noStrike">
+              <a:solidFill>
+                <a:srgbClr val="000000"/>
+              </a:solidFill>
+              <a:effectLst/>
+              <a:uFillTx/>
+              <a:latin typeface="Arial"/>
+            </a:endParaRPr>
+          </a:p>
+          <a:p>
+            <a:pPr marL="2592000" lvl="5" indent="-216000">
+              <a:lnSpc>
+                <a:spcPct val="100000"/>
+              </a:lnSpc>
+              <a:spcBef>
+                <a:spcPts val="283"/>
+              </a:spcBef>
+              <a:buClr>
+                <a:srgbClr val="000000"/>
+              </a:buClr>
+              <a:buSzPct val="45000"/>
+              <a:buFont typeface="Wingdings" charset="2"/>
+              <a:buChar char=""/>
+            </a:pPr>
+            <a:r>
+              <a:rPr lang="en-US" sz="2000" b="0" u="none" strike="noStrike">
+                <a:solidFill>
+                  <a:srgbClr val="000000"/>
+                </a:solidFill>
+                <a:effectLst/>
+                <a:uFillTx/>
+                <a:latin typeface="Arial"/>
+              </a:rPr>
+              <a:t>Sixth Outline Level</a:t>
+            </a:r>
+            <a:endParaRPr lang="en-US" sz="2000" b="0" u="none" strike="noStrike">
+              <a:solidFill>
+                <a:srgbClr val="000000"/>
+              </a:solidFill>
+              <a:effectLst/>
+              <a:uFillTx/>
+              <a:latin typeface="Arial"/>
+            </a:endParaRPr>
+          </a:p>
+          <a:p>
+            <a:pPr marL="3024000" lvl="6" indent="-216000">
+              <a:lnSpc>
+                <a:spcPct val="100000"/>
+              </a:lnSpc>
+              <a:spcBef>
+                <a:spcPts val="283"/>
+              </a:spcBef>
+              <a:buClr>
+                <a:srgbClr val="000000"/>
+              </a:buClr>
+              <a:buSzPct val="45000"/>
+              <a:buFont typeface="Wingdings" charset="2"/>
+              <a:buChar char=""/>
+            </a:pPr>
+            <a:r>
+              <a:rPr lang="en-US" sz="2000" b="0" u="none" strike="noStrike">
+                <a:solidFill>
+                  <a:srgbClr val="000000"/>
+                </a:solidFill>
+                <a:effectLst/>
+                <a:uFillTx/>
+                <a:latin typeface="Arial"/>
+              </a:rPr>
+              <a:t>Seventh Outline Level</a:t>
+            </a:r>
+            <a:endParaRPr lang="en-US" sz="2000" b="0" u="none" strike="noStrike">
+              <a:solidFill>
+                <a:srgbClr val="000000"/>
+              </a:solidFill>
+              <a:effectLst/>
+              <a:uFillTx/>
+              <a:latin typeface="Arial"/>
+            </a:endParaRPr>
+          </a:p>
+        </p:txBody>
+      </p:sp>
+    </p:spTree>
+  </p:cSld>
+</p:sldLayout>
+</file>
+
+<file path=ppt/slideLayouts/slideLayout4.xml><?xml version="1.0" encoding="utf-8"?>
+<p:sldLayout xmlns:a="http://schemas.openxmlformats.org/drawingml/2006/main" xmlns:p="http://schemas.openxmlformats.org/presentationml/2006/main" xmlns:r="http://schemas.openxmlformats.org/officeDocument/2006/relationships" xmlns:p14="http://schemas.microsoft.com/office/powerpoint/2010/main" xmlns:p15="http://schemas.microsoft.com/office/powerpoint/2012/main" xmlns:mc="http://schemas.openxmlformats.org/markup-compatibility/2006" type="blank" preserve="1">
+  <p:cSld name="MasterSlide2">
+    <p:bg>
+      <p:bgPr>
+        <a:solidFill>
+          <a:srgbClr val="ffffff"/>
+        </a:solidFill>
+      </p:bgPr>
+    </p:bg>
+    <p:spTree>
+      <p:nvGrpSpPr>
+        <p:cNvPr id="1" name=""/>
+        <p:cNvGrpSpPr/>
+        <p:nvPr/>
+      </p:nvGrpSpPr>
+      <p:grpSpPr>
+        <a:xfrm>
+          <a:off x="0" y="0"/>
+          <a:ext cx="0" cy="0"/>
+          <a:chOff x="0" y="0"/>
+          <a:chExt cx="0" cy="0"/>
+        </a:xfrm>
+      </p:grpSpPr>
+      <p:sp>
+        <p:nvSpPr>
+          <p:cNvPr id="11" name=""/>
+          <p:cNvSpPr/>
+          <p:nvPr/>
+        </p:nvSpPr>
+        <p:spPr>
+          <a:xfrm>
+            <a:off x="4187880" y="6642000"/>
+            <a:ext cx="796680" cy="342720"/>
+          </a:xfrm>
+          <a:prstGeom prst="rect">
+            <a:avLst/>
+          </a:prstGeom>
+          <a:noFill/>
+          <a:ln w="0">
+            <a:noFill/>
+          </a:ln>
+        </p:spPr>
+        <p:style>
+          <a:lnRef idx="0"/>
+          <a:fillRef idx="0"/>
+          <a:effectRef idx="0"/>
+          <a:fontRef idx="minor"/>
+        </p:style>
+        <p:txBody>
+          <a:bodyPr lIns="90000" rIns="90000" tIns="45000" bIns="45000" anchor="t">
+            <a:spAutoFit/>
+          </a:bodyPr>
+          <a:p>
+            <a:pPr>
+              <a:lnSpc>
+                <a:spcPct val="100000"/>
+              </a:lnSpc>
+            </a:pPr>
+            <a:r>
+              <a:rPr lang="en-US" sz="1000" b="0" u="none" strike="noStrike">
+                <a:solidFill>
+                  <a:srgbClr val="ff0000"/>
+                </a:solidFill>
+                <a:effectLst/>
+                <a:uFillTx/>
+                <a:latin typeface="Calibri"/>
+                <a:ea typeface="Calibri"/>
+              </a:rPr>
+              <a:t>CONFIDENTIAL</a:t>
+            </a:r>
+            <a:endParaRPr lang="en-US" sz="1000" b="0" u="none" strike="noStrike">
+              <a:solidFill>
+                <a:srgbClr val="000000"/>
+              </a:solidFill>
+              <a:effectLst/>
+              <a:uFillTx/>
+              <a:latin typeface="Arial"/>
+            </a:endParaRPr>
+          </a:p>
+        </p:txBody>
+      </p:sp>
+      <p:pic>
+        <p:nvPicPr>
+          <p:cNvPr id="12" name=""/>
+          <p:cNvPicPr/>
+          <p:nvPr/>
+        </p:nvPicPr>
+        <p:blipFill>
+          <a:blip r:embed="rId2"/>
+          <a:stretch/>
+        </p:blipFill>
+        <p:spPr>
+          <a:xfrm>
+            <a:off x="2187720" y="2711520"/>
+            <a:ext cx="4967640" cy="1484280"/>
+          </a:xfrm>
+          <a:prstGeom prst="rect">
+            <a:avLst/>
+          </a:prstGeom>
+          <a:noFill/>
+          <a:ln w="0">
+            <a:noFill/>
+          </a:ln>
+        </p:spPr>
+      </p:pic>
+      <p:pic>
+        <p:nvPicPr>
+          <p:cNvPr id="13" name=""/>
+          <p:cNvPicPr/>
+          <p:nvPr/>
+        </p:nvPicPr>
+        <p:blipFill>
+          <a:blip r:embed="rId3"/>
+          <a:stretch/>
+        </p:blipFill>
+        <p:spPr>
+          <a:xfrm>
+            <a:off x="3478320" y="3980160"/>
+            <a:ext cx="3671640" cy="212760"/>
+          </a:xfrm>
+          <a:prstGeom prst="rect">
+            <a:avLst/>
+          </a:prstGeom>
+          <a:noFill/>
+          <a:ln w="0">
+            <a:noFill/>
+          </a:ln>
+        </p:spPr>
+      </p:pic>
+      <p:sp>
+        <p:nvSpPr>
+          <p:cNvPr id="14" name="PlaceHolder 1"/>
+          <p:cNvSpPr>
+            <a:spLocks noGrp="1"/>
+          </p:cNvSpPr>
+          <p:nvPr>
+            <p:ph type="title"/>
+          </p:nvPr>
+        </p:nvSpPr>
+        <p:spPr>
+          <a:xfrm>
+            <a:off x="457200" y="273600"/>
+            <a:ext cx="8228880" cy="1144440"/>
+          </a:xfrm>
+          <a:prstGeom prst="rect">
+            <a:avLst/>
+          </a:prstGeom>
+          <a:noFill/>
+          <a:ln w="0">
+            <a:noFill/>
+          </a:ln>
+        </p:spPr>
+        <p:txBody>
+          <a:bodyPr lIns="0" rIns="0" tIns="0" bIns="0" anchor="ctr">
+            <a:noAutofit/>
+          </a:bodyPr>
+          <a:p>
+            <a:pPr indent="0" algn="ctr">
+              <a:lnSpc>
+                <a:spcPct val="100000"/>
+              </a:lnSpc>
+              <a:buNone/>
+              <a:tabLst>
+                <a:tab algn="l" pos="0"/>
+              </a:tabLst>
+            </a:pPr>
+            <a:r>
+              <a:rPr lang="en-US" sz="4400" b="0" u="none" strike="noStrike">
+                <a:solidFill>
+                  <a:srgbClr val="000000"/>
+                </a:solidFill>
+                <a:effectLst/>
+                <a:uFillTx/>
+                <a:latin typeface="Arial"/>
+              </a:rPr>
+              <a:t>Click to edit the title text format</a:t>
+            </a:r>
+            <a:endParaRPr lang="en-US" sz="4400" b="0" u="none" strike="noStrike">
+              <a:solidFill>
+                <a:srgbClr val="000000"/>
+              </a:solidFill>
+              <a:effectLst/>
+              <a:uFillTx/>
+              <a:latin typeface="Arial"/>
+            </a:endParaRPr>
+          </a:p>
+        </p:txBody>
+      </p:sp>
+      <p:sp>
+        <p:nvSpPr>
+          <p:cNvPr id="15" name="PlaceHolder 2"/>
+          <p:cNvSpPr>
+            <a:spLocks noGrp="1"/>
+          </p:cNvSpPr>
+          <p:nvPr>
+            <p:ph type="body"/>
+          </p:nvPr>
+        </p:nvSpPr>
+        <p:spPr>
+          <a:xfrm>
+            <a:off x="457200" y="1604520"/>
+            <a:ext cx="8228880" cy="3976920"/>
+          </a:xfrm>
+          <a:prstGeom prst="rect">
+            <a:avLst/>
+          </a:prstGeom>
+          <a:noFill/>
+          <a:ln w="0">
+            <a:noFill/>
+          </a:ln>
+        </p:spPr>
+        <p:txBody>
+          <a:bodyPr lIns="0" rIns="0" tIns="0" bIns="0" anchor="t">
+            <a:normAutofit/>
+          </a:bodyPr>
+          <a:p>
+            <a:pPr marL="432000" indent="-324000">
+              <a:lnSpc>
+                <a:spcPct val="100000"/>
+              </a:lnSpc>
+              <a:spcBef>
+                <a:spcPts val="1417"/>
+              </a:spcBef>
+              <a:buClr>
+                <a:srgbClr val="000000"/>
+              </a:buClr>
+              <a:buSzPct val="45000"/>
+              <a:buFont typeface="Wingdings" charset="2"/>
+              <a:buChar char=""/>
+            </a:pPr>
+            <a:r>
+              <a:rPr lang="en-US" sz="3200" b="0" u="none" strike="noStrike">
+                <a:solidFill>
+                  <a:srgbClr val="000000"/>
+                </a:solidFill>
+                <a:effectLst/>
+                <a:uFillTx/>
+                <a:latin typeface="Arial"/>
+              </a:rPr>
+              <a:t>Click to edit the outline text format</a:t>
+            </a:r>
+            <a:endParaRPr lang="en-US" sz="3200" b="0" u="none" strike="noStrike">
+              <a:solidFill>
+                <a:srgbClr val="000000"/>
+              </a:solidFill>
+              <a:effectLst/>
+              <a:uFillTx/>
+              <a:latin typeface="Arial"/>
+            </a:endParaRPr>
+          </a:p>
+          <a:p>
+            <a:pPr marL="864000" lvl="1" indent="-324000">
+              <a:lnSpc>
+                <a:spcPct val="100000"/>
+              </a:lnSpc>
+              <a:spcBef>
+                <a:spcPts val="1134"/>
+              </a:spcBef>
+              <a:buClr>
+                <a:srgbClr val="000000"/>
+              </a:buClr>
+              <a:buSzPct val="75000"/>
+              <a:buFont typeface="Symbol" charset="2"/>
+              <a:buChar char=""/>
+            </a:pPr>
+            <a:r>
+              <a:rPr lang="en-US" sz="2800" b="0" u="none" strike="noStrike">
+                <a:solidFill>
+                  <a:srgbClr val="000000"/>
+                </a:solidFill>
+                <a:effectLst/>
+                <a:uFillTx/>
+                <a:latin typeface="Arial"/>
+              </a:rPr>
+              <a:t>Second Outline Level</a:t>
+            </a:r>
+            <a:endParaRPr lang="en-US" sz="2800" b="0" u="none" strike="noStrike">
+              <a:solidFill>
+                <a:srgbClr val="000000"/>
+              </a:solidFill>
+              <a:effectLst/>
+              <a:uFillTx/>
+              <a:latin typeface="Arial"/>
+            </a:endParaRPr>
+          </a:p>
+          <a:p>
+            <a:pPr marL="1296000" lvl="2" indent="-288000">
+              <a:lnSpc>
+                <a:spcPct val="100000"/>
+              </a:lnSpc>
+              <a:spcBef>
+                <a:spcPts val="850"/>
+              </a:spcBef>
+              <a:buClr>
+                <a:srgbClr val="000000"/>
+              </a:buClr>
+              <a:buSzPct val="45000"/>
+              <a:buFont typeface="Wingdings" charset="2"/>
+              <a:buChar char=""/>
+            </a:pPr>
+            <a:r>
+              <a:rPr lang="en-US" sz="2400" b="0" u="none" strike="noStrike">
+                <a:solidFill>
+                  <a:srgbClr val="000000"/>
+                </a:solidFill>
+                <a:effectLst/>
+                <a:uFillTx/>
+                <a:latin typeface="Arial"/>
+              </a:rPr>
+              <a:t>Third Outline Level</a:t>
+            </a:r>
+            <a:endParaRPr lang="en-US" sz="2400" b="0" u="none" strike="noStrike">
+              <a:solidFill>
+                <a:srgbClr val="000000"/>
+              </a:solidFill>
+              <a:effectLst/>
+              <a:uFillTx/>
+              <a:latin typeface="Arial"/>
+            </a:endParaRPr>
+          </a:p>
+          <a:p>
+            <a:pPr marL="1728000" lvl="3" indent="-216000">
+              <a:lnSpc>
+                <a:spcPct val="100000"/>
+              </a:lnSpc>
+              <a:spcBef>
+                <a:spcPts val="567"/>
+              </a:spcBef>
+              <a:buClr>
+                <a:srgbClr val="000000"/>
+              </a:buClr>
+              <a:buSzPct val="75000"/>
+              <a:buFont typeface="Symbol" charset="2"/>
+              <a:buChar char=""/>
+            </a:pPr>
+            <a:r>
+              <a:rPr lang="en-US" sz="2000" b="0" u="none" strike="noStrike">
+                <a:solidFill>
+                  <a:srgbClr val="000000"/>
+                </a:solidFill>
+                <a:effectLst/>
+                <a:uFillTx/>
+                <a:latin typeface="Arial"/>
+              </a:rPr>
+              <a:t>Fourth Outline Level</a:t>
+            </a:r>
+            <a:endParaRPr lang="en-US" sz="2000" b="0" u="none" strike="noStrike">
+              <a:solidFill>
+                <a:srgbClr val="000000"/>
+              </a:solidFill>
+              <a:effectLst/>
+              <a:uFillTx/>
+              <a:latin typeface="Arial"/>
+            </a:endParaRPr>
+          </a:p>
+          <a:p>
+            <a:pPr marL="2160000" lvl="4" indent="-216000">
+              <a:lnSpc>
+                <a:spcPct val="100000"/>
+              </a:lnSpc>
+              <a:spcBef>
+                <a:spcPts val="283"/>
+              </a:spcBef>
+              <a:buClr>
+                <a:srgbClr val="000000"/>
+              </a:buClr>
+              <a:buSzPct val="45000"/>
+              <a:buFont typeface="Wingdings" charset="2"/>
+              <a:buChar char=""/>
+            </a:pPr>
+            <a:r>
+              <a:rPr lang="en-US" sz="2000" b="0" u="none" strike="noStrike">
+                <a:solidFill>
+                  <a:srgbClr val="000000"/>
+                </a:solidFill>
+                <a:effectLst/>
+                <a:uFillTx/>
+                <a:latin typeface="Arial"/>
+              </a:rPr>
+              <a:t>Fifth Outline Level</a:t>
+            </a:r>
+            <a:endParaRPr lang="en-US" sz="2000" b="0" u="none" strike="noStrike">
+              <a:solidFill>
+                <a:srgbClr val="000000"/>
+              </a:solidFill>
+              <a:effectLst/>
+              <a:uFillTx/>
+              <a:latin typeface="Arial"/>
+            </a:endParaRPr>
+          </a:p>
+          <a:p>
+            <a:pPr marL="2592000" lvl="5" indent="-216000">
+              <a:lnSpc>
+                <a:spcPct val="100000"/>
+              </a:lnSpc>
+              <a:spcBef>
+                <a:spcPts val="283"/>
+              </a:spcBef>
+              <a:buClr>
+                <a:srgbClr val="000000"/>
+              </a:buClr>
+              <a:buSzPct val="45000"/>
+              <a:buFont typeface="Wingdings" charset="2"/>
+              <a:buChar char=""/>
+            </a:pPr>
+            <a:r>
+              <a:rPr lang="en-US" sz="2000" b="0" u="none" strike="noStrike">
+                <a:solidFill>
+                  <a:srgbClr val="000000"/>
+                </a:solidFill>
+                <a:effectLst/>
+                <a:uFillTx/>
+                <a:latin typeface="Arial"/>
+              </a:rPr>
+              <a:t>Sixth Outline Level</a:t>
+            </a:r>
+            <a:endParaRPr lang="en-US" sz="2000" b="0" u="none" strike="noStrike">
+              <a:solidFill>
+                <a:srgbClr val="000000"/>
+              </a:solidFill>
+              <a:effectLst/>
+              <a:uFillTx/>
+              <a:latin typeface="Arial"/>
+            </a:endParaRPr>
+          </a:p>
+          <a:p>
+            <a:pPr marL="3024000" lvl="6" indent="-216000">
+              <a:lnSpc>
+                <a:spcPct val="100000"/>
+              </a:lnSpc>
+              <a:spcBef>
+                <a:spcPts val="283"/>
+              </a:spcBef>
+              <a:buClr>
+                <a:srgbClr val="000000"/>
+              </a:buClr>
+              <a:buSzPct val="45000"/>
+              <a:buFont typeface="Wingdings" charset="2"/>
+              <a:buChar char=""/>
+            </a:pPr>
+            <a:r>
+              <a:rPr lang="en-US" sz="2000" b="0" u="none" strike="noStrike">
+                <a:solidFill>
+                  <a:srgbClr val="000000"/>
+                </a:solidFill>
+                <a:effectLst/>
+                <a:uFillTx/>
+                <a:latin typeface="Arial"/>
+              </a:rPr>
+              <a:t>Seventh Outline Level</a:t>
+            </a:r>
+            <a:endParaRPr lang="en-US" sz="2000" b="0" u="none" strike="noStrike">
+              <a:solidFill>
+                <a:srgbClr val="000000"/>
+              </a:solidFill>
+              <a:effectLst/>
+              <a:uFillTx/>
+              <a:latin typeface="Arial"/>
+            </a:endParaRPr>
+          </a:p>
+        </p:txBody>
+      </p:sp>
+    </p:spTree>
+  </p:cSld>
+</p:sldLayout>
+</file>
+
+<file path=ppt/slideMasters/slideMaster1.xml><?xml version="1.0" encoding="utf-8"?>
+<p:sldMaster xmlns:a="http://schemas.openxmlformats.org/drawingml/2006/main" xmlns:p="http://schemas.openxmlformats.org/presentationml/2006/main" xmlns:r="http://schemas.openxmlformats.org/officeDocument/2006/relationships" xmlns:p14="http://schemas.microsoft.com/office/powerpoint/2010/main" xmlns:p15="http://schemas.microsoft.com/office/powerpoint/2012/main" xmlns:mc="http://schemas.openxmlformats.org/markup-compatibility/2006">
+  <p:cSld>
+    <p:spTree>
+      <p:nvGrpSpPr>
+        <p:cNvPr id="1" name=""/>
+        <p:cNvGrpSpPr/>
+        <p:nvPr/>
+      </p:nvGrpSpPr>
+      <p:grpSpPr>
+        <a:xfrm>
+          <a:off x="0" y="0"/>
+          <a:ext cx="0" cy="0"/>
+          <a:chOff x="0" y="0"/>
+          <a:chExt cx="0" cy="0"/>
+        </a:xfrm>
+      </p:grpSpPr>
+    </p:spTree>
+  </p:cSld>
   <p:clrMap bg1="lt1" tx1="dk1" bg2="lt2" tx2="dk2" accent1="accent1" accent2="accent2" accent3="accent3" accent4="accent4" accent5="accent5" accent6="accent6" hlink="hlink" folHlink="folHlink"/>
   <p:sldLayoutIdLst>
-    <p:sldLayoutId id="2147483649" r:id="rId3"/>
-    <p:sldLayoutId id="2147483650" r:id="rId4"/>
+    <p:sldLayoutId id="2147483649" r:id="rId2"/>
+    <p:sldLayoutId id="2147483650" r:id="rId3"/>
   </p:sldLayoutIdLst>
 </p:sldMaster>
 </file>
 
-<file path=ppt/slideMasters/slideMaster2.xml><?xml version="1.0" encoding="utf-8"?>
+<file path=ppt/slideMasters/slideMaster3.xml><?xml version="1.0" encoding="utf-8"?>
 <p:sldMaster xmlns:a="http://schemas.openxmlformats.org/drawingml/2006/main" xmlns:p="http://schemas.openxmlformats.org/presentationml/2006/main" xmlns:r="http://schemas.openxmlformats.org/officeDocument/2006/relationships" xmlns:p14="http://schemas.microsoft.com/office/powerpoint/2010/main" xmlns:p15="http://schemas.microsoft.com/office/powerpoint/2012/main" xmlns:mc="http://schemas.openxmlformats.org/markup-compatibility/2006">
   <p:cSld>
     <p:spTree>
@@ -2095,14 +2493,14 @@
       </p:grpSpPr>
       <p:sp>
         <p:nvSpPr>
-          <p:cNvPr id="21" name=""/>
-          <p:cNvSpPr txBox="1"/>
+          <p:cNvPr id="22" name=""/>
+          <p:cNvSpPr/>
           <p:nvPr/>
         </p:nvSpPr>
         <p:spPr>
           <a:xfrm>
             <a:off x="395280" y="2314440"/>
-            <a:ext cx="5198760" cy="1341000"/>
+            <a:ext cx="5198400" cy="1340640"/>
           </a:xfrm>
           <a:prstGeom prst="rect">
             <a:avLst/>
@@ -2112,11 +2510,22 @@
             <a:noFill/>
           </a:ln>
         </p:spPr>
+        <p:style>
+          <a:lnRef idx="0"/>
+          <a:fillRef idx="0"/>
+          <a:effectRef idx="0"/>
+          <a:fontRef idx="minor"/>
+        </p:style>
         <p:txBody>
           <a:bodyPr lIns="90000" rIns="90000" tIns="45000" bIns="45000" anchor="t">
             <a:normAutofit/>
           </a:bodyPr>
           <a:p>
+            <a:pPr>
+              <a:lnSpc>
+                <a:spcPct val="100000"/>
+              </a:lnSpc>
+            </a:pPr>
             <a:r>
               <a:rPr lang="en-US" sz="3600" b="0" u="none" strike="noStrike">
                 <a:solidFill>
@@ -2127,55 +2536,7 @@
                 <a:latin typeface="Arial"/>
                 <a:ea typeface="Arial"/>
               </a:rPr>
-              <a:t>{{</a:t>
-            </a:r>
-            <a:r>
-              <a:rPr lang="en-US" sz="3600" b="0" u="none" strike="noStrike">
-                <a:solidFill>
-                  <a:srgbClr val="003248"/>
-                </a:solidFill>
-                <a:effectLst/>
-                <a:uFillTx/>
-                <a:latin typeface="Arial"/>
-                <a:ea typeface="Arial"/>
-              </a:rPr>
-              <a:t>month</a:t>
-            </a:r>
-            <a:r>
-              <a:rPr lang="en-US" sz="3600" b="0" u="none" strike="noStrike">
-                <a:solidFill>
-                  <a:srgbClr val="003248"/>
-                </a:solidFill>
-                <a:effectLst/>
-                <a:uFillTx/>
-                <a:latin typeface="Arial"/>
-                <a:ea typeface="Arial"/>
-              </a:rPr>
-              <a:t>}} </a:t>
-            </a:r>
-            <a:r>
-              <a:rPr lang="en-US" sz="3600" b="0" u="none" strike="noStrike">
-                <a:solidFill>
-                  <a:srgbClr val="003248"/>
-                </a:solidFill>
-                <a:effectLst/>
-                <a:uFillTx/>
-                <a:latin typeface="Arial"/>
-                <a:ea typeface="Arial"/>
-              </a:rPr>
-              <a:t>Customer Support Overview</a:t>
-            </a:r>
-            <a:r>
-              <a:rPr lang="en-US" sz="3600" b="0" u="none" strike="noStrike">
-                <a:solidFill>
-                  <a:srgbClr val="003248"/>
-                </a:solidFill>
-                <a:effectLst/>
-                <a:uFillTx/>
-                <a:latin typeface="Arial"/>
-                <a:ea typeface="Arial"/>
-              </a:rPr>
-              <a:t> +              <a:t>{{month}} Customer Support Overview  </a:t>
             </a:r>
             <a:endParaRPr lang="en-US" sz="3600" b="0" u="none" strike="noStrike">
@@ -2228,14 +2589,14 @@
       </p:grpSpPr>
       <p:sp>
         <p:nvSpPr>
-          <p:cNvPr id="64" name=""/>
-          <p:cNvSpPr txBox="1"/>
+          <p:cNvPr id="65" name=""/>
+          <p:cNvSpPr/>
           <p:nvPr/>
         </p:nvSpPr>
         <p:spPr>
           <a:xfrm>
             <a:off x="498240" y="1230840"/>
-            <a:ext cx="8147160" cy="2476080"/>
+            <a:ext cx="8146800" cy="2475720"/>
           </a:xfrm>
           <a:prstGeom prst="rect">
             <a:avLst/>
@@ -2245,6 +2606,12 @@
             <a:noFill/>
           </a:ln>
         </p:spPr>
+        <p:style>
+          <a:lnRef idx="0"/>
+          <a:fillRef idx="0"/>
+          <a:effectRef idx="0"/>
+          <a:fontRef idx="minor"/>
+        </p:style>
         <p:txBody>
           <a:bodyPr lIns="90000" rIns="90000" tIns="45000" bIns="45000" anchor="t">
             <a:normAutofit/>
@@ -2264,8 +2631,8 @@
                 <a:srgbClr val="000000"/>
               </a:buClr>
               <a:buSzPct val="45000"/>
-              <a:buFont typeface=""/>
-              <a:buChar char="_x0000_"/>
+              <a:buFont typeface="Symbol" charset="2"/>
+              <a:buChar char=""/>
             </a:pPr>
             <a:r>
               <a:rPr lang="en-US" sz="1800" b="0" u="none" strike="noStrike">
@@ -2336,14 +2703,14 @@
       </p:sp>
       <p:sp>
         <p:nvSpPr>
-          <p:cNvPr id="65" name=""/>
-          <p:cNvSpPr txBox="1"/>
+          <p:cNvPr id="66" name=""/>
+          <p:cNvSpPr/>
           <p:nvPr/>
         </p:nvSpPr>
         <p:spPr>
           <a:xfrm>
             <a:off x="187200" y="6559200"/>
-            <a:ext cx="8385120" cy="298800"/>
+            <a:ext cx="8384760" cy="298440"/>
           </a:xfrm>
           <a:prstGeom prst="rect">
             <a:avLst/>
@@ -2353,11 +2720,22 @@
             <a:noFill/>
           </a:ln>
         </p:spPr>
+        <p:style>
+          <a:lnRef idx="0"/>
+          <a:fillRef idx="0"/>
+          <a:effectRef idx="0"/>
+          <a:fontRef idx="minor"/>
+        </p:style>
         <p:txBody>
           <a:bodyPr lIns="90000" rIns="90000" tIns="45000" bIns="45000" anchor="t">
             <a:normAutofit/>
           </a:bodyPr>
           <a:p>
+            <a:pPr>
+              <a:lnSpc>
+                <a:spcPct val="100000"/>
+              </a:lnSpc>
+            </a:pPr>
             <a:r>
               <a:rPr lang="en-US" sz="500" b="0" u="none" strike="noStrike">
                 <a:solidFill>
@@ -2368,19 +2746,7 @@
                 <a:latin typeface="CenturyGothic"/>
                 <a:ea typeface="CenturyGothic"/>
               </a:rPr>
-              <a:t>CONFIDENTIAL DOCUMENT. COPYING, PUBLISHING, OR DISTRIBUTING WITHOUT WRITTEN PERMISSION OF TRACE ONE IS PROHIBITED</a:t>
-            </a:r>
-            <a:r>
-              <a:rPr lang="en-US" sz="500" b="0" u="none" strike="noStrike">
-                <a:solidFill>
-                  <a:srgbClr val="484a52"/>
-                </a:solidFill>
-                <a:effectLst/>
-                <a:uFillTx/>
-                <a:latin typeface="CenturyGothic"/>
-                <a:ea typeface="CenturyGothic"/>
-              </a:rPr>
-              <a:t>.</a:t>
+              <a:t>CONFIDENTIAL DOCUMENT. COPYING, PUBLISHING, OR DISTRIBUTING WITHOUT WRITTEN PERMISSION OF TRACE ONE IS PROHIBITED.</a:t>
             </a:r>
             <a:endParaRPr lang="en-US" sz="500" b="0" u="none" strike="noStrike">
               <a:solidFill>
@@ -2395,7 +2761,7 @@
       </p:sp>
       <p:pic>
         <p:nvPicPr>
-          <p:cNvPr id="66" name=""/>
+          <p:cNvPr id="67" name=""/>
           <p:cNvPicPr/>
           <p:nvPr/>
         </p:nvPicPr>
@@ -2406,7 +2772,7 @@
         <p:spPr>
           <a:xfrm>
             <a:off x="7078320" y="6127560"/>
-            <a:ext cx="1766520" cy="581040"/>
+            <a:ext cx="1766160" cy="580680"/>
           </a:xfrm>
           <a:prstGeom prst="rect">
             <a:avLst/>
@@ -2419,7 +2785,7 @@
       </p:pic>
       <p:pic>
         <p:nvPicPr>
-          <p:cNvPr id="67" name=""/>
+          <p:cNvPr id="68" name=""/>
           <p:cNvPicPr/>
           <p:nvPr/>
         </p:nvPicPr>
@@ -2430,7 +2796,7 @@
         <p:spPr>
           <a:xfrm>
             <a:off x="1268640" y="2975400"/>
-            <a:ext cx="6606720" cy="2651760"/>
+            <a:ext cx="6606360" cy="2651400"/>
           </a:xfrm>
           <a:prstGeom prst="rect">
             <a:avLst/>
@@ -2518,14 +2884,14 @@
       </p:grpSpPr>
       <p:sp>
         <p:nvSpPr>
-          <p:cNvPr id="22" name=""/>
-          <p:cNvSpPr txBox="1"/>
+          <p:cNvPr id="23" name=""/>
+          <p:cNvSpPr/>
           <p:nvPr/>
         </p:nvSpPr>
         <p:spPr>
           <a:xfrm>
             <a:off x="395280" y="2314440"/>
-            <a:ext cx="5198760" cy="1341000"/>
+            <a:ext cx="5198400" cy="1340640"/>
           </a:xfrm>
           <a:prstGeom prst="rect">
             <a:avLst/>
@@ -2535,11 +2901,22 @@
             <a:noFill/>
           </a:ln>
         </p:spPr>
+        <p:style>
+          <a:lnRef idx="0"/>
+          <a:fillRef idx="0"/>
+          <a:effectRef idx="0"/>
+          <a:fontRef idx="minor"/>
+        </p:style>
         <p:txBody>
           <a:bodyPr lIns="90000" rIns="90000" tIns="45000" bIns="45000" anchor="t">
             <a:normAutofit fontScale="85000" lnSpcReduction="9999"/>
           </a:bodyPr>
           <a:p>
+            <a:pPr>
+              <a:lnSpc>
+                <a:spcPct val="100000"/>
+              </a:lnSpc>
+            </a:pPr>
             <a:r>
               <a:rPr lang="en-US" sz="3600" b="1" u="none" strike="noStrike">
                 <a:solidFill>
@@ -2602,14 +2979,14 @@
       </p:grpSpPr>
       <p:sp>
         <p:nvSpPr>
-          <p:cNvPr id="23" name=""/>
-          <p:cNvSpPr txBox="1"/>
+          <p:cNvPr id="24" name=""/>
+          <p:cNvSpPr/>
           <p:nvPr/>
         </p:nvSpPr>
         <p:spPr>
           <a:xfrm>
             <a:off x="459360" y="188640"/>
-            <a:ext cx="8283240" cy="1299600"/>
+            <a:ext cx="8282880" cy="1299240"/>
           </a:xfrm>
           <a:prstGeom prst="rect">
             <a:avLst/>
@@ -2619,11 +2996,22 @@
             <a:noFill/>
           </a:ln>
         </p:spPr>
+        <p:style>
+          <a:lnRef idx="0"/>
+          <a:fillRef idx="0"/>
+          <a:effectRef idx="0"/>
+          <a:fontRef idx="minor"/>
+        </p:style>
         <p:txBody>
           <a:bodyPr lIns="90000" rIns="90000" tIns="45000" bIns="45000" anchor="t">
             <a:normAutofit/>
           </a:bodyPr>
           <a:p>
+            <a:pPr>
+              <a:lnSpc>
+                <a:spcPct val="100000"/>
+              </a:lnSpc>
+            </a:pPr>
             <a:r>
               <a:rPr lang="en-US" sz="2400" b="1" u="none" spc="-99" strike="noStrike">
                 <a:solidFill>
@@ -2662,14 +3050,14 @@
       </p:sp>
       <p:sp>
         <p:nvSpPr>
-          <p:cNvPr id="24" name=""/>
-          <p:cNvSpPr txBox="1"/>
+          <p:cNvPr id="25" name=""/>
+          <p:cNvSpPr/>
           <p:nvPr/>
         </p:nvSpPr>
         <p:spPr>
           <a:xfrm>
             <a:off x="4893480" y="1094040"/>
-            <a:ext cx="3713400" cy="2561400"/>
+            <a:ext cx="3713040" cy="2561040"/>
           </a:xfrm>
           <a:prstGeom prst="rect">
             <a:avLst/>
@@ -2679,6 +3067,12 @@
             <a:noFill/>
           </a:ln>
         </p:spPr>
+        <p:style>
+          <a:lnRef idx="0"/>
+          <a:fillRef idx="0"/>
+          <a:effectRef idx="0"/>
+          <a:fontRef idx="minor"/>
+        </p:style>
         <p:txBody>
           <a:bodyPr lIns="90000" rIns="90000" tIns="45000" bIns="45000" anchor="t">
             <a:normAutofit/>
@@ -2732,14 +3126,14 @@
       </p:sp>
       <p:sp>
         <p:nvSpPr>
-          <p:cNvPr id="25" name=""/>
-          <p:cNvSpPr txBox="1"/>
+          <p:cNvPr id="26" name=""/>
+          <p:cNvSpPr/>
           <p:nvPr/>
         </p:nvSpPr>
         <p:spPr>
           <a:xfrm>
             <a:off x="187200" y="6559200"/>
-            <a:ext cx="8385120" cy="298800"/>
+            <a:ext cx="8384760" cy="298440"/>
           </a:xfrm>
           <a:prstGeom prst="rect">
             <a:avLst/>
@@ -2749,11 +3143,22 @@
             <a:noFill/>
           </a:ln>
         </p:spPr>
+        <p:style>
+          <a:lnRef idx="0"/>
+          <a:fillRef idx="0"/>
+          <a:effectRef idx="0"/>
+          <a:fontRef idx="minor"/>
+        </p:style>
         <p:txBody>
           <a:bodyPr lIns="90000" rIns="90000" tIns="45000" bIns="45000" anchor="t">
             <a:normAutofit/>
           </a:bodyPr>
           <a:p>
+            <a:pPr>
+              <a:lnSpc>
+                <a:spcPct val="100000"/>
+              </a:lnSpc>
+            </a:pPr>
             <a:r>
               <a:rPr lang="en-US" sz="500" b="0" u="none" strike="noStrike">
                 <a:solidFill>
@@ -2764,19 +3169,7 @@
                 <a:latin typeface="CenturyGothic"/>
                 <a:ea typeface="CenturyGothic"/>
               </a:rPr>
-              <a:t>CONFIDENTIAL DOCUMENT. COPYING, PUBLISHING, OR DISTRIBUTING WITHOUT WRITTEN PERMISSION OF TRACE ONE IS PROHIBITED</a:t>
-            </a:r>
-            <a:r>
-              <a:rPr lang="en-US" sz="500" b="0" u="none" strike="noStrike">
-                <a:solidFill>
-                  <a:srgbClr val="484a52"/>
-                </a:solidFill>
-                <a:effectLst/>
-                <a:uFillTx/>
-                <a:latin typeface="CenturyGothic"/>
-                <a:ea typeface="CenturyGothic"/>
-              </a:rPr>
-              <a:t>.</a:t>
+              <a:t>CONFIDENTIAL DOCUMENT. COPYING, PUBLISHING, OR DISTRIBUTING WITHOUT WRITTEN PERMISSION OF TRACE ONE IS PROHIBITED.</a:t>
             </a:r>
             <a:endParaRPr lang="en-US" sz="500" b="0" u="none" strike="noStrike">
               <a:solidFill>
@@ -2791,7 +3184,7 @@
       </p:sp>
       <p:pic>
         <p:nvPicPr>
-          <p:cNvPr id="26" name=""/>
+          <p:cNvPr id="27" name=""/>
           <p:cNvPicPr/>
           <p:nvPr/>
         </p:nvPicPr>
@@ -2802,7 +3195,7 @@
         <p:spPr>
           <a:xfrm>
             <a:off x="7078320" y="6127560"/>
-            <a:ext cx="1766520" cy="581040"/>
+            <a:ext cx="1766160" cy="580680"/>
           </a:xfrm>
           <a:prstGeom prst="rect">
             <a:avLst/>
@@ -2815,13 +3208,13 @@
       </p:pic>
       <p:graphicFrame>
         <p:nvGraphicFramePr>
-          <p:cNvPr id="27" name=""/>
+          <p:cNvPr id="28" name=""/>
           <p:cNvGraphicFramePr/>
           <p:nvPr/>
         </p:nvGraphicFramePr>
         <p:xfrm>
           <a:off x="459360" y="1495800"/>
-          <a:ext cx="4086720" cy="2077200"/>
+          <a:ext cx="4086360" cy="2956320"/>
         </p:xfrm>
         <a:graphic>
           <a:graphicData uri="http://schemas.openxmlformats.org/drawingml/2006/table">
@@ -2834,11 +3227,15 @@
               <a:tr h="798840">
                 <a:tc>
                   <a:txBody>
-                    <a:bodyPr lIns="45720" rIns="45720" anchor="t" anchorCtr="1">
+                    <a:bodyPr lIns="45720" rIns="45720" anchor="t">
                       <a:noAutofit/>
                     </a:bodyPr>
                     <a:p>
-                      <a:pPr algn="ctr"/>
+                      <a:pPr algn="ctr">
+                        <a:lnSpc>
+                          <a:spcPct val="100000"/>
+                        </a:lnSpc>
+                      </a:pPr>
                       <a:r>
                         <a:rPr lang="en-US" sz="2500" b="1" u="none" strike="noStrike">
                           <a:solidFill>
@@ -2893,11 +3290,15 @@
                 </a:tc>
                 <a:tc>
                   <a:txBody>
-                    <a:bodyPr lIns="45720" rIns="45720" anchor="t" anchorCtr="1">
+                    <a:bodyPr lIns="45720" rIns="45720" anchor="t">
                       <a:noAutofit/>
                     </a:bodyPr>
                     <a:p>
-                      <a:pPr algn="ctr"/>
+                      <a:pPr algn="ctr">
+                        <a:lnSpc>
+                          <a:spcPct val="100000"/>
+                        </a:lnSpc>
+                      </a:pPr>
                       <a:r>
                         <a:rPr lang="en-US" sz="2500" b="1" u="none" strike="noStrike">
                           <a:solidFill>
@@ -2954,11 +3355,15 @@
               <a:tr h="1770120">
                 <a:tc>
                   <a:txBody>
-                    <a:bodyPr lIns="45720" rIns="45720" anchor="t" anchorCtr="1">
+                    <a:bodyPr lIns="45720" rIns="45720" anchor="t">
                       <a:noAutofit/>
                     </a:bodyPr>
                     <a:p>
-                      <a:pPr algn="ctr"/>
+                      <a:pPr algn="ctr">
+                        <a:lnSpc>
+                          <a:spcPct val="100000"/>
+                        </a:lnSpc>
+                      </a:pPr>
                       <a:r>
                         <a:rPr lang="en-US" sz="4400" b="0" u="none" strike="noStrike">
                           <a:solidFill>
@@ -3013,11 +3418,15 @@
                 </a:tc>
                 <a:tc>
                   <a:txBody>
-                    <a:bodyPr lIns="45720" rIns="45720" anchor="t" anchorCtr="1">
+                    <a:bodyPr lIns="45720" rIns="45720" anchor="t">
                       <a:noAutofit/>
                     </a:bodyPr>
                     <a:p>
-                      <a:pPr algn="ctr"/>
+                      <a:pPr algn="ctr">
+                        <a:lnSpc>
+                          <a:spcPct val="100000"/>
+                        </a:lnSpc>
+                      </a:pPr>
                       <a:r>
                         <a:rPr lang="en-US" sz="4400" b="0" u="none" strike="noStrike">
                           <a:solidFill>
@@ -3077,13 +3486,13 @@
       </p:graphicFrame>
       <p:graphicFrame>
         <p:nvGraphicFramePr>
-          <p:cNvPr id="28" name=""/>
+          <p:cNvPr id="29" name=""/>
           <p:cNvGraphicFramePr/>
           <p:nvPr/>
         </p:nvGraphicFramePr>
         <p:xfrm>
           <a:off x="4871160" y="1487880"/>
-          <a:ext cx="3974040" cy="2077200"/>
+          <a:ext cx="3973680" cy="2956320"/>
         </p:xfrm>
         <a:graphic>
           <a:graphicData uri="http://schemas.openxmlformats.org/drawingml/2006/table">
@@ -3096,11 +3505,15 @@
               <a:tr h="798840">
                 <a:tc>
                   <a:txBody>
-                    <a:bodyPr lIns="45720" rIns="45720" anchor="t" anchorCtr="1">
+                    <a:bodyPr lIns="45720" rIns="45720" anchor="t">
                       <a:noAutofit/>
                     </a:bodyPr>
                     <a:p>
-                      <a:pPr algn="ctr"/>
+                      <a:pPr algn="ctr">
+                        <a:lnSpc>
+                          <a:spcPct val="100000"/>
+                        </a:lnSpc>
+                      </a:pPr>
                       <a:r>
                         <a:rPr lang="en-US" sz="2500" b="1" u="none" strike="noStrike">
                           <a:solidFill>
@@ -3155,11 +3568,15 @@
                 </a:tc>
                 <a:tc>
                   <a:txBody>
-                    <a:bodyPr lIns="45720" rIns="45720" anchor="t" anchorCtr="1">
+                    <a:bodyPr lIns="45720" rIns="45720" anchor="t">
                       <a:noAutofit/>
                     </a:bodyPr>
                     <a:p>
-                      <a:pPr algn="ctr"/>
+                      <a:pPr algn="ctr">
+                        <a:lnSpc>
+                          <a:spcPct val="100000"/>
+                        </a:lnSpc>
+                      </a:pPr>
                       <a:r>
                         <a:rPr lang="en-US" sz="2500" b="1" u="none" strike="noStrike">
                           <a:solidFill>
@@ -3216,11 +3633,15 @@
               <a:tr h="1770120">
                 <a:tc>
                   <a:txBody>
-                    <a:bodyPr lIns="45720" rIns="45720" anchor="t" anchorCtr="1">
+                    <a:bodyPr lIns="45720" rIns="45720" anchor="t">
                       <a:noAutofit/>
                     </a:bodyPr>
                     <a:p>
-                      <a:pPr algn="ctr"/>
+                      <a:pPr algn="ctr">
+                        <a:lnSpc>
+                          <a:spcPct val="100000"/>
+                        </a:lnSpc>
+                      </a:pPr>
                       <a:r>
                         <a:rPr lang="en-US" sz="4400" b="0" u="none" strike="noStrike">
                           <a:solidFill>
@@ -3275,11 +3696,15 @@
                 </a:tc>
                 <a:tc>
                   <a:txBody>
-                    <a:bodyPr lIns="45720" rIns="45720" anchor="t" anchorCtr="1">
+                    <a:bodyPr lIns="45720" rIns="45720" anchor="t">
                       <a:noAutofit/>
                     </a:bodyPr>
                     <a:p>
-                      <a:pPr algn="ctr"/>
+                      <a:pPr algn="ctr">
+                        <a:lnSpc>
+                          <a:spcPct val="100000"/>
+                        </a:lnSpc>
+                      </a:pPr>
                       <a:r>
                         <a:rPr lang="en-US" sz="4400" b="0" u="none" strike="noStrike">
                           <a:solidFill>
@@ -3339,14 +3764,14 @@
       </p:graphicFrame>
       <p:sp>
         <p:nvSpPr>
-          <p:cNvPr id="29" name=""/>
-          <p:cNvSpPr txBox="1"/>
+          <p:cNvPr id="30" name=""/>
+          <p:cNvSpPr/>
           <p:nvPr/>
         </p:nvSpPr>
         <p:spPr>
           <a:xfrm>
             <a:off x="459360" y="1094040"/>
-            <a:ext cx="4259160" cy="394200"/>
+            <a:ext cx="4258800" cy="393840"/>
           </a:xfrm>
           <a:prstGeom prst="rect">
             <a:avLst/>
@@ -3356,11 +3781,22 @@
             <a:noFill/>
           </a:ln>
         </p:spPr>
+        <p:style>
+          <a:lnRef idx="0"/>
+          <a:fillRef idx="0"/>
+          <a:effectRef idx="0"/>
+          <a:fontRef idx="minor"/>
+        </p:style>
         <p:txBody>
           <a:bodyPr lIns="90000" rIns="90000" tIns="45000" bIns="45000" anchor="t">
-            <a:normAutofit/>
+            <a:normAutofit lnSpcReduction="9999"/>
           </a:bodyPr>
           <a:p>
+            <a:pPr>
+              <a:lnSpc>
+                <a:spcPct val="100000"/>
+              </a:lnSpc>
+            </a:pPr>
             <a:r>
               <a:rPr lang="en-US" sz="2000" b="0" u="none" spc="-99" strike="noStrike">
                 <a:solidFill>
@@ -3371,8 +3807,54 @@
                 <a:latin typeface="Arial"/>
                 <a:ea typeface="Arial"/>
               </a:rPr>
-              <a:t>Total requests handled by support</a:t>
+              <a:t>Total requests handled by support:</a:t>
             </a:r>
+            <a:endParaRPr lang="en-US" sz="2000" b="0" u="none" strike="noStrike">
+              <a:solidFill>
+                <a:srgbClr val="000000"/>
+              </a:solidFill>
+              <a:effectLst/>
+              <a:uFillTx/>
+              <a:latin typeface="Arial"/>
+            </a:endParaRPr>
+          </a:p>
+        </p:txBody>
+      </p:sp>
+      <p:sp>
+        <p:nvSpPr>
+          <p:cNvPr id="31" name=""/>
+          <p:cNvSpPr/>
+          <p:nvPr/>
+        </p:nvSpPr>
+        <p:spPr>
+          <a:xfrm>
+            <a:off x="459360" y="3741120"/>
+            <a:ext cx="4258800" cy="564840"/>
+          </a:xfrm>
+          <a:prstGeom prst="rect">
+            <a:avLst/>
+          </a:prstGeom>
+          <a:noFill/>
+          <a:ln w="0">
+            <a:noFill/>
+          </a:ln>
+        </p:spPr>
+        <p:style>
+          <a:lnRef idx="0"/>
+          <a:fillRef idx="0"/>
+          <a:effectRef idx="0"/>
+          <a:fontRef idx="minor"/>
+        </p:style>
+        <p:txBody>
+          <a:bodyPr lIns="90000" rIns="90000" tIns="45000" bIns="45000" anchor="t">
+            <a:normAutofit/>
+          </a:bodyPr>
+          <a:p>
+            <a:pPr>
+              <a:lnSpc>
+                <a:spcPct val="100000"/>
+              </a:lnSpc>
+            </a:pPr>
             <a:r>
               <a:rPr lang="en-US" sz="2000" b="0" u="none" spc="-99" strike="noStrike">
                 <a:solidFill>
@@ -3383,66 +3865,7 @@
                 <a:latin typeface="Arial"/>
                 <a:ea typeface="Arial"/>
               </a:rPr>
-              <a:t>:</a:t>
-            </a:r>
-            <a:endParaRPr lang="en-US" sz="2000" b="0" u="none" strike="noStrike">
-              <a:solidFill>
-                <a:srgbClr val="000000"/>
-              </a:solidFill>
-              <a:effectLst/>
-              <a:uFillTx/>
-              <a:latin typeface="Arial"/>
-            </a:endParaRPr>
-          </a:p>
-        </p:txBody>
-      </p:sp>
-      <p:sp>
-        <p:nvSpPr>
-          <p:cNvPr id="30" name=""/>
-          <p:cNvSpPr txBox="1"/>
-          <p:nvPr/>
-        </p:nvSpPr>
-        <p:spPr>
-          <a:xfrm>
-            <a:off x="459360" y="3741120"/>
-            <a:ext cx="4259160" cy="565200"/>
-          </a:xfrm>
-          <a:prstGeom prst="rect">
-            <a:avLst/>
-          </a:prstGeom>
-          <a:noFill/>
-          <a:ln w="0">
-            <a:noFill/>
-          </a:ln>
-        </p:spPr>
-        <p:txBody>
-          <a:bodyPr lIns="90000" rIns="90000" tIns="45000" bIns="45000" anchor="t">
-            <a:normAutofit/>
-          </a:bodyPr>
-          <a:p>
-            <a:r>
-              <a:rPr lang="en-US" sz="2000" b="0" u="none" spc="-99" strike="noStrike">
-                <a:solidFill>
-                  <a:srgbClr val="003248"/>
-                </a:solidFill>
-                <a:effectLst/>
-                <a:uFillTx/>
-                <a:latin typeface="Arial"/>
-                <a:ea typeface="Arial"/>
-              </a:rPr>
-              <a:t>Requests by category type</a:t>
-            </a:r>
-            <a:r>
-              <a:rPr lang="en-US" sz="2000" b="0" u="none" spc="-99" strike="noStrike">
-                <a:solidFill>
-                  <a:srgbClr val="003248"/>
-                </a:solidFill>
-                <a:effectLst/>
-                <a:uFillTx/>
-                <a:latin typeface="Arial"/>
-                <a:ea typeface="Arial"/>
-              </a:rPr>
-              <a:t>:</a:t>
+              <a:t>Requests by category type:</a:t>
             </a:r>
             <a:endParaRPr lang="en-US" sz="2000" b="0" u="none" strike="noStrike">
               <a:solidFill>
@@ -3457,13 +3880,13 @@
       </p:sp>
       <p:graphicFrame>
         <p:nvGraphicFramePr>
-          <p:cNvPr id="31" name=""/>
+          <p:cNvPr id="32" name=""/>
           <p:cNvGraphicFramePr/>
           <p:nvPr/>
         </p:nvGraphicFramePr>
         <p:xfrm>
           <a:off x="459360" y="4087080"/>
-          <a:ext cx="5876280" cy="1371240"/>
+          <a:ext cx="5875920" cy="1371240"/>
         </p:xfrm>
         <a:graphic>
           <a:graphicData uri="http://schemas.openxmlformats.org/drawingml/2006/table">
@@ -3476,10 +3899,15 @@
               <a:tr h="670680">
                 <a:tc>
                   <a:txBody>
-                    <a:bodyPr lIns="7560" rIns="7560" tIns="7560" bIns="7560" anchor="ctr" anchorCtr="1">
+                    <a:bodyPr lIns="7560" rIns="7560" tIns="7560" bIns="7560" anchor="ctr">
                       <a:noAutofit/>
                     </a:bodyPr>
                     <a:p>
+                      <a:pPr>
+                        <a:lnSpc>
+                          <a:spcPct val="100000"/>
+                        </a:lnSpc>
+                      </a:pPr>
                       <a:r>
                         <a:rPr lang="en-US" sz="1100" b="0" u="none" strike="noStrike">
                           <a:solidFill>
@@ -3534,10 +3962,15 @@
                 </a:tc>
                 <a:tc>
                   <a:txBody>
-                    <a:bodyPr lIns="7560" rIns="7560" tIns="7560" bIns="7560" anchor="ctr" anchorCtr="1">
+                    <a:bodyPr lIns="7560" rIns="7560" tIns="7560" bIns="7560" anchor="ctr">
                       <a:noAutofit/>
                     </a:bodyPr>
                     <a:p>
+                      <a:pPr>
+                        <a:lnSpc>
+                          <a:spcPct val="100000"/>
+                        </a:lnSpc>
+                      </a:pPr>
                       <a:r>
                         <a:rPr lang="en-US" sz="1100" b="0" u="none" strike="noStrike">
                           <a:solidFill>
@@ -3594,10 +4027,15 @@
               <a:tr h="700560">
                 <a:tc>
                   <a:txBody>
-                    <a:bodyPr lIns="7560" rIns="7560" tIns="7560" bIns="7560" anchor="ctr" anchorCtr="1">
+                    <a:bodyPr lIns="7560" rIns="7560" tIns="7560" bIns="7560" anchor="ctr">
                       <a:noAutofit/>
                     </a:bodyPr>
                     <a:p>
+                      <a:pPr>
+                        <a:lnSpc>
+                          <a:spcPct val="100000"/>
+                        </a:lnSpc>
+                      </a:pPr>
                       <a:r>
                         <a:rPr lang="en-US" sz="1100" b="0" u="none" strike="noStrike">
                           <a:solidFill>
@@ -3652,11 +4090,15 @@
                 </a:tc>
                 <a:tc>
                   <a:txBody>
-                    <a:bodyPr lIns="7560" rIns="7560" tIns="7560" bIns="7560" anchor="ctr" anchorCtr="1">
+                    <a:bodyPr lIns="7560" rIns="7560" tIns="7560" bIns="7560" anchor="ctr">
                       <a:noAutofit/>
                     </a:bodyPr>
                     <a:p>
-                      <a:pPr algn="ctr"/>
+                      <a:pPr algn="ctr">
+                        <a:lnSpc>
+                          <a:spcPct val="100000"/>
+                        </a:lnSpc>
+                      </a:pPr>
                       <a:r>
                         <a:rPr lang="en-US" sz="1100" b="0" u="none" strike="noStrike">
                           <a:solidFill>
@@ -3753,14 +4195,14 @@
       </p:grpSpPr>
       <p:sp>
         <p:nvSpPr>
-          <p:cNvPr id="32" name=""/>
-          <p:cNvSpPr txBox="1"/>
+          <p:cNvPr id="33" name=""/>
+          <p:cNvSpPr/>
           <p:nvPr/>
         </p:nvSpPr>
         <p:spPr>
           <a:xfrm>
             <a:off x="459360" y="188640"/>
-            <a:ext cx="8283240" cy="893160"/>
+            <a:ext cx="8282880" cy="892800"/>
           </a:xfrm>
           <a:prstGeom prst="rect">
             <a:avLst/>
@@ -3770,11 +4212,22 @@
             <a:noFill/>
           </a:ln>
         </p:spPr>
+        <p:style>
+          <a:lnRef idx="0"/>
+          <a:fillRef idx="0"/>
+          <a:effectRef idx="0"/>
+          <a:fontRef idx="minor"/>
+        </p:style>
         <p:txBody>
           <a:bodyPr lIns="90000" rIns="90000" tIns="45000" bIns="45000" anchor="t">
             <a:normAutofit/>
           </a:bodyPr>
           <a:p>
+            <a:pPr>
+              <a:lnSpc>
+                <a:spcPct val="100000"/>
+              </a:lnSpc>
+            </a:pPr>
             <a:r>
               <a:rPr lang="en-US" sz="2400" b="1" u="none" spc="-99" strike="noStrike">
                 <a:solidFill>
@@ -3813,14 +4266,14 @@
       </p:sp>
       <p:sp>
         <p:nvSpPr>
-          <p:cNvPr id="33" name=""/>
-          <p:cNvSpPr txBox="1"/>
+          <p:cNvPr id="34" name=""/>
+          <p:cNvSpPr/>
           <p:nvPr/>
         </p:nvSpPr>
         <p:spPr>
           <a:xfrm>
             <a:off x="187200" y="6559200"/>
-            <a:ext cx="8385120" cy="298800"/>
+            <a:ext cx="8384760" cy="298440"/>
           </a:xfrm>
           <a:prstGeom prst="rect">
             <a:avLst/>
@@ -3830,11 +4283,22 @@
             <a:noFill/>
           </a:ln>
         </p:spPr>
+        <p:style>
+          <a:lnRef idx="0"/>
+          <a:fillRef idx="0"/>
+          <a:effectRef idx="0"/>
+          <a:fontRef idx="minor"/>
+        </p:style>
         <p:txBody>
           <a:bodyPr lIns="90000" rIns="90000" tIns="45000" bIns="45000" anchor="t">
             <a:normAutofit/>
           </a:bodyPr>
           <a:p>
+            <a:pPr>
+              <a:lnSpc>
+                <a:spcPct val="100000"/>
+              </a:lnSpc>
+            </a:pPr>
             <a:r>
               <a:rPr lang="en-US" sz="500" b="0" u="none" strike="noStrike">
                 <a:solidFill>
@@ -3845,19 +4309,7 @@
                 <a:latin typeface="CenturyGothic"/>
                 <a:ea typeface="CenturyGothic"/>
               </a:rPr>
-              <a:t>CONFIDENTIAL DOCUMENT. COPYING, PUBLISHING, OR DISTRIBUTING WITHOUT WRITTEN PERMISSION OF TRACE ONE IS PROHIBITED</a:t>
-            </a:r>
-            <a:r>
-              <a:rPr lang="en-US" sz="500" b="0" u="none" strike="noStrike">
-                <a:solidFill>
-                  <a:srgbClr val="484a52"/>
-                </a:solidFill>
-                <a:effectLst/>
-                <a:uFillTx/>
-                <a:latin typeface="CenturyGothic"/>
-                <a:ea typeface="CenturyGothic"/>
-              </a:rPr>
-              <a:t>.</a:t>
+              <a:t>CONFIDENTIAL DOCUMENT. COPYING, PUBLISHING, OR DISTRIBUTING WITHOUT WRITTEN PERMISSION OF TRACE ONE IS PROHIBITED.</a:t>
             </a:r>
             <a:endParaRPr lang="en-US" sz="500" b="0" u="none" strike="noStrike">
               <a:solidFill>
@@ -3872,20 +4324,26 @@
       </p:sp>
       <p:sp>
         <p:nvSpPr>
-          <p:cNvPr id="34" name=""/>
+          <p:cNvPr id="35" name=""/>
           <p:cNvSpPr/>
           <p:nvPr/>
         </p:nvSpPr>
         <p:spPr>
           <a:xfrm>
             <a:off x="4937760" y="1361880"/>
-            <a:ext cx="2466360" cy="1420920"/>
+            <a:ext cx="2466000" cy="1420560"/>
           </a:xfrm>
           <a:custGeom>
             <a:avLst/>
-            <a:gdLst/>
+            <a:gdLst>
+              <a:gd name="textAreaLeft" fmla="*/ 0 w 2466000"/>
+              <a:gd name="textAreaRight" fmla="*/ 2466360 w 2466000"/>
+              <a:gd name="textAreaTop" fmla="*/ 0 h 1420560"/>
+              <a:gd name="textAreaBottom" fmla="*/ 1420920 h 1420560"/>
+            </a:gdLst>
             <a:ahLst/>
-            <a:rect l="0" t="0" r="r" b="b"/>
+            <a:cxnLst/>
+            <a:rect l="textAreaLeft" t="textAreaTop" r="textAreaRight" b="textAreaBottom"/>
             <a:pathLst>
               <a:path w="6851" h="3947">
                 <a:moveTo>
@@ -3917,11 +4375,22 @@
             <a:round/>
           </a:ln>
         </p:spPr>
+        <p:style>
+          <a:lnRef idx="0"/>
+          <a:fillRef idx="0"/>
+          <a:effectRef idx="0"/>
+          <a:fontRef idx="minor"/>
+        </p:style>
         <p:txBody>
-          <a:bodyPr tIns="46440" bIns="46440" anchor="t">
+          <a:bodyPr lIns="90000" rIns="90000" tIns="46440" bIns="46440" anchor="t">
             <a:noAutofit/>
           </a:bodyPr>
           <a:p>
+            <a:pPr>
+              <a:lnSpc>
+                <a:spcPct val="100000"/>
+              </a:lnSpc>
+            </a:pPr>
             <a:endParaRPr lang="en-US" sz="1800" b="0" u="none" strike="noStrike">
               <a:solidFill>
                 <a:srgbClr val="000000"/>
@@ -3935,7 +4404,7 @@
       </p:sp>
       <p:pic>
         <p:nvPicPr>
-          <p:cNvPr id="35" name=""/>
+          <p:cNvPr id="36" name=""/>
           <p:cNvPicPr/>
           <p:nvPr/>
         </p:nvPicPr>
@@ -3946,7 +4415,7 @@
         <p:spPr>
           <a:xfrm>
             <a:off x="7078320" y="6127560"/>
-            <a:ext cx="1766520" cy="581040"/>
+            <a:ext cx="1766160" cy="580680"/>
           </a:xfrm>
           <a:prstGeom prst="rect">
             <a:avLst/>
@@ -3959,20 +4428,26 @@
       </p:pic>
       <p:sp>
         <p:nvSpPr>
-          <p:cNvPr id="36" name=""/>
+          <p:cNvPr id="37" name=""/>
           <p:cNvSpPr/>
           <p:nvPr/>
         </p:nvSpPr>
         <p:spPr>
           <a:xfrm>
             <a:off x="4157640" y="3429000"/>
-            <a:ext cx="1768320" cy="411840"/>
+            <a:ext cx="1767960" cy="411480"/>
           </a:xfrm>
           <a:custGeom>
             <a:avLst/>
-            <a:gdLst/>
+            <a:gdLst>
+              <a:gd name="textAreaLeft" fmla="*/ 0 w 1767960"/>
+              <a:gd name="textAreaRight" fmla="*/ 1768320 w 1767960"/>
+              <a:gd name="textAreaTop" fmla="*/ 0 h 411480"/>
+              <a:gd name="textAreaBottom" fmla="*/ 411840 h 411480"/>
+            </a:gdLst>
             <a:ahLst/>
-            <a:rect l="0" t="0" r="r" b="b"/>
+            <a:cxnLst/>
+            <a:rect l="textAreaLeft" t="textAreaTop" r="textAreaRight" b="textAreaBottom"/>
             <a:pathLst>
               <a:path w="4912" h="1144">
                 <a:moveTo>
@@ -4004,11 +4479,22 @@
             <a:round/>
           </a:ln>
         </p:spPr>
+        <p:style>
+          <a:lnRef idx="0"/>
+          <a:fillRef idx="0"/>
+          <a:effectRef idx="0"/>
+          <a:fontRef idx="minor"/>
+        </p:style>
         <p:txBody>
-          <a:bodyPr tIns="46440" bIns="46440" anchor="t">
+          <a:bodyPr lIns="90000" rIns="90000" tIns="46440" bIns="46440" anchor="t">
             <a:noAutofit/>
           </a:bodyPr>
           <a:p>
+            <a:pPr>
+              <a:lnSpc>
+                <a:spcPct val="100000"/>
+              </a:lnSpc>
+            </a:pPr>
             <a:endParaRPr lang="en-US" sz="1800" b="0" u="none" strike="noStrike">
               <a:solidFill>
                 <a:srgbClr val="000000"/>
@@ -4022,13 +4508,13 @@
       </p:sp>
       <p:graphicFrame>
         <p:nvGraphicFramePr>
-          <p:cNvPr id="37" name=""/>
+          <p:cNvPr id="38" name=""/>
           <p:cNvGraphicFramePr/>
           <p:nvPr/>
         </p:nvGraphicFramePr>
         <p:xfrm>
           <a:off x="303840" y="1081440"/>
-          <a:ext cx="5694120" cy="4255200"/>
+          <a:ext cx="5693760" cy="5394960"/>
         </p:xfrm>
         <a:graphic>
           <a:graphicData uri="http://schemas.openxmlformats.org/drawingml/2006/table">
@@ -4043,11 +4529,15 @@
               <a:tr h="1792800">
                 <a:tc>
                   <a:txBody>
-                    <a:bodyPr lIns="45720" rIns="45720" anchor="t" anchorCtr="1">
+                    <a:bodyPr lIns="45720" rIns="45720" anchor="t">
                       <a:noAutofit/>
                     </a:bodyPr>
                     <a:p>
-                      <a:pPr algn="ctr"/>
+                      <a:pPr algn="ctr">
+                        <a:lnSpc>
+                          <a:spcPct val="100000"/>
+                        </a:lnSpc>
+                      </a:pPr>
                       <a:r>
                         <a:rPr lang="en-US" sz="4000" b="1" u="none" strike="noStrike">
                           <a:solidFill>
@@ -4102,7 +4592,7 @@
                 </a:tc>
                 <a:tc>
                   <a:txBody>
-                    <a:bodyPr lIns="45720" rIns="45720" anchor="t" anchorCtr="1">
+                    <a:bodyPr lIns="45720" rIns="45720" anchor="t">
                       <a:noAutofit/>
                     </a:bodyPr>
                     <a:p>
@@ -4148,11 +4638,15 @@
                 </a:tc>
                 <a:tc>
                   <a:txBody>
-                    <a:bodyPr lIns="45720" rIns="45720" anchor="t" anchorCtr="1">
+                    <a:bodyPr lIns="45720" rIns="45720" anchor="t">
                       <a:noAutofit/>
                     </a:bodyPr>
                     <a:p>
-                      <a:pPr algn="ctr"/>
+                      <a:pPr algn="ctr">
+                        <a:lnSpc>
+                          <a:spcPct val="100000"/>
+                        </a:lnSpc>
+                      </a:pPr>
                       <a:r>
                         <a:rPr lang="en-US" sz="4000" b="1" u="none" strike="noStrike">
                           <a:solidFill>
@@ -4207,7 +4701,7 @@
                 </a:tc>
                 <a:tc>
                   <a:txBody>
-                    <a:bodyPr lIns="45720" rIns="45720" anchor="t" anchorCtr="1">
+                    <a:bodyPr lIns="45720" rIns="45720" anchor="t">
                       <a:noAutofit/>
                     </a:bodyPr>
                     <a:p>
@@ -4255,11 +4749,15 @@
               <a:tr h="600840">
                 <a:tc>
                   <a:txBody>
-                    <a:bodyPr lIns="45720" rIns="45720" anchor="t" anchorCtr="1">
+                    <a:bodyPr lIns="45720" rIns="45720" anchor="t">
                       <a:noAutofit/>
                     </a:bodyPr>
                     <a:p>
-                      <a:pPr algn="ctr"/>
+                      <a:pPr algn="ctr">
+                        <a:lnSpc>
+                          <a:spcPct val="100000"/>
+                        </a:lnSpc>
+                      </a:pPr>
                       <a:r>
                         <a:rPr lang="en-US" sz="2000" b="0" u="none" strike="noStrike">
                           <a:solidFill>
@@ -4314,11 +4812,15 @@
                 </a:tc>
                 <a:tc>
                   <a:txBody>
-                    <a:bodyPr lIns="45720" rIns="45720" anchor="t" anchorCtr="1">
+                    <a:bodyPr lIns="45720" rIns="45720" anchor="t">
                       <a:noAutofit/>
                     </a:bodyPr>
                     <a:p>
-                      <a:pPr algn="ctr"/>
+                      <a:pPr algn="ctr">
+                        <a:lnSpc>
+                          <a:spcPct val="100000"/>
+                        </a:lnSpc>
+                      </a:pPr>
                       <a:r>
                         <a:rPr lang="en-US" sz="2000" b="0" u="none" strike="noStrike">
                           <a:solidFill>
@@ -4373,11 +4875,15 @@
                 </a:tc>
                 <a:tc>
                   <a:txBody>
-                    <a:bodyPr lIns="45720" rIns="45720" anchor="t" anchorCtr="1">
+                    <a:bodyPr lIns="45720" rIns="45720" anchor="t">
                       <a:noAutofit/>
                     </a:bodyPr>
                     <a:p>
-                      <a:pPr algn="ctr"/>
+                      <a:pPr algn="ctr">
+                        <a:lnSpc>
+                          <a:spcPct val="100000"/>
+                        </a:lnSpc>
+                      </a:pPr>
                       <a:r>
                         <a:rPr lang="en-US" sz="2000" b="0" u="none" strike="noStrike">
                           <a:solidFill>
@@ -4432,11 +4938,15 @@
                 </a:tc>
                 <a:tc>
                   <a:txBody>
-                    <a:bodyPr lIns="45720" rIns="45720" anchor="t" anchorCtr="1">
+                    <a:bodyPr lIns="45720" rIns="45720" anchor="t">
                       <a:noAutofit/>
                     </a:bodyPr>
                     <a:p>
-                      <a:pPr algn="ctr"/>
+                      <a:pPr algn="ctr">
+                        <a:lnSpc>
+                          <a:spcPct val="100000"/>
+                        </a:lnSpc>
+                      </a:pPr>
                       <a:r>
                         <a:rPr lang="en-US" sz="2000" b="0" u="none" strike="noStrike">
                           <a:solidFill>
@@ -4493,11 +5003,15 @@
               <a:tr h="2329560">
                 <a:tc>
                   <a:txBody>
-                    <a:bodyPr lIns="45720" rIns="45720" anchor="t" anchorCtr="1">
+                    <a:bodyPr lIns="45720" rIns="45720" anchor="t">
                       <a:noAutofit/>
                     </a:bodyPr>
                     <a:p>
-                      <a:pPr algn="ctr"/>
+                      <a:pPr algn="ctr">
+                        <a:lnSpc>
+                          <a:spcPct val="100000"/>
+                        </a:lnSpc>
+                      </a:pPr>
                       <a:r>
                         <a:rPr lang="en-US" sz="4400" b="0" u="none" strike="noStrike">
                           <a:solidFill>
@@ -4552,11 +5066,15 @@
                 </a:tc>
                 <a:tc>
                   <a:txBody>
-                    <a:bodyPr lIns="45720" rIns="45720" anchor="t" anchorCtr="1">
+                    <a:bodyPr lIns="45720" rIns="45720" anchor="t">
                       <a:noAutofit/>
                     </a:bodyPr>
                     <a:p>
-                      <a:pPr algn="ctr"/>
+                      <a:pPr algn="ctr">
+                        <a:lnSpc>
+                          <a:spcPct val="100000"/>
+                        </a:lnSpc>
+                      </a:pPr>
                       <a:r>
                         <a:rPr lang="en-US" sz="4400" b="0" u="none" strike="noStrike">
                           <a:solidFill>
@@ -4567,7 +5085,7 @@
                           <a:latin typeface="Arial"/>
                           <a:ea typeface="Arial"/>
                         </a:rPr>
-                        <a:t>{{re_prev _sat_c}}</a:t>
+                        <a:t>{{re_prev_sat_c}}</a:t>
                       </a:r>
                       <a:endParaRPr lang="en-US" sz="4400" b="0" u="none" strike="noStrike">
                         <a:solidFill>
@@ -4611,11 +5129,15 @@
                 </a:tc>
                 <a:tc>
                   <a:txBody>
-                    <a:bodyPr lIns="45720" rIns="45720" anchor="t" anchorCtr="1">
+                    <a:bodyPr lIns="45720" rIns="45720" anchor="t">
                       <a:noAutofit/>
                     </a:bodyPr>
                     <a:p>
-                      <a:pPr algn="ctr"/>
+                      <a:pPr algn="ctr">
+                        <a:lnSpc>
+                          <a:spcPct val="100000"/>
+                        </a:lnSpc>
+                      </a:pPr>
                       <a:r>
                         <a:rPr lang="en-US" sz="4400" b="0" u="none" strike="noStrike">
                           <a:solidFill>
@@ -4670,11 +5192,15 @@
                 </a:tc>
                 <a:tc>
                   <a:txBody>
-                    <a:bodyPr lIns="45720" rIns="45720" anchor="t" anchorCtr="1">
+                    <a:bodyPr lIns="45720" rIns="45720" anchor="t">
                       <a:noAutofit/>
                     </a:bodyPr>
                     <a:p>
-                      <a:pPr algn="ctr"/>
+                      <a:pPr algn="ctr">
+                        <a:lnSpc>
+                          <a:spcPct val="100000"/>
+                        </a:lnSpc>
+                      </a:pPr>
                       <a:r>
                         <a:rPr lang="en-US" sz="4400" b="0" u="none" strike="noStrike">
                           <a:solidFill>
@@ -4772,14 +5298,14 @@
       </p:grpSpPr>
       <p:sp>
         <p:nvSpPr>
-          <p:cNvPr id="38" name=""/>
-          <p:cNvSpPr txBox="1"/>
+          <p:cNvPr id="39" name=""/>
+          <p:cNvSpPr/>
           <p:nvPr/>
         </p:nvSpPr>
         <p:spPr>
           <a:xfrm>
             <a:off x="395280" y="2314440"/>
-            <a:ext cx="5198760" cy="1341000"/>
+            <a:ext cx="5198400" cy="1340640"/>
           </a:xfrm>
           <a:prstGeom prst="rect">
             <a:avLst/>
@@ -4789,11 +5315,22 @@
             <a:noFill/>
           </a:ln>
         </p:spPr>
+        <p:style>
+          <a:lnRef idx="0"/>
+          <a:fillRef idx="0"/>
+          <a:effectRef idx="0"/>
+          <a:fontRef idx="minor"/>
+        </p:style>
         <p:txBody>
           <a:bodyPr lIns="90000" rIns="90000" tIns="45000" bIns="45000" anchor="t">
-            <a:normAutofit fontScale="85000" lnSpcReduction="9999"/>
+            <a:normAutofit fontScale="85000" lnSpcReduction="19999"/>
           </a:bodyPr>
           <a:p>
+            <a:pPr>
+              <a:lnSpc>
+                <a:spcPct val="100000"/>
+              </a:lnSpc>
+            </a:pPr>
             <a:r>
               <a:rPr lang="en-US" sz="3600" b="1" u="none" strike="noStrike">
                 <a:solidFill>
@@ -4856,14 +5393,14 @@
       </p:grpSpPr>
       <p:sp>
         <p:nvSpPr>
-          <p:cNvPr id="39" name=""/>
-          <p:cNvSpPr txBox="1"/>
+          <p:cNvPr id="40" name=""/>
+          <p:cNvSpPr/>
           <p:nvPr/>
         </p:nvSpPr>
         <p:spPr>
           <a:xfrm>
             <a:off x="459360" y="188640"/>
-            <a:ext cx="8283240" cy="1299600"/>
+            <a:ext cx="8282880" cy="1299240"/>
           </a:xfrm>
           <a:prstGeom prst="rect">
             <a:avLst/>
@@ -4873,11 +5410,22 @@
             <a:noFill/>
           </a:ln>
         </p:spPr>
+        <p:style>
+          <a:lnRef idx="0"/>
+          <a:fillRef idx="0"/>
+          <a:effectRef idx="0"/>
+          <a:fontRef idx="minor"/>
+        </p:style>
         <p:txBody>
           <a:bodyPr lIns="90000" rIns="90000" tIns="45000" bIns="45000" anchor="t">
             <a:normAutofit/>
           </a:bodyPr>
           <a:p>
+            <a:pPr>
+              <a:lnSpc>
+                <a:spcPct val="100000"/>
+              </a:lnSpc>
+            </a:pPr>
             <a:r>
               <a:rPr lang="en-US" sz="2400" b="1" u="none" spc="-99" strike="noStrike">
                 <a:solidFill>
@@ -4916,14 +5464,14 @@
       </p:sp>
       <p:sp>
         <p:nvSpPr>
-          <p:cNvPr id="40" name=""/>
-          <p:cNvSpPr txBox="1"/>
+          <p:cNvPr id="41" name=""/>
+          <p:cNvSpPr/>
           <p:nvPr/>
         </p:nvSpPr>
         <p:spPr>
           <a:xfrm>
             <a:off x="5029560" y="1094040"/>
-            <a:ext cx="3713400" cy="2561400"/>
+            <a:ext cx="3713040" cy="2561040"/>
           </a:xfrm>
           <a:prstGeom prst="rect">
             <a:avLst/>
@@ -4933,6 +5481,12 @@
             <a:noFill/>
           </a:ln>
         </p:spPr>
+        <p:style>
+          <a:lnRef idx="0"/>
+          <a:fillRef idx="0"/>
+          <a:effectRef idx="0"/>
+          <a:fontRef idx="minor"/>
+        </p:style>
         <p:txBody>
           <a:bodyPr lIns="90000" rIns="90000" tIns="45000" bIns="45000" anchor="t">
             <a:normAutofit/>
@@ -4986,14 +5540,14 @@
       </p:sp>
       <p:sp>
         <p:nvSpPr>
-          <p:cNvPr id="41" name=""/>
-          <p:cNvSpPr txBox="1"/>
+          <p:cNvPr id="42" name=""/>
+          <p:cNvSpPr/>
           <p:nvPr/>
         </p:nvSpPr>
         <p:spPr>
           <a:xfrm>
             <a:off x="187200" y="6559200"/>
-            <a:ext cx="8385120" cy="298800"/>
+            <a:ext cx="8384760" cy="298440"/>
           </a:xfrm>
           <a:prstGeom prst="rect">
             <a:avLst/>
@@ -5003,11 +5557,22 @@
             <a:noFill/>
           </a:ln>
         </p:spPr>
+        <p:style>
+          <a:lnRef idx="0"/>
+          <a:fillRef idx="0"/>
+          <a:effectRef idx="0"/>
+          <a:fontRef idx="minor"/>
+        </p:style>
         <p:txBody>
           <a:bodyPr lIns="90000" rIns="90000" tIns="45000" bIns="45000" anchor="t">
             <a:normAutofit/>
           </a:bodyPr>
           <a:p>
+            <a:pPr>
+              <a:lnSpc>
+                <a:spcPct val="100000"/>
+              </a:lnSpc>
+            </a:pPr>
             <a:r>
               <a:rPr lang="en-US" sz="500" b="0" u="none" strike="noStrike">
                 <a:solidFill>
@@ -5018,19 +5583,7 @@
                 <a:latin typeface="CenturyGothic"/>
                 <a:ea typeface="CenturyGothic"/>
               </a:rPr>
-              <a:t>CONFIDENTIAL DOCUMENT. COPYING, PUBLISHING, OR DISTRIBUTING WITHOUT WRITTEN PERMISSION OF TRACE ONE IS PROHIBITED</a:t>
-            </a:r>
-            <a:r>
-              <a:rPr lang="en-US" sz="500" b="0" u="none" strike="noStrike">
-                <a:solidFill>
-                  <a:srgbClr val="484a52"/>
-                </a:solidFill>
-                <a:effectLst/>
-                <a:uFillTx/>
-                <a:latin typeface="CenturyGothic"/>
-                <a:ea typeface="CenturyGothic"/>
-              </a:rPr>
-              <a:t>.</a:t>
+              <a:t>CONFIDENTIAL DOCUMENT. COPYING, PUBLISHING, OR DISTRIBUTING WITHOUT WRITTEN PERMISSION OF TRACE ONE IS PROHIBITED.</a:t>
             </a:r>
             <a:endParaRPr lang="en-US" sz="500" b="0" u="none" strike="noStrike">
               <a:solidFill>
@@ -5045,7 +5598,7 @@
       </p:sp>
       <p:pic>
         <p:nvPicPr>
-          <p:cNvPr id="42" name=""/>
+          <p:cNvPr id="43" name=""/>
           <p:cNvPicPr/>
           <p:nvPr/>
         </p:nvPicPr>
@@ -5056,7 +5609,7 @@
         <p:spPr>
           <a:xfrm>
             <a:off x="7078320" y="6127560"/>
-            <a:ext cx="1766520" cy="581040"/>
+            <a:ext cx="1766160" cy="580680"/>
           </a:xfrm>
           <a:prstGeom prst="rect">
             <a:avLst/>
@@ -5069,13 +5622,13 @@
       </p:pic>
       <p:graphicFrame>
         <p:nvGraphicFramePr>
-          <p:cNvPr id="43" name=""/>
+          <p:cNvPr id="44" name=""/>
           <p:cNvGraphicFramePr/>
           <p:nvPr/>
         </p:nvGraphicFramePr>
         <p:xfrm>
           <a:off x="611640" y="1501920"/>
-          <a:ext cx="4141800" cy="2077200"/>
+          <a:ext cx="4141440" cy="2956320"/>
         </p:xfrm>
         <a:graphic>
           <a:graphicData uri="http://schemas.openxmlformats.org/drawingml/2006/table">
@@ -5088,11 +5641,15 @@
               <a:tr h="798840">
                 <a:tc>
                   <a:txBody>
-                    <a:bodyPr lIns="45720" rIns="45720" anchor="t" anchorCtr="1">
+                    <a:bodyPr lIns="45720" rIns="45720" anchor="t">
                       <a:noAutofit/>
                     </a:bodyPr>
                     <a:p>
-                      <a:pPr algn="ctr"/>
+                      <a:pPr algn="ctr">
+                        <a:lnSpc>
+                          <a:spcPct val="100000"/>
+                        </a:lnSpc>
+                      </a:pPr>
                       <a:r>
                         <a:rPr lang="en-US" sz="2500" b="1" u="none" strike="noStrike">
                           <a:solidFill>
@@ -5147,11 +5704,15 @@
                 </a:tc>
                 <a:tc>
                   <a:txBody>
-                    <a:bodyPr lIns="45720" rIns="45720" anchor="t" anchorCtr="1">
+                    <a:bodyPr lIns="45720" rIns="45720" anchor="t">
                       <a:noAutofit/>
                     </a:bodyPr>
                     <a:p>
-                      <a:pPr algn="ctr"/>
+                      <a:pPr algn="ctr">
+                        <a:lnSpc>
+                          <a:spcPct val="100000"/>
+                        </a:lnSpc>
+                      </a:pPr>
                       <a:r>
                         <a:rPr lang="en-US" sz="2500" b="1" u="none" strike="noStrike">
                           <a:solidFill>
@@ -5208,11 +5769,15 @@
               <a:tr h="1770120">
                 <a:tc>
                   <a:txBody>
-                    <a:bodyPr lIns="45720" rIns="45720" anchor="t" anchorCtr="1">
+                    <a:bodyPr lIns="45720" rIns="45720" anchor="t">
                       <a:noAutofit/>
                     </a:bodyPr>
                     <a:p>
-                      <a:pPr algn="ctr"/>
+                      <a:pPr algn="ctr">
+                        <a:lnSpc>
+                          <a:spcPct val="100000"/>
+                        </a:lnSpc>
+                      </a:pPr>
                       <a:r>
                         <a:rPr lang="en-US" sz="4400" b="0" u="none" strike="noStrike">
                           <a:solidFill>
@@ -5267,11 +5832,15 @@
                 </a:tc>
                 <a:tc>
                   <a:txBody>
-                    <a:bodyPr lIns="45720" rIns="45720" anchor="t" anchorCtr="1">
+                    <a:bodyPr lIns="45720" rIns="45720" anchor="t">
                       <a:noAutofit/>
                     </a:bodyPr>
                     <a:p>
-                      <a:pPr algn="ctr"/>
+                      <a:pPr algn="ctr">
+                        <a:lnSpc>
+                          <a:spcPct val="100000"/>
+                        </a:lnSpc>
+                      </a:pPr>
                       <a:r>
                         <a:rPr lang="en-US" sz="4400" b="0" u="none" strike="noStrike">
                           <a:solidFill>
@@ -5331,13 +5900,13 @@
       </p:graphicFrame>
       <p:graphicFrame>
         <p:nvGraphicFramePr>
-          <p:cNvPr id="44" name=""/>
+          <p:cNvPr id="45" name=""/>
           <p:cNvGraphicFramePr/>
           <p:nvPr/>
         </p:nvGraphicFramePr>
         <p:xfrm>
           <a:off x="5023440" y="1496160"/>
-          <a:ext cx="3946320" cy="2077200"/>
+          <a:ext cx="3945960" cy="2956320"/>
         </p:xfrm>
         <a:graphic>
           <a:graphicData uri="http://schemas.openxmlformats.org/drawingml/2006/table">
@@ -5350,11 +5919,15 @@
               <a:tr h="798840">
                 <a:tc>
                   <a:txBody>
-                    <a:bodyPr lIns="45720" rIns="45720" anchor="t" anchorCtr="1">
+                    <a:bodyPr lIns="45720" rIns="45720" anchor="t">
                       <a:noAutofit/>
                     </a:bodyPr>
                     <a:p>
-                      <a:pPr algn="ctr"/>
+                      <a:pPr algn="ctr">
+                        <a:lnSpc>
+                          <a:spcPct val="100000"/>
+                        </a:lnSpc>
+                      </a:pPr>
                       <a:r>
                         <a:rPr lang="en-US" sz="2500" b="1" u="none" strike="noStrike">
                           <a:solidFill>
@@ -5409,11 +5982,15 @@
                 </a:tc>
                 <a:tc>
                   <a:txBody>
-                    <a:bodyPr lIns="45720" rIns="45720" anchor="t" anchorCtr="1">
+                    <a:bodyPr lIns="45720" rIns="45720" anchor="t">
                       <a:noAutofit/>
                     </a:bodyPr>
                     <a:p>
-                      <a:pPr algn="ctr"/>
+                      <a:pPr algn="ctr">
+                        <a:lnSpc>
+                          <a:spcPct val="100000"/>
+                        </a:lnSpc>
+                      </a:pPr>
                       <a:r>
                         <a:rPr lang="en-US" sz="2500" b="1" u="none" strike="noStrike">
                           <a:solidFill>
@@ -5470,11 +6047,15 @@
               <a:tr h="1770120">
                 <a:tc>
                   <a:txBody>
-                    <a:bodyPr lIns="45720" rIns="45720" anchor="t" anchorCtr="1">
+                    <a:bodyPr lIns="45720" rIns="45720" anchor="t">
                       <a:noAutofit/>
                     </a:bodyPr>
                     <a:p>
-                      <a:pPr algn="ctr"/>
+                      <a:pPr algn="ctr">
+                        <a:lnSpc>
+                          <a:spcPct val="100000"/>
+                        </a:lnSpc>
+                      </a:pPr>
                       <a:r>
                         <a:rPr lang="en-US" sz="4400" b="0" u="none" strike="noStrike">
                           <a:solidFill>
@@ -5529,11 +6110,15 @@
                 </a:tc>
                 <a:tc>
                   <a:txBody>
-                    <a:bodyPr lIns="45720" rIns="45720" anchor="t" anchorCtr="1">
+                    <a:bodyPr lIns="45720" rIns="45720" anchor="t">
                       <a:noAutofit/>
                     </a:bodyPr>
                     <a:p>
-                      <a:pPr algn="ctr"/>
+                      <a:pPr algn="ctr">
+                        <a:lnSpc>
+                          <a:spcPct val="100000"/>
+                        </a:lnSpc>
+                      </a:pPr>
                       <a:r>
                         <a:rPr lang="en-US" sz="4400" b="0" u="none" strike="noStrike">
                           <a:solidFill>
@@ -5593,14 +6178,14 @@
       </p:graphicFrame>
       <p:sp>
         <p:nvSpPr>
-          <p:cNvPr id="45" name=""/>
-          <p:cNvSpPr txBox="1"/>
+          <p:cNvPr id="46" name=""/>
+          <p:cNvSpPr/>
           <p:nvPr/>
         </p:nvSpPr>
         <p:spPr>
           <a:xfrm>
             <a:off x="611640" y="1094040"/>
-            <a:ext cx="4259160" cy="397800"/>
+            <a:ext cx="4258800" cy="397440"/>
           </a:xfrm>
           <a:prstGeom prst="rect">
             <a:avLst/>
@@ -5610,11 +6195,22 @@
             <a:noFill/>
           </a:ln>
         </p:spPr>
+        <p:style>
+          <a:lnRef idx="0"/>
+          <a:fillRef idx="0"/>
+          <a:effectRef idx="0"/>
+          <a:fontRef idx="minor"/>
+        </p:style>
         <p:txBody>
           <a:bodyPr lIns="90000" rIns="90000" tIns="45000" bIns="45000" anchor="t">
             <a:normAutofit/>
           </a:bodyPr>
           <a:p>
+            <a:pPr>
+              <a:lnSpc>
+                <a:spcPct val="100000"/>
+              </a:lnSpc>
+            </a:pPr>
             <a:r>
               <a:rPr lang="en-US" sz="2000" b="0" u="none" spc="-99" strike="noStrike">
                 <a:solidFill>
@@ -5625,8 +6221,54 @@
                 <a:latin typeface="Arial"/>
                 <a:ea typeface="Arial"/>
               </a:rPr>
-              <a:t>Total requests handled by support</a:t>
+              <a:t>Total requests handled by support:</a:t>
             </a:r>
+            <a:endParaRPr lang="en-US" sz="2000" b="0" u="none" strike="noStrike">
+              <a:solidFill>
+                <a:srgbClr val="000000"/>
+              </a:solidFill>
+              <a:effectLst/>
+              <a:uFillTx/>
+              <a:latin typeface="Arial"/>
+            </a:endParaRPr>
+          </a:p>
+        </p:txBody>
+      </p:sp>
+      <p:sp>
+        <p:nvSpPr>
+          <p:cNvPr id="47" name=""/>
+          <p:cNvSpPr/>
+          <p:nvPr/>
+        </p:nvSpPr>
+        <p:spPr>
+          <a:xfrm>
+            <a:off x="611640" y="3706920"/>
+            <a:ext cx="4258800" cy="3297600"/>
+          </a:xfrm>
+          <a:prstGeom prst="rect">
+            <a:avLst/>
+          </a:prstGeom>
+          <a:noFill/>
+          <a:ln w="0">
+            <a:noFill/>
+          </a:ln>
+        </p:spPr>
+        <p:style>
+          <a:lnRef idx="0"/>
+          <a:fillRef idx="0"/>
+          <a:effectRef idx="0"/>
+          <a:fontRef idx="minor"/>
+        </p:style>
+        <p:txBody>
+          <a:bodyPr lIns="90000" rIns="90000" tIns="45000" bIns="45000" anchor="t">
+            <a:normAutofit/>
+          </a:bodyPr>
+          <a:p>
+            <a:pPr>
+              <a:lnSpc>
+                <a:spcPct val="100000"/>
+              </a:lnSpc>
+            </a:pPr>
             <a:r>
               <a:rPr lang="en-US" sz="2000" b="0" u="none" spc="-99" strike="noStrike">
                 <a:solidFill>
@@ -5637,66 +6279,7 @@
                 <a:latin typeface="Arial"/>
                 <a:ea typeface="Arial"/>
               </a:rPr>
-              <a:t>:</a:t>
-            </a:r>
-            <a:endParaRPr lang="en-US" sz="2000" b="0" u="none" strike="noStrike">
-              <a:solidFill>
-                <a:srgbClr val="000000"/>
-              </a:solidFill>
-              <a:effectLst/>
-              <a:uFillTx/>
-              <a:latin typeface="Arial"/>
-            </a:endParaRPr>
-          </a:p>
-        </p:txBody>
-      </p:sp>
-      <p:sp>
-        <p:nvSpPr>
-          <p:cNvPr id="46" name=""/>
-          <p:cNvSpPr txBox="1"/>
-          <p:nvPr/>
-        </p:nvSpPr>
-        <p:spPr>
-          <a:xfrm>
-            <a:off x="611640" y="3706920"/>
-            <a:ext cx="4259160" cy="3297960"/>
-          </a:xfrm>
-          <a:prstGeom prst="rect">
-            <a:avLst/>
-          </a:prstGeom>
-          <a:noFill/>
-          <a:ln w="0">
-            <a:noFill/>
-          </a:ln>
-        </p:spPr>
-        <p:txBody>
-          <a:bodyPr lIns="90000" rIns="90000" tIns="45000" bIns="45000" anchor="t">
-            <a:normAutofit/>
-          </a:bodyPr>
-          <a:p>
-            <a:r>
-              <a:rPr lang="en-US" sz="2000" b="0" u="none" spc="-99" strike="noStrike">
-                <a:solidFill>
-                  <a:srgbClr val="003248"/>
-                </a:solidFill>
-                <a:effectLst/>
-                <a:uFillTx/>
-                <a:latin typeface="Arial"/>
-                <a:ea typeface="Arial"/>
-              </a:rPr>
-              <a:t>Requests by category type</a:t>
-            </a:r>
-            <a:r>
-              <a:rPr lang="en-US" sz="2000" b="0" u="none" spc="-99" strike="noStrike">
-                <a:solidFill>
-                  <a:srgbClr val="003248"/>
-                </a:solidFill>
-                <a:effectLst/>
-                <a:uFillTx/>
-                <a:latin typeface="Arial"/>
-                <a:ea typeface="Arial"/>
-              </a:rPr>
-              <a:t>:</a:t>
+              <a:t>Requests by category type:</a:t>
             </a:r>
             <a:endParaRPr lang="en-US" sz="2000" b="0" u="none" strike="noStrike">
               <a:solidFill>
@@ -5711,7 +6294,7 @@
       </p:sp>
       <p:graphicFrame>
         <p:nvGraphicFramePr>
-          <p:cNvPr id="47" name=""/>
+          <p:cNvPr id="48" name=""/>
           <p:cNvGraphicFramePr/>
           <p:nvPr/>
         </p:nvGraphicFramePr>
@@ -5730,10 +6313,15 @@
               <a:tr h="1189080">
                 <a:tc>
                   <a:txBody>
-                    <a:bodyPr lIns="7560" rIns="7560" tIns="7560" bIns="7560" anchor="b" anchorCtr="1">
+                    <a:bodyPr lIns="7560" rIns="7560" tIns="7560" bIns="7560" anchor="b">
                       <a:noAutofit/>
                     </a:bodyPr>
                     <a:p>
+                      <a:pPr>
+                        <a:lnSpc>
+                          <a:spcPct val="100000"/>
+                        </a:lnSpc>
+                      </a:pPr>
                       <a:r>
                         <a:rPr lang="en-US" sz="1100" b="0" u="none" strike="noStrike">
                           <a:solidFill>
@@ -5788,10 +6376,15 @@
                 </a:tc>
                 <a:tc>
                   <a:txBody>
-                    <a:bodyPr lIns="7560" rIns="7560" tIns="7560" bIns="7560" anchor="b" anchorCtr="1">
+                    <a:bodyPr lIns="7560" rIns="7560" tIns="7560" bIns="7560" anchor="b">
                       <a:noAutofit/>
                     </a:bodyPr>
                     <a:p>
+                      <a:pPr>
+                        <a:lnSpc>
+                          <a:spcPct val="100000"/>
+                        </a:lnSpc>
+                      </a:pPr>
                       <a:r>
                         <a:rPr lang="en-US" sz="1100" b="0" u="none" strike="noStrike">
                           <a:solidFill>
@@ -5848,10 +6441,15 @@
               <a:tr h="1189440">
                 <a:tc>
                   <a:txBody>
-                    <a:bodyPr lIns="7560" rIns="7560" tIns="7560" bIns="7560" anchor="b" anchorCtr="1">
+                    <a:bodyPr lIns="7560" rIns="7560" tIns="7560" bIns="7560" anchor="b">
                       <a:noAutofit/>
                     </a:bodyPr>
                     <a:p>
+                      <a:pPr>
+                        <a:lnSpc>
+                          <a:spcPct val="100000"/>
+                        </a:lnSpc>
+                      </a:pPr>
                       <a:r>
                         <a:rPr lang="en-US" sz="1100" b="0" u="none" strike="noStrike">
                           <a:solidFill>
@@ -5906,11 +6504,15 @@
                 </a:tc>
                 <a:tc>
                   <a:txBody>
-                    <a:bodyPr lIns="7560" rIns="7560" tIns="7560" bIns="7560" anchor="b" anchorCtr="1">
+                    <a:bodyPr lIns="7560" rIns="7560" tIns="7560" bIns="7560" anchor="b">
                       <a:noAutofit/>
                     </a:bodyPr>
                     <a:p>
-                      <a:pPr algn="r"/>
+                      <a:pPr algn="r">
+                        <a:lnSpc>
+                          <a:spcPct val="100000"/>
+                        </a:lnSpc>
+                      </a:pPr>
                       <a:r>
                         <a:rPr lang="en-US" sz="1100" b="0" u="none" strike="noStrike">
                           <a:solidFill>
@@ -6007,14 +6609,14 @@
       </p:grpSpPr>
       <p:sp>
         <p:nvSpPr>
-          <p:cNvPr id="48" name=""/>
-          <p:cNvSpPr txBox="1"/>
+          <p:cNvPr id="49" name=""/>
+          <p:cNvSpPr/>
           <p:nvPr/>
         </p:nvSpPr>
         <p:spPr>
           <a:xfrm>
             <a:off x="459360" y="188640"/>
-            <a:ext cx="8283240" cy="893160"/>
+            <a:ext cx="8282880" cy="892800"/>
           </a:xfrm>
           <a:prstGeom prst="rect">
             <a:avLst/>
@@ -6024,11 +6626,22 @@
             <a:noFill/>
           </a:ln>
         </p:spPr>
+        <p:style>
+          <a:lnRef idx="0"/>
+          <a:fillRef idx="0"/>
+          <a:effectRef idx="0"/>
+          <a:fontRef idx="minor"/>
+        </p:style>
         <p:txBody>
           <a:bodyPr lIns="90000" rIns="90000" tIns="45000" bIns="45000" anchor="t">
             <a:normAutofit/>
           </a:bodyPr>
           <a:p>
+            <a:pPr>
+              <a:lnSpc>
+                <a:spcPct val="100000"/>
+              </a:lnSpc>
+            </a:pPr>
             <a:r>
               <a:rPr lang="en-US" sz="2400" b="1" u="none" spc="-99" strike="noStrike">
                 <a:solidFill>
@@ -6067,14 +6680,14 @@
       </p:sp>
       <p:sp>
         <p:nvSpPr>
-          <p:cNvPr id="49" name=""/>
-          <p:cNvSpPr txBox="1"/>
+          <p:cNvPr id="50" name=""/>
+          <p:cNvSpPr/>
           <p:nvPr/>
         </p:nvSpPr>
         <p:spPr>
           <a:xfrm>
             <a:off x="187200" y="6559200"/>
-            <a:ext cx="8385120" cy="298800"/>
+            <a:ext cx="8384760" cy="298440"/>
           </a:xfrm>
           <a:prstGeom prst="rect">
             <a:avLst/>
@@ -6084,11 +6697,22 @@
             <a:noFill/>
           </a:ln>
         </p:spPr>
+        <p:style>
+          <a:lnRef idx="0"/>
+          <a:fillRef idx="0"/>
+          <a:effectRef idx="0"/>
+          <a:fontRef idx="minor"/>
+        </p:style>
         <p:txBody>
           <a:bodyPr lIns="90000" rIns="90000" tIns="45000" bIns="45000" anchor="t">
             <a:normAutofit/>
           </a:bodyPr>
           <a:p>
+            <a:pPr>
+              <a:lnSpc>
+                <a:spcPct val="100000"/>
+              </a:lnSpc>
+            </a:pPr>
             <a:r>
               <a:rPr lang="en-US" sz="500" b="0" u="none" strike="noStrike">
                 <a:solidFill>
@@ -6099,19 +6723,7 @@
                 <a:latin typeface="CenturyGothic"/>
                 <a:ea typeface="CenturyGothic"/>
               </a:rPr>
-              <a:t>CONFIDENTIAL DOCUMENT. COPYING, PUBLISHING, OR DISTRIBUTING WITHOUT WRITTEN PERMISSION OF TRACE ONE IS PROHIBITED</a:t>
-            </a:r>
-            <a:r>
-              <a:rPr lang="en-US" sz="500" b="0" u="none" strike="noStrike">
-                <a:solidFill>
-                  <a:srgbClr val="484a52"/>
-                </a:solidFill>
-                <a:effectLst/>
-                <a:uFillTx/>
-                <a:latin typeface="CenturyGothic"/>
-                <a:ea typeface="CenturyGothic"/>
-              </a:rPr>
-              <a:t>.</a:t>
+              <a:t>CONFIDENTIAL DOCUMENT. COPYING, PUBLISHING, OR DISTRIBUTING WITHOUT WRITTEN PERMISSION OF TRACE ONE IS PROHIBITED.</a:t>
             </a:r>
             <a:endParaRPr lang="en-US" sz="500" b="0" u="none" strike="noStrike">
               <a:solidFill>
@@ -6126,20 +6738,26 @@
       </p:sp>
       <p:sp>
         <p:nvSpPr>
-          <p:cNvPr id="50" name=""/>
+          <p:cNvPr id="51" name=""/>
           <p:cNvSpPr/>
           <p:nvPr/>
         </p:nvSpPr>
         <p:spPr>
           <a:xfrm>
             <a:off x="4937760" y="1361880"/>
-            <a:ext cx="2466360" cy="1420920"/>
+            <a:ext cx="2466000" cy="1420560"/>
           </a:xfrm>
           <a:custGeom>
             <a:avLst/>
-            <a:gdLst/>
+            <a:gdLst>
+              <a:gd name="textAreaLeft" fmla="*/ 0 w 2466000"/>
+              <a:gd name="textAreaRight" fmla="*/ 2466360 w 2466000"/>
+              <a:gd name="textAreaTop" fmla="*/ 0 h 1420560"/>
+              <a:gd name="textAreaBottom" fmla="*/ 1420920 h 1420560"/>
+            </a:gdLst>
             <a:ahLst/>
-            <a:rect l="0" t="0" r="r" b="b"/>
+            <a:cxnLst/>
+            <a:rect l="textAreaLeft" t="textAreaTop" r="textAreaRight" b="textAreaBottom"/>
             <a:pathLst>
               <a:path w="6851" h="3947">
                 <a:moveTo>
@@ -6171,11 +6789,22 @@
             <a:round/>
           </a:ln>
         </p:spPr>
+        <p:style>
+          <a:lnRef idx="0"/>
+          <a:fillRef idx="0"/>
+          <a:effectRef idx="0"/>
+          <a:fontRef idx="minor"/>
+        </p:style>
         <p:txBody>
-          <a:bodyPr tIns="46440" bIns="46440" anchor="t">
+          <a:bodyPr lIns="90000" rIns="90000" tIns="46440" bIns="46440" anchor="t">
             <a:noAutofit/>
           </a:bodyPr>
           <a:p>
+            <a:pPr>
+              <a:lnSpc>
+                <a:spcPct val="100000"/>
+              </a:lnSpc>
+            </a:pPr>
             <a:endParaRPr lang="en-US" sz="1800" b="0" u="none" strike="noStrike">
               <a:solidFill>
                 <a:srgbClr val="000000"/>
@@ -6189,7 +6818,7 @@
       </p:sp>
       <p:pic>
         <p:nvPicPr>
-          <p:cNvPr id="51" name=""/>
+          <p:cNvPr id="52" name=""/>
           <p:cNvPicPr/>
           <p:nvPr/>
         </p:nvPicPr>
@@ -6200,7 +6829,7 @@
         <p:spPr>
           <a:xfrm>
             <a:off x="7078320" y="6127560"/>
-            <a:ext cx="1766520" cy="581040"/>
+            <a:ext cx="1766160" cy="580680"/>
           </a:xfrm>
           <a:prstGeom prst="rect">
             <a:avLst/>
@@ -6213,20 +6842,26 @@
       </p:pic>
       <p:sp>
         <p:nvSpPr>
-          <p:cNvPr id="52" name=""/>
+          <p:cNvPr id="53" name=""/>
           <p:cNvSpPr/>
           <p:nvPr/>
         </p:nvSpPr>
         <p:spPr>
           <a:xfrm>
             <a:off x="4157640" y="3429000"/>
-            <a:ext cx="1768320" cy="411840"/>
+            <a:ext cx="1767960" cy="411480"/>
           </a:xfrm>
           <a:custGeom>
             <a:avLst/>
-            <a:gdLst/>
+            <a:gdLst>
+              <a:gd name="textAreaLeft" fmla="*/ 0 w 1767960"/>
+              <a:gd name="textAreaRight" fmla="*/ 1768320 w 1767960"/>
+              <a:gd name="textAreaTop" fmla="*/ 0 h 411480"/>
+              <a:gd name="textAreaBottom" fmla="*/ 411840 h 411480"/>
+            </a:gdLst>
             <a:ahLst/>
-            <a:rect l="0" t="0" r="r" b="b"/>
+            <a:cxnLst/>
+            <a:rect l="textAreaLeft" t="textAreaTop" r="textAreaRight" b="textAreaBottom"/>
             <a:pathLst>
               <a:path w="4912" h="1144">
                 <a:moveTo>
@@ -6258,11 +6893,22 @@
             <a:round/>
           </a:ln>
         </p:spPr>
+        <p:style>
+          <a:lnRef idx="0"/>
+          <a:fillRef idx="0"/>
+          <a:effectRef idx="0"/>
+          <a:fontRef idx="minor"/>
+        </p:style>
         <p:txBody>
-          <a:bodyPr tIns="46440" bIns="46440" anchor="t">
+          <a:bodyPr lIns="90000" rIns="90000" tIns="46440" bIns="46440" anchor="t">
             <a:noAutofit/>
           </a:bodyPr>
           <a:p>
+            <a:pPr>
+              <a:lnSpc>
+                <a:spcPct val="100000"/>
+              </a:lnSpc>
+            </a:pPr>
             <a:endParaRPr lang="en-US" sz="1800" b="0" u="none" strike="noStrike">
               <a:solidFill>
                 <a:srgbClr val="000000"/>
@@ -6276,13 +6922,13 @@
       </p:sp>
       <p:graphicFrame>
         <p:nvGraphicFramePr>
-          <p:cNvPr id="53" name=""/>
+          <p:cNvPr id="54" name=""/>
           <p:cNvGraphicFramePr/>
           <p:nvPr/>
         </p:nvGraphicFramePr>
         <p:xfrm>
           <a:off x="330480" y="1712880"/>
-          <a:ext cx="5694120" cy="4255200"/>
+          <a:ext cx="5693760" cy="5394960"/>
         </p:xfrm>
         <a:graphic>
           <a:graphicData uri="http://schemas.openxmlformats.org/drawingml/2006/table">
@@ -6297,11 +6943,15 @@
               <a:tr h="1792800">
                 <a:tc>
                   <a:txBody>
-                    <a:bodyPr lIns="45720" rIns="45720" anchor="t" anchorCtr="1">
+                    <a:bodyPr lIns="45720" rIns="45720" anchor="t">
                       <a:noAutofit/>
                     </a:bodyPr>
                     <a:p>
-                      <a:pPr algn="ctr"/>
+                      <a:pPr algn="ctr">
+                        <a:lnSpc>
+                          <a:spcPct val="100000"/>
+                        </a:lnSpc>
+                      </a:pPr>
                       <a:r>
                         <a:rPr lang="en-US" sz="4000" b="1" u="none" strike="noStrike">
                           <a:solidFill>
@@ -6312,7 +6962,7 @@
                           <a:latin typeface="Helvetica-Bold"/>
                           <a:ea typeface="Helvetica-Bold"/>
                         </a:rPr>
-                        <a:t>September</a:t>
+                        <a:t>{{prev_month}}</a:t>
                       </a:r>
                       <a:endParaRPr lang="en-US" sz="4000" b="0" u="none" strike="noStrike">
                         <a:solidFill>
@@ -6356,7 +7006,7 @@
                 </a:tc>
                 <a:tc>
                   <a:txBody>
-                    <a:bodyPr lIns="45720" rIns="45720" anchor="t" anchorCtr="1">
+                    <a:bodyPr lIns="45720" rIns="45720" anchor="t">
                       <a:noAutofit/>
                     </a:bodyPr>
                     <a:p>
@@ -6402,11 +7052,15 @@
                 </a:tc>
                 <a:tc>
                   <a:txBody>
-                    <a:bodyPr lIns="45720" rIns="45720" anchor="t" anchorCtr="1">
+                    <a:bodyPr lIns="45720" rIns="45720" anchor="t">
                       <a:noAutofit/>
                     </a:bodyPr>
                     <a:p>
-                      <a:pPr algn="ctr"/>
+                      <a:pPr algn="ctr">
+                        <a:lnSpc>
+                          <a:spcPct val="100000"/>
+                        </a:lnSpc>
+                      </a:pPr>
                       <a:r>
                         <a:rPr lang="en-US" sz="4000" b="1" u="none" strike="noStrike">
                           <a:solidFill>
@@ -6417,7 +7071,7 @@
                           <a:latin typeface="Helvetica-Bold"/>
                           <a:ea typeface="Helvetica-Bold"/>
                         </a:rPr>
-                        <a:t>October</a:t>
+                        <a:t>{{month}}</a:t>
                       </a:r>
                       <a:endParaRPr lang="en-US" sz="4000" b="0" u="none" strike="noStrike">
                         <a:solidFill>
@@ -6461,7 +7115,7 @@
                 </a:tc>
                 <a:tc>
                   <a:txBody>
-                    <a:bodyPr lIns="45720" rIns="45720" anchor="t" anchorCtr="1">
+                    <a:bodyPr lIns="45720" rIns="45720" anchor="t">
                       <a:noAutofit/>
                     </a:bodyPr>
                     <a:p>
@@ -6509,11 +7163,15 @@
               <a:tr h="600840">
                 <a:tc>
                   <a:txBody>
-                    <a:bodyPr lIns="45720" rIns="45720" anchor="t" anchorCtr="1">
+                    <a:bodyPr lIns="45720" rIns="45720" anchor="t">
                       <a:noAutofit/>
                     </a:bodyPr>
                     <a:p>
-                      <a:pPr algn="ctr"/>
+                      <a:pPr algn="ctr">
+                        <a:lnSpc>
+                          <a:spcPct val="100000"/>
+                        </a:lnSpc>
+                      </a:pPr>
                       <a:r>
                         <a:rPr lang="en-US" sz="2000" b="0" u="none" strike="noStrike">
                           <a:solidFill>
@@ -6568,11 +7226,15 @@
                 </a:tc>
                 <a:tc>
                   <a:txBody>
-                    <a:bodyPr lIns="45720" rIns="45720" anchor="t" anchorCtr="1">
+                    <a:bodyPr lIns="45720" rIns="45720" anchor="t">
                       <a:noAutofit/>
                     </a:bodyPr>
                     <a:p>
-                      <a:pPr algn="ctr"/>
+                      <a:pPr algn="ctr">
+                        <a:lnSpc>
+                          <a:spcPct val="100000"/>
+                        </a:lnSpc>
+                      </a:pPr>
                       <a:r>
                         <a:rPr lang="en-US" sz="2000" b="0" u="none" strike="noStrike">
                           <a:solidFill>
@@ -6627,11 +7289,15 @@
                 </a:tc>
                 <a:tc>
                   <a:txBody>
-                    <a:bodyPr lIns="45720" rIns="45720" anchor="t" anchorCtr="1">
+                    <a:bodyPr lIns="45720" rIns="45720" anchor="t">
                       <a:noAutofit/>
                     </a:bodyPr>
                     <a:p>
-                      <a:pPr algn="ctr"/>
+                      <a:pPr algn="ctr">
+                        <a:lnSpc>
+                          <a:spcPct val="100000"/>
+                        </a:lnSpc>
+                      </a:pPr>
                       <a:r>
                         <a:rPr lang="en-US" sz="2000" b="0" u="none" strike="noStrike">
                           <a:solidFill>
@@ -6686,11 +7352,15 @@
                 </a:tc>
                 <a:tc>
                   <a:txBody>
-                    <a:bodyPr lIns="45720" rIns="45720" anchor="t" anchorCtr="1">
+                    <a:bodyPr lIns="45720" rIns="45720" anchor="t">
                       <a:noAutofit/>
                     </a:bodyPr>
                     <a:p>
-                      <a:pPr algn="ctr"/>
+                      <a:pPr algn="ctr">
+                        <a:lnSpc>
+                          <a:spcPct val="100000"/>
+                        </a:lnSpc>
+                      </a:pPr>
                       <a:r>
                         <a:rPr lang="en-US" sz="2000" b="0" u="none" strike="noStrike">
                           <a:solidFill>
@@ -6747,11 +7417,15 @@
               <a:tr h="2329560">
                 <a:tc>
                   <a:txBody>
-                    <a:bodyPr lIns="45720" rIns="45720" anchor="t" anchorCtr="1">
+                    <a:bodyPr lIns="45720" rIns="45720" anchor="t">
                       <a:noAutofit/>
                     </a:bodyPr>
                     <a:p>
-                      <a:pPr algn="ctr"/>
+                      <a:pPr algn="ctr">
+                        <a:lnSpc>
+                          <a:spcPct val="100000"/>
+                        </a:lnSpc>
+                      </a:pPr>
                       <a:r>
                         <a:rPr lang="en-US" sz="4400" b="0" u="none" strike="noStrike">
                           <a:solidFill>
@@ -6806,11 +7480,15 @@
                 </a:tc>
                 <a:tc>
                   <a:txBody>
-                    <a:bodyPr lIns="45720" rIns="45720" anchor="t" anchorCtr="1">
+                    <a:bodyPr lIns="45720" rIns="45720" anchor="t">
                       <a:noAutofit/>
                     </a:bodyPr>
                     <a:p>
-                      <a:pPr algn="ctr"/>
+                      <a:pPr algn="ctr">
+                        <a:lnSpc>
+                          <a:spcPct val="100000"/>
+                        </a:lnSpc>
+                      </a:pPr>
                       <a:r>
                         <a:rPr lang="en-US" sz="4400" b="0" u="none" strike="noStrike">
                           <a:solidFill>
@@ -6821,7 +7499,7 @@
                           <a:latin typeface="Arial"/>
                           <a:ea typeface="Arial"/>
                         </a:rPr>
-                        <a:t>{{su_prev_sat__c}}</a:t>
+                        <a:t>{{su_prev_sat_c}}</a:t>
                       </a:r>
                       <a:endParaRPr lang="en-US" sz="4400" b="0" u="none" strike="noStrike">
                         <a:solidFill>
@@ -6865,11 +7543,15 @@
                 </a:tc>
                 <a:tc>
                   <a:txBody>
-                    <a:bodyPr lIns="45720" rIns="45720" anchor="t" anchorCtr="1">
+                    <a:bodyPr lIns="45720" rIns="45720" anchor="t">
                       <a:noAutofit/>
                     </a:bodyPr>
                     <a:p>
-                      <a:pPr algn="ctr"/>
+                      <a:pPr algn="ctr">
+                        <a:lnSpc>
+                          <a:spcPct val="100000"/>
+                        </a:lnSpc>
+                      </a:pPr>
                       <a:r>
                         <a:rPr lang="en-US" sz="4400" b="0" u="none" strike="noStrike">
                           <a:solidFill>
@@ -6924,11 +7606,15 @@
                 </a:tc>
                 <a:tc>
                   <a:txBody>
-                    <a:bodyPr lIns="45720" rIns="45720" anchor="t" anchorCtr="1">
+                    <a:bodyPr lIns="45720" rIns="45720" anchor="t">
                       <a:noAutofit/>
                     </a:bodyPr>
                     <a:p>
-                      <a:pPr algn="ctr"/>
+                      <a:pPr algn="ctr">
+                        <a:lnSpc>
+                          <a:spcPct val="100000"/>
+                        </a:lnSpc>
+                      </a:pPr>
                       <a:r>
                         <a:rPr lang="en-US" sz="4400" b="0" u="none" strike="noStrike">
                           <a:solidFill>
@@ -7026,14 +7712,14 @@
       </p:grpSpPr>
       <p:sp>
         <p:nvSpPr>
-          <p:cNvPr id="54" name=""/>
-          <p:cNvSpPr txBox="1"/>
+          <p:cNvPr id="55" name=""/>
+          <p:cNvSpPr/>
           <p:nvPr/>
         </p:nvSpPr>
         <p:spPr>
           <a:xfrm>
             <a:off x="395280" y="2314440"/>
-            <a:ext cx="5198760" cy="1341000"/>
+            <a:ext cx="5198400" cy="1340640"/>
           </a:xfrm>
           <a:prstGeom prst="rect">
             <a:avLst/>
@@ -7043,11 +7729,22 @@
             <a:noFill/>
           </a:ln>
         </p:spPr>
+        <p:style>
+          <a:lnRef idx="0"/>
+          <a:fillRef idx="0"/>
+          <a:effectRef idx="0"/>
+          <a:fontRef idx="minor"/>
+        </p:style>
         <p:txBody>
           <a:bodyPr lIns="90000" rIns="90000" tIns="45000" bIns="45000" anchor="t">
             <a:normAutofit/>
           </a:bodyPr>
           <a:p>
+            <a:pPr>
+              <a:lnSpc>
+                <a:spcPct val="100000"/>
+              </a:lnSpc>
+            </a:pPr>
             <a:r>
               <a:rPr lang="en-US" sz="3600" b="0" u="none" strike="noStrike">
                 <a:solidFill>
@@ -7110,14 +7807,14 @@
       </p:grpSpPr>
       <p:sp>
         <p:nvSpPr>
-          <p:cNvPr id="55" name=""/>
-          <p:cNvSpPr txBox="1"/>
+          <p:cNvPr id="56" name=""/>
+          <p:cNvSpPr/>
           <p:nvPr/>
         </p:nvSpPr>
         <p:spPr>
           <a:xfrm>
             <a:off x="459360" y="188640"/>
-            <a:ext cx="8283240" cy="1299600"/>
+            <a:ext cx="8282880" cy="1299240"/>
           </a:xfrm>
           <a:prstGeom prst="rect">
             <a:avLst/>
@@ -7127,11 +7824,22 @@
             <a:noFill/>
           </a:ln>
         </p:spPr>
+        <p:style>
+          <a:lnRef idx="0"/>
+          <a:fillRef idx="0"/>
+          <a:effectRef idx="0"/>
+          <a:fontRef idx="minor"/>
+        </p:style>
         <p:txBody>
           <a:bodyPr lIns="90000" rIns="90000" tIns="45000" bIns="45000" anchor="t">
             <a:normAutofit/>
           </a:bodyPr>
           <a:p>
+            <a:pPr>
+              <a:lnSpc>
+                <a:spcPct val="100000"/>
+              </a:lnSpc>
+            </a:pPr>
             <a:r>
               <a:rPr lang="en-US" sz="2400" b="1" u="none" spc="-99" strike="noStrike">
                 <a:solidFill>
@@ -7170,14 +7878,14 @@
       </p:sp>
       <p:sp>
         <p:nvSpPr>
-          <p:cNvPr id="56" name=""/>
-          <p:cNvSpPr txBox="1"/>
+          <p:cNvPr id="57" name=""/>
+          <p:cNvSpPr/>
           <p:nvPr/>
         </p:nvSpPr>
         <p:spPr>
           <a:xfrm>
             <a:off x="209880" y="3467160"/>
-            <a:ext cx="4223160" cy="435960"/>
+            <a:ext cx="4222800" cy="435600"/>
           </a:xfrm>
           <a:prstGeom prst="rect">
             <a:avLst/>
@@ -7187,6 +7895,12 @@
             <a:noFill/>
           </a:ln>
         </p:spPr>
+        <p:style>
+          <a:lnRef idx="0"/>
+          <a:fillRef idx="0"/>
+          <a:effectRef idx="0"/>
+          <a:fontRef idx="minor"/>
+        </p:style>
         <p:txBody>
           <a:bodyPr lIns="90000" rIns="90000" tIns="45000" bIns="45000" anchor="t">
             <a:normAutofit/>
@@ -7240,14 +7954,14 @@
       </p:sp>
       <p:sp>
         <p:nvSpPr>
-          <p:cNvPr id="57" name=""/>
-          <p:cNvSpPr txBox="1"/>
+          <p:cNvPr id="58" name=""/>
+          <p:cNvSpPr/>
           <p:nvPr/>
         </p:nvSpPr>
         <p:spPr>
           <a:xfrm>
             <a:off x="187200" y="6559200"/>
-            <a:ext cx="8385120" cy="298800"/>
+            <a:ext cx="8384760" cy="298440"/>
           </a:xfrm>
           <a:prstGeom prst="rect">
             <a:avLst/>
@@ -7257,11 +7971,22 @@
             <a:noFill/>
           </a:ln>
         </p:spPr>
+        <p:style>
+          <a:lnRef idx="0"/>
+          <a:fillRef idx="0"/>
+          <a:effectRef idx="0"/>
+          <a:fontRef idx="minor"/>
+        </p:style>
         <p:txBody>
           <a:bodyPr lIns="90000" rIns="90000" tIns="45000" bIns="45000" anchor="t">
             <a:normAutofit/>
           </a:bodyPr>
           <a:p>
+            <a:pPr>
+              <a:lnSpc>
+                <a:spcPct val="100000"/>
+              </a:lnSpc>
+            </a:pPr>
             <a:r>
               <a:rPr lang="en-US" sz="500" b="0" u="none" strike="noStrike">
                 <a:solidFill>
@@ -7272,19 +7997,7 @@
                 <a:latin typeface="CenturyGothic"/>
                 <a:ea typeface="CenturyGothic"/>
               </a:rPr>
-              <a:t>CONFIDENTIAL DOCUMENT. COPYING, PUBLISHING, OR DISTRIBUTING WITHOUT WRITTEN PERMISSION OF TRACE ONE IS PROHIBITED</a:t>
-            </a:r>
-            <a:r>
-              <a:rPr lang="en-US" sz="500" b="0" u="none" strike="noStrike">
-                <a:solidFill>
-                  <a:srgbClr val="484a52"/>
-                </a:solidFill>
-                <a:effectLst/>
-                <a:uFillTx/>
-                <a:latin typeface="CenturyGothic"/>
-                <a:ea typeface="CenturyGothic"/>
-              </a:rPr>
-              <a:t>.</a:t>
+              <a:t>CONFIDENTIAL DOCUMENT. COPYING, PUBLISHING, OR DISTRIBUTING WITHOUT WRITTEN PERMISSION OF TRACE ONE IS PROHIBITED.</a:t>
             </a:r>
             <a:endParaRPr lang="en-US" sz="500" b="0" u="none" strike="noStrike">
               <a:solidFill>
@@ -7299,7 +8012,7 @@
       </p:sp>
       <p:pic>
         <p:nvPicPr>
-          <p:cNvPr id="58" name=""/>
+          <p:cNvPr id="59" name=""/>
           <p:cNvPicPr/>
           <p:nvPr/>
         </p:nvPicPr>
@@ -7310,7 +8023,7 @@
         <p:spPr>
           <a:xfrm>
             <a:off x="7078320" y="6127560"/>
-            <a:ext cx="1766520" cy="581040"/>
+            <a:ext cx="1766160" cy="580680"/>
           </a:xfrm>
           <a:prstGeom prst="rect">
             <a:avLst/>
@@ -7323,13 +8036,13 @@
       </p:pic>
       <p:graphicFrame>
         <p:nvGraphicFramePr>
-          <p:cNvPr id="59" name=""/>
+          <p:cNvPr id="60" name=""/>
           <p:cNvGraphicFramePr/>
           <p:nvPr/>
         </p:nvGraphicFramePr>
         <p:xfrm>
           <a:off x="209880" y="1512360"/>
-          <a:ext cx="4223160" cy="1626120"/>
+          <a:ext cx="4223160" cy="1626480"/>
         </p:xfrm>
         <a:graphic>
           <a:graphicData uri="http://schemas.openxmlformats.org/drawingml/2006/table">
@@ -7342,11 +8055,15 @@
               <a:tr h="813240">
                 <a:tc>
                   <a:txBody>
-                    <a:bodyPr lIns="45720" rIns="45720" anchor="t" anchorCtr="1">
+                    <a:bodyPr lIns="45720" rIns="45720" anchor="t">
                       <a:noAutofit/>
                     </a:bodyPr>
                     <a:p>
-                      <a:pPr algn="ctr"/>
+                      <a:pPr algn="ctr">
+                        <a:lnSpc>
+                          <a:spcPct val="100000"/>
+                        </a:lnSpc>
+                      </a:pPr>
                       <a:r>
                         <a:rPr lang="en-US" sz="2800" b="1" u="none" strike="noStrike">
                           <a:solidFill>
@@ -7357,7 +8074,7 @@
                           <a:latin typeface="Helvetica-Bold"/>
                           <a:ea typeface="Helvetica-Bold"/>
                         </a:rPr>
-                        <a:t>September</a:t>
+                        <a:t>{{prev_month}}</a:t>
                       </a:r>
                       <a:endParaRPr lang="en-US" sz="2800" b="0" u="none" strike="noStrike">
                         <a:solidFill>
@@ -7401,11 +8118,15 @@
                 </a:tc>
                 <a:tc>
                   <a:txBody>
-                    <a:bodyPr lIns="45720" rIns="45720" anchor="t" anchorCtr="1">
+                    <a:bodyPr lIns="45720" rIns="45720" anchor="t">
                       <a:noAutofit/>
                     </a:bodyPr>
                     <a:p>
-                      <a:pPr algn="ctr"/>
+                      <a:pPr algn="ctr">
+                        <a:lnSpc>
+                          <a:spcPct val="100000"/>
+                        </a:lnSpc>
+                      </a:pPr>
                       <a:r>
                         <a:rPr lang="en-US" sz="2800" b="1" u="none" strike="noStrike">
                           <a:solidFill>
@@ -7416,7 +8137,7 @@
                           <a:latin typeface="Helvetica-Bold"/>
                           <a:ea typeface="Helvetica-Bold"/>
                         </a:rPr>
-                        <a:t>October</a:t>
+                        <a:t>{{month}}</a:t>
                       </a:r>
                       <a:endParaRPr lang="en-US" sz="2800" b="0" u="none" strike="noStrike">
                         <a:solidFill>
@@ -7462,7 +8183,7 @@
               <a:tr h="813240">
                 <a:tc>
                   <a:txBody>
-                    <a:bodyPr lIns="45720" rIns="45720" anchor="t" anchorCtr="1">
+                    <a:bodyPr lIns="45720" rIns="45720" anchor="t">
                       <a:noAutofit/>
                     </a:bodyPr>
                     <a:p>
@@ -7508,7 +8229,7 @@
                 </a:tc>
                 <a:tc>
                   <a:txBody>
-                    <a:bodyPr lIns="45720" rIns="45720" anchor="t" anchorCtr="1">
+                    <a:bodyPr lIns="45720" rIns="45720" anchor="t">
                       <a:noAutofit/>
                     </a:bodyPr>
                     <a:p>
@@ -7559,13 +8280,13 @@
       </p:graphicFrame>
       <p:graphicFrame>
         <p:nvGraphicFramePr>
-          <p:cNvPr id="60" name=""/>
+          <p:cNvPr id="61" name=""/>
           <p:cNvGraphicFramePr/>
           <p:nvPr/>
         </p:nvGraphicFramePr>
         <p:xfrm>
           <a:off x="4711320" y="1512360"/>
-          <a:ext cx="4141800" cy="1626120"/>
+          <a:ext cx="4141440" cy="1626480"/>
         </p:xfrm>
         <a:graphic>
           <a:graphicData uri="http://schemas.openxmlformats.org/drawingml/2006/table">
@@ -7578,11 +8299,15 @@
               <a:tr h="813240">
                 <a:tc>
                   <a:txBody>
-                    <a:bodyPr lIns="45720" rIns="45720" anchor="t" anchorCtr="1">
+                    <a:bodyPr lIns="45720" rIns="45720" anchor="t">
                       <a:noAutofit/>
                     </a:bodyPr>
                     <a:p>
-                      <a:pPr algn="ctr"/>
+                      <a:pPr algn="ctr">
+                        <a:lnSpc>
+                          <a:spcPct val="100000"/>
+                        </a:lnSpc>
+                      </a:pPr>
                       <a:r>
                         <a:rPr lang="en-US" sz="2800" b="1" u="none" strike="noStrike">
                           <a:solidFill>
@@ -7593,7 +8318,7 @@
                           <a:latin typeface="Helvetica-Bold"/>
                           <a:ea typeface="Helvetica-Bold"/>
                         </a:rPr>
-                        <a:t>September</a:t>
+                        <a:t>{{prev_month}}</a:t>
                       </a:r>
                       <a:endParaRPr lang="en-US" sz="2800" b="0" u="none" strike="noStrike">
                         <a:solidFill>
@@ -7637,11 +8362,15 @@
                 </a:tc>
                 <a:tc>
                   <a:txBody>
-                    <a:bodyPr lIns="45720" rIns="45720" anchor="t" anchorCtr="1">
+                    <a:bodyPr lIns="45720" rIns="45720" anchor="t">
                       <a:noAutofit/>
                     </a:bodyPr>
                     <a:p>
-                      <a:pPr algn="ctr"/>
+                      <a:pPr algn="ctr">
+                        <a:lnSpc>
+                          <a:spcPct val="100000"/>
+                        </a:lnSpc>
+                      </a:pPr>
                       <a:r>
                         <a:rPr lang="en-US" sz="2800" b="1" u="none" strike="noStrike">
                           <a:solidFill>
@@ -7652,7 +8381,7 @@
                           <a:latin typeface="Helvetica-Bold"/>
                           <a:ea typeface="Helvetica-Bold"/>
                         </a:rPr>
-                        <a:t>October</a:t>
+                        <a:t>{{month}}</a:t>
                       </a:r>
                       <a:endParaRPr lang="en-US" sz="2800" b="0" u="none" strike="noStrike">
                         <a:solidFill>
@@ -7698,7 +8427,7 @@
               <a:tr h="813240">
                 <a:tc>
                   <a:txBody>
-                    <a:bodyPr lIns="45720" rIns="45720" anchor="t" anchorCtr="1">
+                    <a:bodyPr lIns="45720" rIns="45720" anchor="t">
                       <a:noAutofit/>
                     </a:bodyPr>
                     <a:p>
@@ -7744,7 +8473,7 @@
                 </a:tc>
                 <a:tc>
                   <a:txBody>
-                    <a:bodyPr lIns="45720" rIns="45720" anchor="t" anchorCtr="1">
+                    <a:bodyPr lIns="45720" rIns="45720" anchor="t">
                       <a:noAutofit/>
                     </a:bodyPr>
                     <a:p>
@@ -7795,14 +8524,14 @@
       </p:graphicFrame>
       <p:sp>
         <p:nvSpPr>
-          <p:cNvPr id="61" name=""/>
-          <p:cNvSpPr txBox="1"/>
+          <p:cNvPr id="62" name=""/>
+          <p:cNvSpPr/>
           <p:nvPr/>
         </p:nvSpPr>
         <p:spPr>
           <a:xfrm>
             <a:off x="209880" y="1050120"/>
-            <a:ext cx="5028480" cy="450720"/>
+            <a:ext cx="5028120" cy="450360"/>
           </a:xfrm>
           <a:prstGeom prst="rect">
             <a:avLst/>
@@ -7812,11 +8541,22 @@
             <a:noFill/>
           </a:ln>
         </p:spPr>
+        <p:style>
+          <a:lnRef idx="0"/>
+          <a:fillRef idx="0"/>
+          <a:effectRef idx="0"/>
+          <a:fontRef idx="minor"/>
+        </p:style>
         <p:txBody>
           <a:bodyPr lIns="90000" rIns="90000" tIns="45000" bIns="45000" anchor="t">
-            <a:normAutofit/>
+            <a:normAutofit lnSpcReduction="9999"/>
           </a:bodyPr>
           <a:p>
+            <a:pPr>
+              <a:lnSpc>
+                <a:spcPct val="100000"/>
+              </a:lnSpc>
+            </a:pPr>
             <a:r>
               <a:rPr lang="en-US" sz="2400" b="0" u="none" spc="-99" strike="noStrike">
                 <a:solidFill>
@@ -7827,8 +8567,54 @@
                 <a:latin typeface="Arial"/>
                 <a:ea typeface="Arial"/>
               </a:rPr>
-              <a:t>Calls and Teams meetings</a:t>
+              <a:t>Calls and Teams meetings:</a:t>
             </a:r>
+            <a:endParaRPr lang="en-US" sz="2400" b="0" u="none" strike="noStrike">
+              <a:solidFill>
+                <a:srgbClr val="000000"/>
+              </a:solidFill>
+              <a:effectLst/>
+              <a:uFillTx/>
+              <a:latin typeface="Arial"/>
+            </a:endParaRPr>
+          </a:p>
+        </p:txBody>
+      </p:sp>
+      <p:sp>
+        <p:nvSpPr>
+          <p:cNvPr id="63" name=""/>
+          <p:cNvSpPr/>
+          <p:nvPr/>
+        </p:nvSpPr>
+        <p:spPr>
+          <a:xfrm>
+            <a:off x="4710960" y="1069560"/>
+            <a:ext cx="5028120" cy="450360"/>
+          </a:xfrm>
+          <a:prstGeom prst="rect">
+            <a:avLst/>
+          </a:prstGeom>
+          <a:noFill/>
+          <a:ln w="0">
+            <a:noFill/>
+          </a:ln>
+        </p:spPr>
+        <p:style>
+          <a:lnRef idx="0"/>
+          <a:fillRef idx="0"/>
+          <a:effectRef idx="0"/>
+          <a:fontRef idx="minor"/>
+        </p:style>
+        <p:txBody>
+          <a:bodyPr lIns="90000" rIns="90000" tIns="45000" bIns="45000" anchor="t">
+            <a:normAutofit lnSpcReduction="9999"/>
+          </a:bodyPr>
+          <a:p>
+            <a:pPr>
+              <a:lnSpc>
+                <a:spcPct val="100000"/>
+              </a:lnSpc>
+            </a:pPr>
             <a:r>
               <a:rPr lang="en-US" sz="2400" b="0" u="none" spc="-99" strike="noStrike">
                 <a:solidFill>
@@ -7839,66 +8625,7 @@
                 <a:latin typeface="Arial"/>
                 <a:ea typeface="Arial"/>
               </a:rPr>
-              <a:t>:</a:t>
-            </a:r>
-            <a:endParaRPr lang="en-US" sz="2400" b="0" u="none" strike="noStrike">
-              <a:solidFill>
-                <a:srgbClr val="000000"/>
-              </a:solidFill>
-              <a:effectLst/>
-              <a:uFillTx/>
-              <a:latin typeface="Arial"/>
-            </a:endParaRPr>
-          </a:p>
-        </p:txBody>
-      </p:sp>
-      <p:sp>
-        <p:nvSpPr>
-          <p:cNvPr id="62" name=""/>
-          <p:cNvSpPr txBox="1"/>
-          <p:nvPr/>
-        </p:nvSpPr>
-        <p:spPr>
-          <a:xfrm>
-            <a:off x="4710960" y="1069560"/>
-            <a:ext cx="5028480" cy="450720"/>
-          </a:xfrm>
-          <a:prstGeom prst="rect">
-            <a:avLst/>
-          </a:prstGeom>
-          <a:noFill/>
-          <a:ln w="0">
-            <a:noFill/>
-          </a:ln>
-        </p:spPr>
-        <p:txBody>
-          <a:bodyPr lIns="90000" rIns="90000" tIns="45000" bIns="45000" anchor="t">
-            <a:normAutofit/>
-          </a:bodyPr>
-          <a:p>
-            <a:r>
-              <a:rPr lang="en-US" sz="2400" b="0" u="none" spc="-99" strike="noStrike">
-                <a:solidFill>
-                  <a:srgbClr val="003248"/>
-                </a:solidFill>
-                <a:effectLst/>
-                <a:uFillTx/>
-                <a:latin typeface="Arial"/>
-                <a:ea typeface="Arial"/>
-              </a:rPr>
-              <a:t>Average per day</a:t>
-            </a:r>
-            <a:r>
-              <a:rPr lang="en-US" sz="2400" b="0" u="none" spc="-99" strike="noStrike">
-                <a:solidFill>
-                  <a:srgbClr val="003248"/>
-                </a:solidFill>
-                <a:effectLst/>
-                <a:uFillTx/>
-                <a:latin typeface="Arial"/>
-                <a:ea typeface="Arial"/>
-              </a:rPr>
-              <a:t>:</a:t>
+              <a:t>Average per day:</a:t>
             </a:r>
             <a:endParaRPr lang="en-US" sz="2400" b="0" u="none" strike="noStrike">
               <a:solidFill>
@@ -7913,13 +8640,13 @@
       </p:sp>
       <p:graphicFrame>
         <p:nvGraphicFramePr>
-          <p:cNvPr id="63" name=""/>
+          <p:cNvPr id="64" name=""/>
           <p:cNvGraphicFramePr/>
           <p:nvPr/>
         </p:nvGraphicFramePr>
         <p:xfrm>
           <a:off x="209880" y="3838320"/>
-          <a:ext cx="4063680" cy="2516040"/>
+          <a:ext cx="4063320" cy="2516040"/>
         </p:xfrm>
         <a:graphic>
           <a:graphicData uri="http://schemas.openxmlformats.org/drawingml/2006/table">
@@ -7932,10 +8659,15 @@
               <a:tr h="1257840">
                 <a:tc>
                   <a:txBody>
-                    <a:bodyPr lIns="7560" rIns="7560" tIns="7560" bIns="7560" anchor="b" anchorCtr="1">
+                    <a:bodyPr lIns="7560" rIns="7560" tIns="7560" bIns="7560" anchor="b">
                       <a:noAutofit/>
                     </a:bodyPr>
                     <a:p>
+                      <a:pPr>
+                        <a:lnSpc>
+                          <a:spcPct val="100000"/>
+                        </a:lnSpc>
+                      </a:pPr>
                       <a:r>
                         <a:rPr lang="en-US" sz="1100" b="1" u="none" strike="noStrike">
                           <a:solidFill>
@@ -7990,10 +8722,15 @@
                 </a:tc>
                 <a:tc>
                   <a:txBody>
-                    <a:bodyPr lIns="7560" rIns="7560" tIns="7560" bIns="7560" anchor="b" anchorCtr="1">
+                    <a:bodyPr lIns="7560" rIns="7560" tIns="7560" bIns="7560" anchor="b">
                       <a:noAutofit/>
                     </a:bodyPr>
                     <a:p>
+                      <a:pPr>
+                        <a:lnSpc>
+                          <a:spcPct val="100000"/>
+                        </a:lnSpc>
+                      </a:pPr>
                       <a:r>
                         <a:rPr lang="en-US" sz="1100" b="1" u="none" strike="noStrike">
                           <a:solidFill>
@@ -8050,10 +8787,15 @@
               <a:tr h="1258200">
                 <a:tc>
                   <a:txBody>
-                    <a:bodyPr lIns="7560" rIns="7560" tIns="7560" bIns="7560" anchor="b" anchorCtr="1">
+                    <a:bodyPr lIns="7560" rIns="7560" tIns="7560" bIns="7560" anchor="b">
                       <a:noAutofit/>
                     </a:bodyPr>
                     <a:p>
+                      <a:pPr>
+                        <a:lnSpc>
+                          <a:spcPct val="100000"/>
+                        </a:lnSpc>
+                      </a:pPr>
                       <a:r>
                         <a:rPr lang="en-US" sz="1100" b="0" u="none" strike="noStrike">
                           <a:solidFill>
@@ -8108,11 +8850,15 @@
                 </a:tc>
                 <a:tc>
                   <a:txBody>
-                    <a:bodyPr lIns="7560" rIns="7560" tIns="7560" bIns="7560" anchor="b" anchorCtr="1">
+                    <a:bodyPr lIns="7560" rIns="7560" tIns="7560" bIns="7560" anchor="b">
                       <a:noAutofit/>
                     </a:bodyPr>
                     <a:p>
-                      <a:pPr algn="ctr"/>
+                      <a:pPr algn="ctr">
+                        <a:lnSpc>
+                          <a:spcPct val="100000"/>
+                        </a:lnSpc>
+                      </a:pPr>
                       <a:r>
                         <a:rPr lang="en-US" sz="1100" b="0" u="none" strike="noStrike">
                           <a:solidFill>
@@ -8395,7 +9141,7 @@
 </a:theme>
 </file>
 
-<file path=ppt/theme/theme4.xml><?xml version="1.0" encoding="utf-8"?>
+<file path=ppt/theme/theme5.xml><?xml version="1.0" encoding="utf-8"?>
 <a:theme xmlns:a="http://schemas.openxmlformats.org/drawingml/2006/main" xmlns:r="http://schemas.openxmlformats.org/officeDocument/2006/relationships" name="Office Theme">
   <a:themeElements>
     <a:clrScheme name="LibreOffice">

--- a/templates/report_template.pptx
+++ b/templates/report_template.pptx
@@ -81,7 +81,40 @@
                 <a:uFillTx/>
                 <a:latin typeface="Arial"/>
               </a:rPr>
-              <a:t>Click to move the slide</a:t>
+              <a:t>Click to </a:t>
+            </a:r>
+            <a:r>
+              <a:rPr lang="en-US" sz="4400" b="0" u="none" strike="noStrike">
+                <a:solidFill>
+                  <a:srgbClr val="000000"/>
+                </a:solidFill>
+                <a:effectLst/>
+                <a:uFillTx/>
+                <a:latin typeface="Arial"/>
+              </a:rPr>
+              <a:t>move </a:t>
+            </a:r>
+            <a:r>
+              <a:rPr lang="en-US" sz="4400" b="0" u="none" strike="noStrike">
+                <a:solidFill>
+                  <a:srgbClr val="000000"/>
+                </a:solidFill>
+                <a:effectLst/>
+                <a:uFillTx/>
+                <a:latin typeface="Arial"/>
+              </a:rPr>
+              <a:t>the </a:t>
+            </a:r>
+            <a:r>
+              <a:rPr lang="en-US" sz="4400" b="0" u="none" strike="noStrike">
+                <a:solidFill>
+                  <a:srgbClr val="000000"/>
+                </a:solidFill>
+                <a:effectLst/>
+                <a:uFillTx/>
+                <a:latin typeface="Arial"/>
+              </a:rPr>
+              <a:t>slide</a:t>
             </a:r>
             <a:endParaRPr lang="en-US" sz="4400" b="0" u="none" strike="noStrike">
               <a:solidFill>
@@ -134,7 +167,18 @@
                 <a:uFillTx/>
                 <a:latin typeface="Arial"/>
               </a:rPr>
-              <a:t>Click to edit the notes format</a:t>
+              <a:t>Click to edit the </a:t>
+            </a:r>
+            <a:r>
+              <a:rPr lang="en-US" sz="2000" b="0" u="none" strike="noStrike">
+                <a:solidFill>
+                  <a:srgbClr val="000000"/>
+                </a:solidFill>
+                <a:effectLst/>
+                <a:uFillTx/>
+                <a:latin typeface="Arial"/>
+              </a:rPr>
+              <a:t>notes format</a:t>
             </a:r>
             <a:endParaRPr lang="en-US" sz="2000" b="0" u="none" strike="noStrike">
               <a:solidFill>
@@ -376,7 +420,7 @@
             <a:pPr indent="0" algn="r">
               <a:buNone/>
             </a:pPr>
-            <a:fld id="{F12EC7C9-6571-4807-BE44-414124355211}" type="slidenum">
+            <a:fld id="{5A8136ED-12E1-4A11-ACB4-DA8539CE3C0B}" type="slidenum">
               <a:rPr lang="en-US" sz="1400" b="0" u="none" strike="noStrike">
                 <a:solidFill>
                   <a:srgbClr val="000000"/>
@@ -434,7 +478,7 @@
         <p:spPr>
           <a:xfrm>
             <a:off x="1371600" y="768240"/>
-            <a:ext cx="5028840" cy="3767040"/>
+            <a:ext cx="5027760" cy="3765960"/>
           </a:xfrm>
           <a:prstGeom prst="rect">
             <a:avLst/>
@@ -457,7 +501,7 @@
         <p:spPr>
           <a:xfrm>
             <a:off x="777240" y="4773240"/>
-            <a:ext cx="6217560" cy="4526640"/>
+            <a:ext cx="6216480" cy="4527720"/>
           </a:xfrm>
           <a:prstGeom prst="rect">
             <a:avLst/>
@@ -607,7 +651,7 @@
         <p:spPr>
           <a:xfrm>
             <a:off x="1371600" y="768240"/>
-            <a:ext cx="5028840" cy="3767040"/>
+            <a:ext cx="5027760" cy="3765960"/>
           </a:xfrm>
           <a:prstGeom prst="rect">
             <a:avLst/>
@@ -630,7 +674,7 @@
         <p:spPr>
           <a:xfrm>
             <a:off x="777240" y="4773240"/>
-            <a:ext cx="6217560" cy="4526640"/>
+            <a:ext cx="6216480" cy="4527720"/>
           </a:xfrm>
           <a:prstGeom prst="rect">
             <a:avLst/>
@@ -716,7 +760,7 @@
         <p:spPr>
           <a:xfrm>
             <a:off x="442800" y="4263480"/>
-            <a:ext cx="4289040" cy="1076760"/>
+            <a:ext cx="4287960" cy="1075680"/>
           </a:xfrm>
           <a:prstGeom prst="rect">
             <a:avLst/>
@@ -805,7 +849,7 @@
         <p:spPr>
           <a:xfrm>
             <a:off x="457200" y="273600"/>
-            <a:ext cx="8229240" cy="1144800"/>
+            <a:ext cx="8228160" cy="1143720"/>
           </a:xfrm>
           <a:prstGeom prst="rect">
             <a:avLst/>
@@ -821,7 +865,13 @@
           </a:bodyPr>
           <a:p>
             <a:pPr indent="0" algn="ctr">
+              <a:lnSpc>
+                <a:spcPct val="100000"/>
+              </a:lnSpc>
               <a:buNone/>
+              <a:tabLst>
+                <a:tab algn="l" pos="0"/>
+              </a:tabLst>
             </a:pPr>
             <a:r>
               <a:rPr lang="en-US" sz="4400" b="0" u="none" strike="noStrike">
@@ -832,7 +882,29 @@
                 <a:uFillTx/>
                 <a:latin typeface="Arial"/>
               </a:rPr>
-              <a:t>Click to edit the title text format</a:t>
+              <a:t>Click to edit </a:t>
+            </a:r>
+            <a:r>
+              <a:rPr lang="en-US" sz="4400" b="0" u="none" strike="noStrike">
+                <a:solidFill>
+                  <a:srgbClr val="000000"/>
+                </a:solidFill>
+                <a:effectLst/>
+                <a:uFillTx/>
+                <a:latin typeface="Arial"/>
+              </a:rPr>
+              <a:t>the title text </a:t>
+            </a:r>
+            <a:r>
+              <a:rPr lang="en-US" sz="4400" b="0" u="none" strike="noStrike">
+                <a:solidFill>
+                  <a:srgbClr val="000000"/>
+                </a:solidFill>
+                <a:effectLst/>
+                <a:uFillTx/>
+                <a:latin typeface="Arial"/>
+              </a:rPr>
+              <a:t>format</a:t>
             </a:r>
             <a:endParaRPr lang="en-US" sz="4400" b="0" u="none" strike="noStrike">
               <a:solidFill>
@@ -858,7 +930,7 @@
         <p:spPr>
           <a:xfrm>
             <a:off x="457200" y="1604520"/>
-            <a:ext cx="8229240" cy="3977280"/>
+            <a:ext cx="8228160" cy="3976200"/>
           </a:xfrm>
           <a:prstGeom prst="rect">
             <a:avLst/>
@@ -874,6 +946,9 @@
           </a:bodyPr>
           <a:p>
             <a:pPr marL="432000" indent="-324000">
+              <a:lnSpc>
+                <a:spcPct val="100000"/>
+              </a:lnSpc>
               <a:spcBef>
                 <a:spcPts val="1417"/>
               </a:spcBef>
@@ -906,6 +981,9 @@
           </a:p>
           <a:p>
             <a:pPr marL="864000" lvl="1" indent="-324000">
+              <a:lnSpc>
+                <a:spcPct val="100000"/>
+              </a:lnSpc>
               <a:spcBef>
                 <a:spcPts val="1134"/>
               </a:spcBef>
@@ -938,6 +1016,9 @@
           </a:p>
           <a:p>
             <a:pPr marL="1296000" lvl="2" indent="-288000">
+              <a:lnSpc>
+                <a:spcPct val="100000"/>
+              </a:lnSpc>
               <a:spcBef>
                 <a:spcPts val="850"/>
               </a:spcBef>
@@ -970,6 +1051,9 @@
           </a:p>
           <a:p>
             <a:pPr marL="1728000" lvl="3" indent="-216000">
+              <a:lnSpc>
+                <a:spcPct val="100000"/>
+              </a:lnSpc>
               <a:spcBef>
                 <a:spcPts val="567"/>
               </a:spcBef>
@@ -1002,6 +1086,9 @@
           </a:p>
           <a:p>
             <a:pPr marL="2160000" lvl="4" indent="-216000">
+              <a:lnSpc>
+                <a:spcPct val="100000"/>
+              </a:lnSpc>
               <a:spcBef>
                 <a:spcPts val="283"/>
               </a:spcBef>
@@ -1034,6 +1121,9 @@
           </a:p>
           <a:p>
             <a:pPr marL="2592000" lvl="5" indent="-216000">
+              <a:lnSpc>
+                <a:spcPct val="100000"/>
+              </a:lnSpc>
               <a:spcBef>
                 <a:spcPts val="283"/>
               </a:spcBef>
@@ -1066,6 +1156,9 @@
           </a:p>
           <a:p>
             <a:pPr marL="3024000" lvl="6" indent="-216000">
+              <a:lnSpc>
+                <a:spcPct val="100000"/>
+              </a:lnSpc>
               <a:spcBef>
                 <a:spcPts val="283"/>
               </a:spcBef>
@@ -1137,7 +1230,7 @@
         <p:spPr>
           <a:xfrm>
             <a:off x="442800" y="4263480"/>
-            <a:ext cx="4289040" cy="1076760"/>
+            <a:ext cx="4287960" cy="1075680"/>
           </a:xfrm>
           <a:prstGeom prst="rect">
             <a:avLst/>
@@ -1226,7 +1319,7 @@
         <p:spPr>
           <a:xfrm>
             <a:off x="457200" y="708480"/>
-            <a:ext cx="8228880" cy="274680"/>
+            <a:ext cx="8227800" cy="274680"/>
           </a:xfrm>
           <a:prstGeom prst="rect">
             <a:avLst/>
@@ -1242,7 +1335,13 @@
           </a:bodyPr>
           <a:p>
             <a:pPr indent="0">
+              <a:lnSpc>
+                <a:spcPct val="100000"/>
+              </a:lnSpc>
               <a:buNone/>
+              <a:tabLst>
+                <a:tab algn="l" pos="0"/>
+              </a:tabLst>
             </a:pPr>
             <a:r>
               <a:rPr lang="en-US" sz="1800" b="0" u="none" strike="noStrike">
@@ -1253,7 +1352,18 @@
                 <a:uFillTx/>
                 <a:latin typeface="Arial"/>
               </a:rPr>
-              <a:t>Click to edit the title text format</a:t>
+              <a:t>Click to edit the title text </a:t>
+            </a:r>
+            <a:r>
+              <a:rPr lang="en-US" sz="1800" b="0" u="none" strike="noStrike">
+                <a:solidFill>
+                  <a:srgbClr val="000000"/>
+                </a:solidFill>
+                <a:effectLst/>
+                <a:uFillTx/>
+                <a:latin typeface="Arial"/>
+              </a:rPr>
+              <a:t>format</a:t>
             </a:r>
             <a:endParaRPr lang="en-US" sz="1800" b="0" u="none" strike="noStrike">
               <a:solidFill>
@@ -1279,7 +1389,7 @@
         <p:spPr>
           <a:xfrm>
             <a:off x="457200" y="1604520"/>
-            <a:ext cx="8229240" cy="3977280"/>
+            <a:ext cx="8228160" cy="3976200"/>
           </a:xfrm>
           <a:prstGeom prst="rect">
             <a:avLst/>
@@ -1295,6 +1405,9 @@
           </a:bodyPr>
           <a:p>
             <a:pPr marL="432000" indent="-324000">
+              <a:lnSpc>
+                <a:spcPct val="100000"/>
+              </a:lnSpc>
               <a:spcBef>
                 <a:spcPts val="1417"/>
               </a:spcBef>
@@ -1327,6 +1440,9 @@
           </a:p>
           <a:p>
             <a:pPr marL="864000" lvl="1" indent="-324000">
+              <a:lnSpc>
+                <a:spcPct val="100000"/>
+              </a:lnSpc>
               <a:spcBef>
                 <a:spcPts val="1134"/>
               </a:spcBef>
@@ -1359,6 +1475,9 @@
           </a:p>
           <a:p>
             <a:pPr marL="1296000" lvl="2" indent="-288000">
+              <a:lnSpc>
+                <a:spcPct val="100000"/>
+              </a:lnSpc>
               <a:spcBef>
                 <a:spcPts val="850"/>
               </a:spcBef>
@@ -1391,6 +1510,9 @@
           </a:p>
           <a:p>
             <a:pPr marL="1728000" lvl="3" indent="-216000">
+              <a:lnSpc>
+                <a:spcPct val="100000"/>
+              </a:lnSpc>
               <a:spcBef>
                 <a:spcPts val="567"/>
               </a:spcBef>
@@ -1423,6 +1545,9 @@
           </a:p>
           <a:p>
             <a:pPr marL="2160000" lvl="4" indent="-216000">
+              <a:lnSpc>
+                <a:spcPct val="100000"/>
+              </a:lnSpc>
               <a:spcBef>
                 <a:spcPts val="283"/>
               </a:spcBef>
@@ -1455,6 +1580,9 @@
           </a:p>
           <a:p>
             <a:pPr marL="2592000" lvl="5" indent="-216000">
+              <a:lnSpc>
+                <a:spcPct val="100000"/>
+              </a:lnSpc>
               <a:spcBef>
                 <a:spcPts val="283"/>
               </a:spcBef>
@@ -1487,6 +1615,9 @@
           </a:p>
           <a:p>
             <a:pPr marL="3024000" lvl="6" indent="-216000">
+              <a:lnSpc>
+                <a:spcPct val="100000"/>
+              </a:lnSpc>
               <a:spcBef>
                 <a:spcPts val="283"/>
               </a:spcBef>
@@ -1557,7 +1688,7 @@
         <p:spPr>
           <a:xfrm>
             <a:off x="4187880" y="6642000"/>
-            <a:ext cx="796680" cy="342720"/>
+            <a:ext cx="795600" cy="341640"/>
           </a:xfrm>
           <a:prstGeom prst="rect">
             <a:avLst/>
@@ -1619,7 +1750,7 @@
         <p:spPr>
           <a:xfrm>
             <a:off x="457200" y="273600"/>
-            <a:ext cx="8228880" cy="1144440"/>
+            <a:ext cx="8227800" cy="1143360"/>
           </a:xfrm>
           <a:prstGeom prst="rect">
             <a:avLst/>
@@ -1678,7 +1809,7 @@
         <p:spPr>
           <a:xfrm>
             <a:off x="457200" y="1604520"/>
-            <a:ext cx="8228880" cy="3976920"/>
+            <a:ext cx="8227800" cy="3975840"/>
           </a:xfrm>
           <a:prstGeom prst="rect">
             <a:avLst/>
@@ -1977,7 +2108,7 @@
         <p:spPr>
           <a:xfrm>
             <a:off x="4187880" y="6642000"/>
-            <a:ext cx="796680" cy="342720"/>
+            <a:ext cx="795600" cy="341640"/>
           </a:xfrm>
           <a:prstGeom prst="rect">
             <a:avLst/>
@@ -2039,7 +2170,7 @@
         <p:spPr>
           <a:xfrm>
             <a:off x="2187720" y="2711520"/>
-            <a:ext cx="4967640" cy="1484280"/>
+            <a:ext cx="4966560" cy="1483200"/>
           </a:xfrm>
           <a:prstGeom prst="rect">
             <a:avLst/>
@@ -2063,7 +2194,7 @@
         <p:spPr>
           <a:xfrm>
             <a:off x="3478320" y="3980160"/>
-            <a:ext cx="3671640" cy="212760"/>
+            <a:ext cx="3670560" cy="211680"/>
           </a:xfrm>
           <a:prstGeom prst="rect">
             <a:avLst/>
@@ -2087,7 +2218,7 @@
         <p:spPr>
           <a:xfrm>
             <a:off x="457200" y="273600"/>
-            <a:ext cx="8228880" cy="1144440"/>
+            <a:ext cx="8227800" cy="1143360"/>
           </a:xfrm>
           <a:prstGeom prst="rect">
             <a:avLst/>
@@ -2120,7 +2251,40 @@
                 <a:uFillTx/>
                 <a:latin typeface="Arial"/>
               </a:rPr>
-              <a:t>Click to edit the title text format</a:t>
+              <a:t>Click to </a:t>
+            </a:r>
+            <a:r>
+              <a:rPr lang="en-US" sz="4400" b="0" u="none" strike="noStrike">
+                <a:solidFill>
+                  <a:srgbClr val="000000"/>
+                </a:solidFill>
+                <a:effectLst/>
+                <a:uFillTx/>
+                <a:latin typeface="Arial"/>
+              </a:rPr>
+              <a:t>edit the </a:t>
+            </a:r>
+            <a:r>
+              <a:rPr lang="en-US" sz="4400" b="0" u="none" strike="noStrike">
+                <a:solidFill>
+                  <a:srgbClr val="000000"/>
+                </a:solidFill>
+                <a:effectLst/>
+                <a:uFillTx/>
+                <a:latin typeface="Arial"/>
+              </a:rPr>
+              <a:t>title text </a:t>
+            </a:r>
+            <a:r>
+              <a:rPr lang="en-US" sz="4400" b="0" u="none" strike="noStrike">
+                <a:solidFill>
+                  <a:srgbClr val="000000"/>
+                </a:solidFill>
+                <a:effectLst/>
+                <a:uFillTx/>
+                <a:latin typeface="Arial"/>
+              </a:rPr>
+              <a:t>format</a:t>
             </a:r>
             <a:endParaRPr lang="en-US" sz="4400" b="0" u="none" strike="noStrike">
               <a:solidFill>
@@ -2146,7 +2310,7 @@
         <p:spPr>
           <a:xfrm>
             <a:off x="457200" y="1604520"/>
-            <a:ext cx="8228880" cy="3976920"/>
+            <a:ext cx="8227800" cy="3975840"/>
           </a:xfrm>
           <a:prstGeom prst="rect">
             <a:avLst/>
@@ -2500,7 +2664,7 @@
         <p:spPr>
           <a:xfrm>
             <a:off x="395280" y="2314440"/>
-            <a:ext cx="5198400" cy="1340640"/>
+            <a:ext cx="5197320" cy="1339560"/>
           </a:xfrm>
           <a:prstGeom prst="rect">
             <a:avLst/>
@@ -2596,7 +2760,7 @@
         <p:spPr>
           <a:xfrm>
             <a:off x="498240" y="1230840"/>
-            <a:ext cx="8146800" cy="2475720"/>
+            <a:ext cx="8145720" cy="2474640"/>
           </a:xfrm>
           <a:prstGeom prst="rect">
             <a:avLst/>
@@ -2642,6 +2806,7 @@
                 <a:effectLst/>
                 <a:uFillTx/>
                 <a:latin typeface="Arial"/>
+                <a:ea typeface="DejaVu Sans"/>
               </a:rPr>
               <a:t> </a:t>
             </a:r>
@@ -2710,7 +2875,7 @@
         <p:spPr>
           <a:xfrm>
             <a:off x="187200" y="6559200"/>
-            <a:ext cx="8384760" cy="298440"/>
+            <a:ext cx="8383680" cy="297360"/>
           </a:xfrm>
           <a:prstGeom prst="rect">
             <a:avLst/>
@@ -2772,7 +2937,7 @@
         <p:spPr>
           <a:xfrm>
             <a:off x="7078320" y="6127560"/>
-            <a:ext cx="1766160" cy="580680"/>
+            <a:ext cx="1765080" cy="579600"/>
           </a:xfrm>
           <a:prstGeom prst="rect">
             <a:avLst/>
@@ -2796,7 +2961,7 @@
         <p:spPr>
           <a:xfrm>
             <a:off x="1268640" y="2975400"/>
-            <a:ext cx="6606360" cy="2651400"/>
+            <a:ext cx="6605280" cy="2650320"/>
           </a:xfrm>
           <a:prstGeom prst="rect">
             <a:avLst/>
@@ -2891,7 +3056,7 @@
         <p:spPr>
           <a:xfrm>
             <a:off x="395280" y="2314440"/>
-            <a:ext cx="5198400" cy="1340640"/>
+            <a:ext cx="5197320" cy="1339560"/>
           </a:xfrm>
           <a:prstGeom prst="rect">
             <a:avLst/>
@@ -2986,7 +3151,7 @@
         <p:spPr>
           <a:xfrm>
             <a:off x="459360" y="188640"/>
-            <a:ext cx="8282880" cy="1299240"/>
+            <a:ext cx="8281800" cy="1298160"/>
           </a:xfrm>
           <a:prstGeom prst="rect">
             <a:avLst/>
@@ -3057,7 +3222,7 @@
         <p:spPr>
           <a:xfrm>
             <a:off x="4893480" y="1094040"/>
-            <a:ext cx="3713040" cy="2561040"/>
+            <a:ext cx="3711960" cy="2559960"/>
           </a:xfrm>
           <a:prstGeom prst="rect">
             <a:avLst/>
@@ -3133,7 +3298,7 @@
         <p:spPr>
           <a:xfrm>
             <a:off x="187200" y="6559200"/>
-            <a:ext cx="8384760" cy="298440"/>
+            <a:ext cx="8383680" cy="297360"/>
           </a:xfrm>
           <a:prstGeom prst="rect">
             <a:avLst/>
@@ -3195,7 +3360,7 @@
         <p:spPr>
           <a:xfrm>
             <a:off x="7078320" y="6127560"/>
-            <a:ext cx="1766160" cy="580680"/>
+            <a:ext cx="1765080" cy="579600"/>
           </a:xfrm>
           <a:prstGeom prst="rect">
             <a:avLst/>
@@ -3771,7 +3936,7 @@
         <p:spPr>
           <a:xfrm>
             <a:off x="459360" y="1094040"/>
-            <a:ext cx="4258800" cy="393840"/>
+            <a:ext cx="4257720" cy="392760"/>
           </a:xfrm>
           <a:prstGeom prst="rect">
             <a:avLst/>
@@ -3828,8 +3993,8 @@
         </p:nvSpPr>
         <p:spPr>
           <a:xfrm>
-            <a:off x="459360" y="3741120"/>
-            <a:ext cx="4258800" cy="564840"/>
+            <a:off x="459360" y="4464720"/>
+            <a:ext cx="4257720" cy="563760"/>
           </a:xfrm>
           <a:prstGeom prst="rect">
             <a:avLst/>
@@ -3885,21 +4050,21 @@
           <p:nvPr/>
         </p:nvGraphicFramePr>
         <p:xfrm>
-          <a:off x="459360" y="4087080"/>
-          <a:ext cx="5875920" cy="1371240"/>
+          <a:off x="464760" y="4848840"/>
+          <a:ext cx="5879160" cy="534240"/>
         </p:xfrm>
         <a:graphic>
           <a:graphicData uri="http://schemas.openxmlformats.org/drawingml/2006/table">
             <a:tbl>
               <a:tblPr/>
               <a:tblGrid>
-                <a:gridCol w="5202720"/>
-                <a:gridCol w="673560"/>
+                <a:gridCol w="5205240"/>
+                <a:gridCol w="674280"/>
               </a:tblGrid>
-              <a:tr h="670680">
+              <a:tr h="0">
                 <a:tc>
                   <a:txBody>
-                    <a:bodyPr lIns="7560" rIns="7560" tIns="7560" bIns="7560" anchor="ctr">
+                    <a:bodyPr lIns="7560" rIns="7560" tIns="7560" bIns="7560" anchor="b">
                       <a:noAutofit/>
                     </a:bodyPr>
                     <a:p>
@@ -3909,14 +4074,13 @@
                         </a:lnSpc>
                       </a:pPr>
                       <a:r>
-                        <a:rPr lang="en-US" sz="1100" b="0" u="none" strike="noStrike">
+                        <a:rPr lang="en-US" sz="1100" b="1" u="none" strike="noStrike">
                           <a:solidFill>
-                            <a:srgbClr val="003248"/>
+                            <a:srgbClr val="000000"/>
                           </a:solidFill>
                           <a:effectLst/>
                           <a:uFillTx/>
                           <a:latin typeface="Arial"/>
-                          <a:ea typeface="Arial"/>
                         </a:rPr>
                         <a:t>Support Category</a:t>
                       </a:r>
@@ -3930,7 +4094,7 @@
                       </a:endParaRPr>
                     </a:p>
                   </a:txBody>
-                  <a:tcPr anchor="ctr" marL="7560" marR="7560" marT="7560" marB="7560">
+                  <a:tcPr anchor="b" marL="7560" marR="7560" marT="7560" marB="7560">
                     <a:lnL w="720">
                       <a:solidFill>
                         <a:srgbClr val="000000"/>
@@ -3962,7 +4126,7 @@
                 </a:tc>
                 <a:tc>
                   <a:txBody>
-                    <a:bodyPr lIns="7560" rIns="7560" tIns="7560" bIns="7560" anchor="ctr">
+                    <a:bodyPr lIns="7560" rIns="7560" tIns="7560" bIns="7560" anchor="b">
                       <a:noAutofit/>
                     </a:bodyPr>
                     <a:p>
@@ -3972,14 +4136,13 @@
                         </a:lnSpc>
                       </a:pPr>
                       <a:r>
-                        <a:rPr lang="en-US" sz="1100" b="0" u="none" strike="noStrike">
+                        <a:rPr lang="en-US" sz="1100" b="1" u="none" strike="noStrike">
                           <a:solidFill>
-                            <a:srgbClr val="003248"/>
+                            <a:srgbClr val="000000"/>
                           </a:solidFill>
                           <a:effectLst/>
                           <a:uFillTx/>
                           <a:latin typeface="Arial"/>
-                          <a:ea typeface="Arial"/>
                         </a:rPr>
                         <a:t>Count</a:t>
                       </a:r>
@@ -3993,7 +4156,7 @@
                       </a:endParaRPr>
                     </a:p>
                   </a:txBody>
-                  <a:tcPr anchor="ctr" marL="7560" marR="7560" marT="7560" marB="7560">
+                  <a:tcPr anchor="b" marL="7560" marR="7560" marT="7560" marB="7560">
                     <a:lnL w="720">
                       <a:solidFill>
                         <a:srgbClr val="000000"/>
@@ -4024,10 +4187,10 @@
                   </a:tcPr>
                 </a:tc>
               </a:tr>
-              <a:tr h="700560">
+              <a:tr h="0">
                 <a:tc>
                   <a:txBody>
-                    <a:bodyPr lIns="7560" rIns="7560" tIns="7560" bIns="7560" anchor="ctr">
+                    <a:bodyPr lIns="7560" rIns="7560" tIns="7560" bIns="7560" anchor="b">
                       <a:noAutofit/>
                     </a:bodyPr>
                     <a:p>
@@ -4058,7 +4221,7 @@
                       </a:endParaRPr>
                     </a:p>
                   </a:txBody>
-                  <a:tcPr anchor="ctr" marL="7560" marR="7560" marT="7560" marB="7560">
+                  <a:tcPr anchor="b" marL="7560" marR="7560" marT="7560" marB="7560">
                     <a:lnL w="720">
                       <a:solidFill>
                         <a:srgbClr val="000000"/>
@@ -4090,7 +4253,7 @@
                 </a:tc>
                 <a:tc>
                   <a:txBody>
-                    <a:bodyPr lIns="7560" rIns="7560" tIns="7560" bIns="7560" anchor="ctr">
+                    <a:bodyPr lIns="7560" rIns="7560" tIns="7560" bIns="7560" anchor="b">
                       <a:noAutofit/>
                     </a:bodyPr>
                     <a:p>
@@ -4106,8 +4269,7 @@
                           </a:solidFill>
                           <a:effectLst/>
                           <a:uFillTx/>
-                          <a:latin typeface="Calibri"/>
-                          <a:ea typeface="Calibri"/>
+                          <a:latin typeface="Arial"/>
                         </a:rPr>
                         <a:t>{{re_cat_count}}</a:t>
                       </a:r>
@@ -4121,7 +4283,7 @@
                       </a:endParaRPr>
                     </a:p>
                   </a:txBody>
-                  <a:tcPr anchor="ctr" marL="7560" marR="7560" marT="7560" marB="7560">
+                  <a:tcPr anchor="b" marL="7560" marR="7560" marT="7560" marB="7560">
                     <a:lnL w="720">
                       <a:solidFill>
                         <a:srgbClr val="000000"/>
@@ -4202,7 +4364,7 @@
         <p:spPr>
           <a:xfrm>
             <a:off x="459360" y="188640"/>
-            <a:ext cx="8282880" cy="892800"/>
+            <a:ext cx="8281800" cy="891720"/>
           </a:xfrm>
           <a:prstGeom prst="rect">
             <a:avLst/>
@@ -4273,7 +4435,7 @@
         <p:spPr>
           <a:xfrm>
             <a:off x="187200" y="6559200"/>
-            <a:ext cx="8384760" cy="298440"/>
+            <a:ext cx="8383680" cy="297360"/>
           </a:xfrm>
           <a:prstGeom prst="rect">
             <a:avLst/>
@@ -4331,15 +4493,15 @@
         <p:spPr>
           <a:xfrm>
             <a:off x="4937760" y="1361880"/>
-            <a:ext cx="2466000" cy="1420560"/>
+            <a:ext cx="2464920" cy="1419480"/>
           </a:xfrm>
           <a:custGeom>
             <a:avLst/>
             <a:gdLst>
-              <a:gd name="textAreaLeft" fmla="*/ 0 w 2466000"/>
-              <a:gd name="textAreaRight" fmla="*/ 2466360 w 2466000"/>
-              <a:gd name="textAreaTop" fmla="*/ 0 h 1420560"/>
-              <a:gd name="textAreaBottom" fmla="*/ 1420920 h 1420560"/>
+              <a:gd name="textAreaLeft" fmla="*/ 0 w 2464920"/>
+              <a:gd name="textAreaRight" fmla="*/ 2466360 w 2464920"/>
+              <a:gd name="textAreaTop" fmla="*/ 0 h 1419480"/>
+              <a:gd name="textAreaBottom" fmla="*/ 1420920 h 1419480"/>
             </a:gdLst>
             <a:ahLst/>
             <a:cxnLst/>
@@ -4398,6 +4560,7 @@
               <a:effectLst/>
               <a:uFillTx/>
               <a:latin typeface="Arial"/>
+              <a:ea typeface="DejaVu Sans"/>
             </a:endParaRPr>
           </a:p>
         </p:txBody>
@@ -4415,7 +4578,7 @@
         <p:spPr>
           <a:xfrm>
             <a:off x="7078320" y="6127560"/>
-            <a:ext cx="1766160" cy="580680"/>
+            <a:ext cx="1765080" cy="579600"/>
           </a:xfrm>
           <a:prstGeom prst="rect">
             <a:avLst/>
@@ -4435,15 +4598,15 @@
         <p:spPr>
           <a:xfrm>
             <a:off x="4157640" y="3429000"/>
-            <a:ext cx="1767960" cy="411480"/>
+            <a:ext cx="1766880" cy="410400"/>
           </a:xfrm>
           <a:custGeom>
             <a:avLst/>
             <a:gdLst>
-              <a:gd name="textAreaLeft" fmla="*/ 0 w 1767960"/>
-              <a:gd name="textAreaRight" fmla="*/ 1768320 w 1767960"/>
-              <a:gd name="textAreaTop" fmla="*/ 0 h 411480"/>
-              <a:gd name="textAreaBottom" fmla="*/ 411840 h 411480"/>
+              <a:gd name="textAreaLeft" fmla="*/ 0 w 1766880"/>
+              <a:gd name="textAreaRight" fmla="*/ 1768320 w 1766880"/>
+              <a:gd name="textAreaTop" fmla="*/ 0 h 410400"/>
+              <a:gd name="textAreaBottom" fmla="*/ 411840 h 410400"/>
             </a:gdLst>
             <a:ahLst/>
             <a:cxnLst/>
@@ -4502,6 +4665,7 @@
               <a:effectLst/>
               <a:uFillTx/>
               <a:latin typeface="Arial"/>
+              <a:ea typeface="DejaVu Sans"/>
             </a:endParaRPr>
           </a:p>
         </p:txBody>
@@ -4527,7 +4691,7 @@
                 <a:gridCol w="1423800"/>
               </a:tblGrid>
               <a:tr h="1792800">
-                <a:tc>
+                <a:tc gridSpan="2">
                   <a:txBody>
                     <a:bodyPr lIns="45720" rIns="45720" anchor="t">
                       <a:noAutofit/>
@@ -4590,7 +4754,7 @@
                     </a:solidFill>
                   </a:tcPr>
                 </a:tc>
-                <a:tc>
+                <a:tc hMerge="1">
                   <a:txBody>
                     <a:bodyPr lIns="45720" rIns="45720" anchor="t">
                       <a:noAutofit/>
@@ -4636,7 +4800,7 @@
                     </a:solidFill>
                   </a:tcPr>
                 </a:tc>
-                <a:tc>
+                <a:tc gridSpan="2">
                   <a:txBody>
                     <a:bodyPr lIns="45720" rIns="45720" anchor="t">
                       <a:noAutofit/>
@@ -4699,7 +4863,7 @@
                     </a:solidFill>
                   </a:tcPr>
                 </a:tc>
-                <a:tc>
+                <a:tc hMerge="1">
                   <a:txBody>
                     <a:bodyPr lIns="45720" rIns="45720" anchor="t">
                       <a:noAutofit/>
@@ -5305,7 +5469,7 @@
         <p:spPr>
           <a:xfrm>
             <a:off x="395280" y="2314440"/>
-            <a:ext cx="5198400" cy="1340640"/>
+            <a:ext cx="5197320" cy="1339560"/>
           </a:xfrm>
           <a:prstGeom prst="rect">
             <a:avLst/>
@@ -5400,7 +5564,7 @@
         <p:spPr>
           <a:xfrm>
             <a:off x="459360" y="188640"/>
-            <a:ext cx="8282880" cy="1299240"/>
+            <a:ext cx="8281800" cy="1298160"/>
           </a:xfrm>
           <a:prstGeom prst="rect">
             <a:avLst/>
@@ -5471,7 +5635,7 @@
         <p:spPr>
           <a:xfrm>
             <a:off x="5029560" y="1094040"/>
-            <a:ext cx="3713040" cy="2561040"/>
+            <a:ext cx="3711960" cy="2559960"/>
           </a:xfrm>
           <a:prstGeom prst="rect">
             <a:avLst/>
@@ -5547,7 +5711,7 @@
         <p:spPr>
           <a:xfrm>
             <a:off x="187200" y="6559200"/>
-            <a:ext cx="8384760" cy="298440"/>
+            <a:ext cx="8383680" cy="297360"/>
           </a:xfrm>
           <a:prstGeom prst="rect">
             <a:avLst/>
@@ -5609,7 +5773,7 @@
         <p:spPr>
           <a:xfrm>
             <a:off x="7078320" y="6127560"/>
-            <a:ext cx="1766160" cy="580680"/>
+            <a:ext cx="1765080" cy="579600"/>
           </a:xfrm>
           <a:prstGeom prst="rect">
             <a:avLst/>
@@ -6185,7 +6349,7 @@
         <p:spPr>
           <a:xfrm>
             <a:off x="611640" y="1094040"/>
-            <a:ext cx="4258800" cy="397440"/>
+            <a:ext cx="4257720" cy="396360"/>
           </a:xfrm>
           <a:prstGeom prst="rect">
             <a:avLst/>
@@ -6242,8 +6406,8 @@
         </p:nvSpPr>
         <p:spPr>
           <a:xfrm>
-            <a:off x="611640" y="3706920"/>
-            <a:ext cx="4258800" cy="3297600"/>
+            <a:off x="542520" y="4457880"/>
+            <a:ext cx="4257720" cy="444240"/>
           </a:xfrm>
           <a:prstGeom prst="rect">
             <a:avLst/>
@@ -6299,18 +6463,18 @@
           <p:nvPr/>
         </p:nvGraphicFramePr>
         <p:xfrm>
-          <a:off x="611640" y="4098600"/>
-          <a:ext cx="5066280" cy="2378520"/>
+          <a:off x="611640" y="4876920"/>
+          <a:ext cx="5065560" cy="534240"/>
         </p:xfrm>
         <a:graphic>
           <a:graphicData uri="http://schemas.openxmlformats.org/drawingml/2006/table">
             <a:tbl>
               <a:tblPr/>
               <a:tblGrid>
-                <a:gridCol w="4235040"/>
-                <a:gridCol w="831600"/>
+                <a:gridCol w="4234680"/>
+                <a:gridCol w="831240"/>
               </a:tblGrid>
-              <a:tr h="1189080">
+              <a:tr h="0">
                 <a:tc>
                   <a:txBody>
                     <a:bodyPr lIns="7560" rIns="7560" tIns="7560" bIns="7560" anchor="b">
@@ -6323,14 +6487,13 @@
                         </a:lnSpc>
                       </a:pPr>
                       <a:r>
-                        <a:rPr lang="en-US" sz="1100" b="0" u="none" strike="noStrike">
+                        <a:rPr lang="en-US" sz="1100" b="1" u="none" strike="noStrike">
                           <a:solidFill>
-                            <a:srgbClr val="003248"/>
+                            <a:srgbClr val="000000"/>
                           </a:solidFill>
                           <a:effectLst/>
                           <a:uFillTx/>
                           <a:latin typeface="Arial"/>
-                          <a:ea typeface="Arial"/>
                         </a:rPr>
                         <a:t>Support Category</a:t>
                       </a:r>
@@ -6386,14 +6549,13 @@
                         </a:lnSpc>
                       </a:pPr>
                       <a:r>
-                        <a:rPr lang="en-US" sz="1100" b="0" u="none" strike="noStrike">
+                        <a:rPr lang="en-US" sz="1100" b="1" u="none" strike="noStrike">
                           <a:solidFill>
-                            <a:srgbClr val="003248"/>
+                            <a:srgbClr val="000000"/>
                           </a:solidFill>
                           <a:effectLst/>
                           <a:uFillTx/>
                           <a:latin typeface="Arial"/>
-                          <a:ea typeface="Arial"/>
                         </a:rPr>
                         <a:t>Count</a:t>
                       </a:r>
@@ -6438,7 +6600,7 @@
                   </a:tcPr>
                 </a:tc>
               </a:tr>
-              <a:tr h="1189440">
+              <a:tr h="0">
                 <a:tc>
                   <a:txBody>
                     <a:bodyPr lIns="7560" rIns="7560" tIns="7560" bIns="7560" anchor="b">
@@ -6508,7 +6670,7 @@
                       <a:noAutofit/>
                     </a:bodyPr>
                     <a:p>
-                      <a:pPr algn="r">
+                      <a:pPr>
                         <a:lnSpc>
                           <a:spcPct val="100000"/>
                         </a:lnSpc>
@@ -6616,7 +6778,7 @@
         <p:spPr>
           <a:xfrm>
             <a:off x="459360" y="188640"/>
-            <a:ext cx="8282880" cy="892800"/>
+            <a:ext cx="8281800" cy="891720"/>
           </a:xfrm>
           <a:prstGeom prst="rect">
             <a:avLst/>
@@ -6687,7 +6849,7 @@
         <p:spPr>
           <a:xfrm>
             <a:off x="187200" y="6559200"/>
-            <a:ext cx="8384760" cy="298440"/>
+            <a:ext cx="8383680" cy="297360"/>
           </a:xfrm>
           <a:prstGeom prst="rect">
             <a:avLst/>
@@ -6745,15 +6907,15 @@
         <p:spPr>
           <a:xfrm>
             <a:off x="4937760" y="1361880"/>
-            <a:ext cx="2466000" cy="1420560"/>
+            <a:ext cx="2464920" cy="1419480"/>
           </a:xfrm>
           <a:custGeom>
             <a:avLst/>
             <a:gdLst>
-              <a:gd name="textAreaLeft" fmla="*/ 0 w 2466000"/>
-              <a:gd name="textAreaRight" fmla="*/ 2466360 w 2466000"/>
-              <a:gd name="textAreaTop" fmla="*/ 0 h 1420560"/>
-              <a:gd name="textAreaBottom" fmla="*/ 1420920 h 1420560"/>
+              <a:gd name="textAreaLeft" fmla="*/ 0 w 2464920"/>
+              <a:gd name="textAreaRight" fmla="*/ 2466360 w 2464920"/>
+              <a:gd name="textAreaTop" fmla="*/ 0 h 1419480"/>
+              <a:gd name="textAreaBottom" fmla="*/ 1420920 h 1419480"/>
             </a:gdLst>
             <a:ahLst/>
             <a:cxnLst/>
@@ -6812,6 +6974,7 @@
               <a:effectLst/>
               <a:uFillTx/>
               <a:latin typeface="Arial"/>
+              <a:ea typeface="DejaVu Sans"/>
             </a:endParaRPr>
           </a:p>
         </p:txBody>
@@ -6829,7 +6992,7 @@
         <p:spPr>
           <a:xfrm>
             <a:off x="7078320" y="6127560"/>
-            <a:ext cx="1766160" cy="580680"/>
+            <a:ext cx="1765080" cy="579600"/>
           </a:xfrm>
           <a:prstGeom prst="rect">
             <a:avLst/>
@@ -6849,15 +7012,15 @@
         <p:spPr>
           <a:xfrm>
             <a:off x="4157640" y="3429000"/>
-            <a:ext cx="1767960" cy="411480"/>
+            <a:ext cx="1766880" cy="410400"/>
           </a:xfrm>
           <a:custGeom>
             <a:avLst/>
             <a:gdLst>
-              <a:gd name="textAreaLeft" fmla="*/ 0 w 1767960"/>
-              <a:gd name="textAreaRight" fmla="*/ 1768320 w 1767960"/>
-              <a:gd name="textAreaTop" fmla="*/ 0 h 411480"/>
-              <a:gd name="textAreaBottom" fmla="*/ 411840 h 411480"/>
+              <a:gd name="textAreaLeft" fmla="*/ 0 w 1766880"/>
+              <a:gd name="textAreaRight" fmla="*/ 1768320 w 1766880"/>
+              <a:gd name="textAreaTop" fmla="*/ 0 h 410400"/>
+              <a:gd name="textAreaBottom" fmla="*/ 411840 h 410400"/>
             </a:gdLst>
             <a:ahLst/>
             <a:cxnLst/>
@@ -6916,6 +7079,7 @@
               <a:effectLst/>
               <a:uFillTx/>
               <a:latin typeface="Arial"/>
+              <a:ea typeface="DejaVu Sans"/>
             </a:endParaRPr>
           </a:p>
         </p:txBody>
@@ -6941,7 +7105,7 @@
                 <a:gridCol w="1423800"/>
               </a:tblGrid>
               <a:tr h="1792800">
-                <a:tc>
+                <a:tc gridSpan="2">
                   <a:txBody>
                     <a:bodyPr lIns="45720" rIns="45720" anchor="t">
                       <a:noAutofit/>
@@ -7004,7 +7168,7 @@
                     </a:solidFill>
                   </a:tcPr>
                 </a:tc>
-                <a:tc>
+                <a:tc hMerge="1">
                   <a:txBody>
                     <a:bodyPr lIns="45720" rIns="45720" anchor="t">
                       <a:noAutofit/>
@@ -7050,7 +7214,7 @@
                     </a:solidFill>
                   </a:tcPr>
                 </a:tc>
-                <a:tc>
+                <a:tc gridSpan="2">
                   <a:txBody>
                     <a:bodyPr lIns="45720" rIns="45720" anchor="t">
                       <a:noAutofit/>
@@ -7113,7 +7277,7 @@
                     </a:solidFill>
                   </a:tcPr>
                 </a:tc>
-                <a:tc>
+                <a:tc hMerge="1">
                   <a:txBody>
                     <a:bodyPr lIns="45720" rIns="45720" anchor="t">
                       <a:noAutofit/>
@@ -7719,7 +7883,7 @@
         <p:spPr>
           <a:xfrm>
             <a:off x="395280" y="2314440"/>
-            <a:ext cx="5198400" cy="1340640"/>
+            <a:ext cx="5197320" cy="1339560"/>
           </a:xfrm>
           <a:prstGeom prst="rect">
             <a:avLst/>
@@ -7814,7 +7978,7 @@
         <p:spPr>
           <a:xfrm>
             <a:off x="459360" y="188640"/>
-            <a:ext cx="8282880" cy="1299240"/>
+            <a:ext cx="8281800" cy="1298160"/>
           </a:xfrm>
           <a:prstGeom prst="rect">
             <a:avLst/>
@@ -7885,7 +8049,7 @@
         <p:spPr>
           <a:xfrm>
             <a:off x="209880" y="3467160"/>
-            <a:ext cx="4222800" cy="435600"/>
+            <a:ext cx="4221720" cy="434520"/>
           </a:xfrm>
           <a:prstGeom prst="rect">
             <a:avLst/>
@@ -7961,7 +8125,7 @@
         <p:spPr>
           <a:xfrm>
             <a:off x="187200" y="6559200"/>
-            <a:ext cx="8384760" cy="298440"/>
+            <a:ext cx="8383680" cy="297360"/>
           </a:xfrm>
           <a:prstGeom prst="rect">
             <a:avLst/>
@@ -8023,7 +8187,7 @@
         <p:spPr>
           <a:xfrm>
             <a:off x="7078320" y="6127560"/>
-            <a:ext cx="1766160" cy="580680"/>
+            <a:ext cx="1765080" cy="579600"/>
           </a:xfrm>
           <a:prstGeom prst="rect">
             <a:avLst/>
@@ -8042,7 +8206,7 @@
         </p:nvGraphicFramePr>
         <p:xfrm>
           <a:off x="209880" y="1512360"/>
-          <a:ext cx="4223160" cy="1626480"/>
+          <a:ext cx="4223160" cy="1758960"/>
         </p:xfrm>
         <a:graphic>
           <a:graphicData uri="http://schemas.openxmlformats.org/drawingml/2006/table">
@@ -8187,6 +8351,11 @@
                       <a:noAutofit/>
                     </a:bodyPr>
                     <a:p>
+                      <a:pPr>
+                        <a:lnSpc>
+                          <a:spcPct val="100000"/>
+                        </a:lnSpc>
+                      </a:pPr>
                       <a:endParaRPr lang="en-US" sz="1800" b="0" u="none" strike="noStrike">
                         <a:solidFill>
                           <a:srgbClr val="000000"/>
@@ -8233,6 +8402,11 @@
                       <a:noAutofit/>
                     </a:bodyPr>
                     <a:p>
+                      <a:pPr>
+                        <a:lnSpc>
+                          <a:spcPct val="100000"/>
+                        </a:lnSpc>
+                      </a:pPr>
                       <a:endParaRPr lang="en-US" sz="1800" b="0" u="none" strike="noStrike">
                         <a:solidFill>
                           <a:srgbClr val="000000"/>
@@ -8286,7 +8460,7 @@
         </p:nvGraphicFramePr>
         <p:xfrm>
           <a:off x="4711320" y="1512360"/>
-          <a:ext cx="4141440" cy="1626480"/>
+          <a:ext cx="4141440" cy="1758960"/>
         </p:xfrm>
         <a:graphic>
           <a:graphicData uri="http://schemas.openxmlformats.org/drawingml/2006/table">
@@ -8431,6 +8605,11 @@
                       <a:noAutofit/>
                     </a:bodyPr>
                     <a:p>
+                      <a:pPr>
+                        <a:lnSpc>
+                          <a:spcPct val="100000"/>
+                        </a:lnSpc>
+                      </a:pPr>
                       <a:endParaRPr lang="en-US" sz="1800" b="0" u="none" strike="noStrike">
                         <a:solidFill>
                           <a:srgbClr val="000000"/>
@@ -8477,6 +8656,11 @@
                       <a:noAutofit/>
                     </a:bodyPr>
                     <a:p>
+                      <a:pPr>
+                        <a:lnSpc>
+                          <a:spcPct val="100000"/>
+                        </a:lnSpc>
+                      </a:pPr>
                       <a:endParaRPr lang="en-US" sz="1800" b="0" u="none" strike="noStrike">
                         <a:solidFill>
                           <a:srgbClr val="000000"/>
@@ -8531,7 +8715,7 @@
         <p:spPr>
           <a:xfrm>
             <a:off x="209880" y="1050120"/>
-            <a:ext cx="5028120" cy="450360"/>
+            <a:ext cx="5027040" cy="449280"/>
           </a:xfrm>
           <a:prstGeom prst="rect">
             <a:avLst/>
@@ -8589,7 +8773,7 @@
         <p:spPr>
           <a:xfrm>
             <a:off x="4710960" y="1069560"/>
-            <a:ext cx="5028120" cy="450360"/>
+            <a:ext cx="5027040" cy="449280"/>
           </a:xfrm>
           <a:prstGeom prst="rect">
             <a:avLst/>
@@ -8646,7 +8830,7 @@
         </p:nvGraphicFramePr>
         <p:xfrm>
           <a:off x="209880" y="3838320"/>
-          <a:ext cx="4063320" cy="2516040"/>
+          <a:ext cx="4063320" cy="366480"/>
         </p:xfrm>
         <a:graphic>
           <a:graphicData uri="http://schemas.openxmlformats.org/drawingml/2006/table">
@@ -8656,7 +8840,7 @@
                 <a:gridCol w="3062880"/>
                 <a:gridCol w="1000800"/>
               </a:tblGrid>
-              <a:tr h="1257840">
+              <a:tr h="0">
                 <a:tc>
                   <a:txBody>
                     <a:bodyPr lIns="7560" rIns="7560" tIns="7560" bIns="7560" anchor="b">
@@ -8671,12 +8855,11 @@
                       <a:r>
                         <a:rPr lang="en-US" sz="1100" b="1" u="none" strike="noStrike">
                           <a:solidFill>
-                            <a:srgbClr val="003248"/>
+                            <a:srgbClr val="000000"/>
                           </a:solidFill>
                           <a:effectLst/>
                           <a:uFillTx/>
-                          <a:latin typeface="Helvetica-Bold"/>
-                          <a:ea typeface="Helvetica-Bold"/>
+                          <a:latin typeface="Arial"/>
                         </a:rPr>
                         <a:t>Org name</a:t>
                       </a:r>
@@ -8734,12 +8917,11 @@
                       <a:r>
                         <a:rPr lang="en-US" sz="1100" b="1" u="none" strike="noStrike">
                           <a:solidFill>
-                            <a:srgbClr val="003248"/>
+                            <a:srgbClr val="000000"/>
                           </a:solidFill>
                           <a:effectLst/>
                           <a:uFillTx/>
-                          <a:latin typeface="Helvetica-Bold"/>
-                          <a:ea typeface="Helvetica-Bold"/>
+                          <a:latin typeface="Arial"/>
                         </a:rPr>
                         <a:t>Count</a:t>
                       </a:r>
@@ -8784,7 +8966,7 @@
                   </a:tcPr>
                 </a:tc>
               </a:tr>
-              <a:tr h="1258200">
+              <a:tr h="0">
                 <a:tc>
                   <a:txBody>
                     <a:bodyPr lIns="7560" rIns="7560" tIns="7560" bIns="7560" anchor="b">
@@ -8854,7 +9036,7 @@
                       <a:noAutofit/>
                     </a:bodyPr>
                     <a:p>
-                      <a:pPr algn="ctr">
+                      <a:pPr>
                         <a:lnSpc>
                           <a:spcPct val="100000"/>
                         </a:lnSpc>
